--- a/Сессия 7/Otchet_po_uchebnoi_praktike.pptx
+++ b/Сессия 7/Otchet_po_uchebnoi_praktike.pptx
@@ -3863,7 +3863,7 @@
         </p:nvSpPr>
         <p:spPr>
           <a:xfrm>
-            <a:off x="0" y="846138"/>
+            <a:off x="0" y="943933"/>
             <a:ext cx="3203848" cy="5978560"/>
           </a:xfrm>
           <a:prstGeom prst="rect">
@@ -4261,7 +4261,7 @@
         </p:blipFill>
         <p:spPr>
           <a:xfrm>
-            <a:off x="3059832" y="3804930"/>
+            <a:off x="3661048" y="3830907"/>
             <a:ext cx="4715739" cy="2752455"/>
           </a:xfrm>
           <a:prstGeom prst="rect">
@@ -14189,7 +14189,7 @@
         </p:nvSpPr>
         <p:spPr>
           <a:xfrm>
-            <a:off x="89756" y="1679247"/>
+            <a:off x="71039" y="2018759"/>
             <a:ext cx="2799757" cy="4660250"/>
           </a:xfrm>
           <a:prstGeom prst="rect">
@@ -14513,7 +14513,7 @@
         </p:nvSpPr>
         <p:spPr>
           <a:xfrm>
-            <a:off x="25168" y="639049"/>
+            <a:off x="125768" y="640981"/>
             <a:ext cx="9118832" cy="1077218"/>
           </a:xfrm>
           <a:prstGeom prst="rect">
@@ -14649,7 +14649,7 @@
         </p:nvSpPr>
         <p:spPr>
           <a:xfrm>
-            <a:off x="16408" y="1310566"/>
+            <a:off x="16408" y="1925474"/>
             <a:ext cx="3043424" cy="4383251"/>
           </a:xfrm>
           <a:prstGeom prst="rect">
@@ -15020,7 +15020,7 @@
         </p:nvSpPr>
         <p:spPr>
           <a:xfrm>
-            <a:off x="16408" y="368915"/>
+            <a:off x="16408" y="626477"/>
             <a:ext cx="9127592" cy="830997"/>
           </a:xfrm>
           <a:prstGeom prst="rect">
@@ -15154,7 +15154,7 @@
         </p:blipFill>
         <p:spPr>
           <a:xfrm>
-            <a:off x="3059832" y="1464240"/>
+            <a:off x="3076240" y="2736345"/>
             <a:ext cx="6067760" cy="3692952"/>
           </a:xfrm>
           <a:prstGeom prst="rect">
@@ -15294,7 +15294,7 @@
         </p:nvSpPr>
         <p:spPr>
           <a:xfrm>
-            <a:off x="0" y="954921"/>
+            <a:off x="0" y="1899264"/>
             <a:ext cx="3275856" cy="3983142"/>
           </a:xfrm>
           <a:prstGeom prst="rect">
@@ -15534,7 +15534,7 @@
         </p:nvSpPr>
         <p:spPr>
           <a:xfrm>
-            <a:off x="784" y="308590"/>
+            <a:off x="67228" y="385552"/>
             <a:ext cx="9143216" cy="646331"/>
           </a:xfrm>
           <a:prstGeom prst="rect">
@@ -15605,8 +15605,8 @@
         </p:blipFill>
         <p:spPr>
           <a:xfrm>
-            <a:off x="4042814" y="954921"/>
-            <a:ext cx="4967493" cy="2898641"/>
+            <a:off x="4211960" y="1053621"/>
+            <a:ext cx="4798347" cy="2799941"/>
           </a:xfrm>
           <a:prstGeom prst="rect">
             <a:avLst/>
@@ -15640,7 +15640,7 @@
         </p:blipFill>
         <p:spPr>
           <a:xfrm>
-            <a:off x="2843808" y="3932793"/>
+            <a:off x="2987824" y="3890835"/>
             <a:ext cx="4645465" cy="2705686"/>
           </a:xfrm>
           <a:prstGeom prst="rect">
@@ -15906,7 +15906,7 @@
         </p:nvSpPr>
         <p:spPr>
           <a:xfrm>
-            <a:off x="6791645" y="3802998"/>
+            <a:off x="6808857" y="4317852"/>
             <a:ext cx="2386608" cy="392907"/>
           </a:xfrm>
         </p:spPr>
@@ -15943,7 +15943,7 @@
         </p:nvSpPr>
         <p:spPr>
           <a:xfrm>
-            <a:off x="0" y="863768"/>
+            <a:off x="0" y="1440116"/>
             <a:ext cx="2759402" cy="5306581"/>
           </a:xfrm>
           <a:prstGeom prst="rect">
@@ -16200,7 +16200,7 @@
         </p:nvSpPr>
         <p:spPr>
           <a:xfrm>
-            <a:off x="0" y="274638"/>
+            <a:off x="-12331" y="537797"/>
             <a:ext cx="9144000" cy="646331"/>
           </a:xfrm>
           <a:prstGeom prst="rect">
@@ -16271,7 +16271,7 @@
         </p:blipFill>
         <p:spPr>
           <a:xfrm>
-            <a:off x="5504925" y="916980"/>
+            <a:off x="5500012" y="1393919"/>
             <a:ext cx="3639075" cy="2886018"/>
           </a:xfrm>
           <a:prstGeom prst="rect">

--- a/Сессия 7/Otchet_po_uchebnoi_praktike.pptx
+++ b/Сессия 7/Otchet_po_uchebnoi_praktike.pptx
@@ -5,7 +5,7 @@
     <p:sldMasterId id="2147483648" r:id="rId1"/>
   </p:sldMasterIdLst>
   <p:notesMasterIdLst>
-    <p:notesMasterId r:id="rId17"/>
+    <p:notesMasterId r:id="rId18"/>
   </p:notesMasterIdLst>
   <p:sldIdLst>
     <p:sldId id="256" r:id="rId2"/>
@@ -13,18 +13,19 @@
     <p:sldId id="258" r:id="rId4"/>
     <p:sldId id="259" r:id="rId5"/>
     <p:sldId id="263" r:id="rId6"/>
-    <p:sldId id="260" r:id="rId7"/>
-    <p:sldId id="261" r:id="rId8"/>
-    <p:sldId id="264" r:id="rId9"/>
-    <p:sldId id="265" r:id="rId10"/>
-    <p:sldId id="266" r:id="rId11"/>
-    <p:sldId id="267" r:id="rId12"/>
-    <p:sldId id="268" r:id="rId13"/>
-    <p:sldId id="269" r:id="rId14"/>
-    <p:sldId id="262" r:id="rId15"/>
-    <p:sldId id="270" r:id="rId16"/>
+    <p:sldId id="271" r:id="rId7"/>
+    <p:sldId id="260" r:id="rId8"/>
+    <p:sldId id="261" r:id="rId9"/>
+    <p:sldId id="264" r:id="rId10"/>
+    <p:sldId id="265" r:id="rId11"/>
+    <p:sldId id="266" r:id="rId12"/>
+    <p:sldId id="267" r:id="rId13"/>
+    <p:sldId id="268" r:id="rId14"/>
+    <p:sldId id="269" r:id="rId15"/>
+    <p:sldId id="262" r:id="rId16"/>
+    <p:sldId id="270" r:id="rId17"/>
   </p:sldIdLst>
-  <p:sldSz cx="9144000" cy="6858000" type="screen4x3"/>
+  <p:sldSz cx="12192000" cy="6858000"/>
   <p:notesSz cx="6858000" cy="9144000"/>
   <p:defaultTextStyle>
     <a:defPPr>
@@ -124,12 +125,12 @@
   <p:extLst>
     <p:ext uri="{EFAFB233-063F-42B5-8137-9DF3F51BA10A}">
       <p15:sldGuideLst xmlns:p15="http://schemas.microsoft.com/office/powerpoint/2012/main">
-        <p15:guide id="1" orient="horz" pos="2160">
+        <p15:guide id="1" orient="horz" pos="2160" userDrawn="1">
           <p15:clr>
             <a:srgbClr val="A4A3A4"/>
           </p15:clr>
         </p15:guide>
-        <p15:guide id="2" pos="2880">
+        <p15:guide id="2" pos="3840" userDrawn="1">
           <p15:clr>
             <a:srgbClr val="A4A3A4"/>
           </p15:clr>
@@ -240,8 +241,8 @@
         </p:nvSpPr>
         <p:spPr>
           <a:xfrm>
-            <a:off x="1371600" y="1143000"/>
-            <a:ext cx="4114800" cy="3086100"/>
+            <a:off x="685800" y="1143000"/>
+            <a:ext cx="5486400" cy="3086100"/>
           </a:xfrm>
           <a:prstGeom prst="rect">
             <a:avLst/>
@@ -516,7 +517,12 @@
             <p:ph type="sldImg"/>
           </p:nvPr>
         </p:nvSpPr>
-        <p:spPr/>
+        <p:spPr>
+          <a:xfrm>
+            <a:off x="685800" y="1143000"/>
+            <a:ext cx="5486400" cy="3086100"/>
+          </a:xfrm>
+        </p:spPr>
       </p:sp>
       <p:sp>
         <p:nvSpPr>
@@ -554,7 +560,7 @@
           <a:p>
             <a:fld id="{299C214C-7B51-4D5E-B8D7-C469CB1E0E27}" type="slidenum">
               <a:rPr lang="ru-RU" smtClean="0"/>
-              <a:t>8</a:t>
+              <a:t>9</a:t>
             </a:fld>
             <a:endParaRPr lang="ru-RU"/>
           </a:p>
@@ -602,8 +608,8 @@
         </p:nvSpPr>
         <p:spPr>
           <a:xfrm>
-            <a:off x="685800" y="2130425"/>
-            <a:ext cx="7772400" cy="1470025"/>
+            <a:off x="914400" y="2130426"/>
+            <a:ext cx="10363200" cy="1470025"/>
           </a:xfrm>
         </p:spPr>
         <p:txBody>
@@ -629,8 +635,8 @@
         </p:nvSpPr>
         <p:spPr>
           <a:xfrm>
-            <a:off x="1371600" y="3886200"/>
-            <a:ext cx="6400800" cy="1752600"/>
+            <a:off x="1828800" y="3886200"/>
+            <a:ext cx="8534400" cy="1752600"/>
           </a:xfrm>
         </p:spPr>
         <p:txBody>
@@ -1010,8 +1016,8 @@
         </p:nvSpPr>
         <p:spPr>
           <a:xfrm>
-            <a:off x="6629400" y="274638"/>
-            <a:ext cx="2057400" cy="5851525"/>
+            <a:off x="8839200" y="274639"/>
+            <a:ext cx="2743200" cy="5851525"/>
           </a:xfrm>
         </p:spPr>
         <p:txBody>
@@ -1037,8 +1043,8 @@
         </p:nvSpPr>
         <p:spPr>
           <a:xfrm>
-            <a:off x="457200" y="274638"/>
-            <a:ext cx="6019800" cy="5851525"/>
+            <a:off x="609600" y="274639"/>
+            <a:ext cx="8026400" cy="5851525"/>
           </a:xfrm>
         </p:spPr>
         <p:txBody>
@@ -1356,8 +1362,8 @@
         </p:nvSpPr>
         <p:spPr>
           <a:xfrm>
-            <a:off x="722313" y="4406900"/>
-            <a:ext cx="7772400" cy="1362075"/>
+            <a:off x="963084" y="4406901"/>
+            <a:ext cx="10363200" cy="1362075"/>
           </a:xfrm>
         </p:spPr>
         <p:txBody>
@@ -1387,8 +1393,8 @@
         </p:nvSpPr>
         <p:spPr>
           <a:xfrm>
-            <a:off x="722313" y="2906713"/>
-            <a:ext cx="7772400" cy="1500187"/>
+            <a:off x="963084" y="2906713"/>
+            <a:ext cx="10363200" cy="1500187"/>
           </a:xfrm>
         </p:spPr>
         <p:txBody>
@@ -1623,8 +1629,8 @@
         </p:nvSpPr>
         <p:spPr>
           <a:xfrm>
-            <a:off x="457200" y="1600200"/>
-            <a:ext cx="4038600" cy="4525963"/>
+            <a:off x="609600" y="1600201"/>
+            <a:ext cx="5384800" cy="4525963"/>
           </a:xfrm>
         </p:spPr>
         <p:txBody>
@@ -1707,8 +1713,8 @@
         </p:nvSpPr>
         <p:spPr>
           <a:xfrm>
-            <a:off x="4648200" y="1600200"/>
-            <a:ext cx="4038600" cy="4525963"/>
+            <a:off x="6197600" y="1600201"/>
+            <a:ext cx="5384800" cy="4525963"/>
           </a:xfrm>
         </p:spPr>
         <p:txBody>
@@ -1912,8 +1918,8 @@
         </p:nvSpPr>
         <p:spPr>
           <a:xfrm>
-            <a:off x="457200" y="1535113"/>
-            <a:ext cx="4040188" cy="639762"/>
+            <a:off x="609600" y="1535113"/>
+            <a:ext cx="5386917" cy="639762"/>
           </a:xfrm>
         </p:spPr>
         <p:txBody>
@@ -1977,8 +1983,8 @@
         </p:nvSpPr>
         <p:spPr>
           <a:xfrm>
-            <a:off x="457200" y="2174875"/>
-            <a:ext cx="4040188" cy="3951288"/>
+            <a:off x="609600" y="2174875"/>
+            <a:ext cx="5386917" cy="3951288"/>
           </a:xfrm>
         </p:spPr>
         <p:txBody>
@@ -2061,8 +2067,8 @@
         </p:nvSpPr>
         <p:spPr>
           <a:xfrm>
-            <a:off x="4645025" y="1535113"/>
-            <a:ext cx="4041775" cy="639762"/>
+            <a:off x="6193368" y="1535113"/>
+            <a:ext cx="5389033" cy="639762"/>
           </a:xfrm>
         </p:spPr>
         <p:txBody>
@@ -2126,8 +2132,8 @@
         </p:nvSpPr>
         <p:spPr>
           <a:xfrm>
-            <a:off x="4645025" y="2174875"/>
-            <a:ext cx="4041775" cy="3951288"/>
+            <a:off x="6193368" y="2174875"/>
+            <a:ext cx="5389033" cy="3951288"/>
           </a:xfrm>
         </p:spPr>
         <p:txBody>
@@ -2517,8 +2523,8 @@
         </p:nvSpPr>
         <p:spPr>
           <a:xfrm>
-            <a:off x="457200" y="273050"/>
-            <a:ext cx="3008313" cy="1162050"/>
+            <a:off x="609601" y="273050"/>
+            <a:ext cx="4011084" cy="1162050"/>
           </a:xfrm>
         </p:spPr>
         <p:txBody>
@@ -2548,8 +2554,8 @@
         </p:nvSpPr>
         <p:spPr>
           <a:xfrm>
-            <a:off x="3575050" y="273050"/>
-            <a:ext cx="5111750" cy="5853113"/>
+            <a:off x="4766733" y="273051"/>
+            <a:ext cx="6815667" cy="5853113"/>
           </a:xfrm>
         </p:spPr>
         <p:txBody>
@@ -2632,8 +2638,8 @@
         </p:nvSpPr>
         <p:spPr>
           <a:xfrm>
-            <a:off x="457200" y="1435100"/>
-            <a:ext cx="3008313" cy="4691063"/>
+            <a:off x="609601" y="1435101"/>
+            <a:ext cx="4011084" cy="4691063"/>
           </a:xfrm>
         </p:spPr>
         <p:txBody>
@@ -2792,8 +2798,8 @@
         </p:nvSpPr>
         <p:spPr>
           <a:xfrm>
-            <a:off x="1792288" y="4800600"/>
-            <a:ext cx="5486400" cy="566738"/>
+            <a:off x="2389717" y="4800600"/>
+            <a:ext cx="7315200" cy="566738"/>
           </a:xfrm>
         </p:spPr>
         <p:txBody>
@@ -2823,8 +2829,8 @@
         </p:nvSpPr>
         <p:spPr>
           <a:xfrm>
-            <a:off x="1792288" y="612775"/>
-            <a:ext cx="5486400" cy="4114800"/>
+            <a:off x="2389717" y="612775"/>
+            <a:ext cx="7315200" cy="4114800"/>
           </a:xfrm>
         </p:spPr>
         <p:txBody>
@@ -2884,8 +2890,8 @@
         </p:nvSpPr>
         <p:spPr>
           <a:xfrm>
-            <a:off x="1792288" y="5367338"/>
-            <a:ext cx="5486400" cy="804862"/>
+            <a:off x="2389717" y="5367338"/>
+            <a:ext cx="7315200" cy="804862"/>
           </a:xfrm>
         </p:spPr>
         <p:txBody>
@@ -3049,8 +3055,8 @@
         </p:nvSpPr>
         <p:spPr>
           <a:xfrm>
-            <a:off x="457200" y="274638"/>
-            <a:ext cx="8229600" cy="1143000"/>
+            <a:off x="609600" y="274638"/>
+            <a:ext cx="10972800" cy="1143000"/>
           </a:xfrm>
           <a:prstGeom prst="rect">
             <a:avLst/>
@@ -3081,8 +3087,8 @@
         </p:nvSpPr>
         <p:spPr>
           <a:xfrm>
-            <a:off x="457200" y="1600200"/>
-            <a:ext cx="8229600" cy="4525963"/>
+            <a:off x="609600" y="1600201"/>
+            <a:ext cx="10972800" cy="4525963"/>
           </a:xfrm>
           <a:prstGeom prst="rect">
             <a:avLst/>
@@ -3142,8 +3148,8 @@
         </p:nvSpPr>
         <p:spPr>
           <a:xfrm>
-            <a:off x="457200" y="6356350"/>
-            <a:ext cx="2133600" cy="365125"/>
+            <a:off x="609600" y="6356351"/>
+            <a:ext cx="2844800" cy="365125"/>
           </a:xfrm>
           <a:prstGeom prst="rect">
             <a:avLst/>
@@ -3183,8 +3189,8 @@
         </p:nvSpPr>
         <p:spPr>
           <a:xfrm>
-            <a:off x="3124200" y="6356350"/>
-            <a:ext cx="2895600" cy="365125"/>
+            <a:off x="4165600" y="6356351"/>
+            <a:ext cx="3860800" cy="365125"/>
           </a:xfrm>
           <a:prstGeom prst="rect">
             <a:avLst/>
@@ -3220,8 +3226,8 @@
         </p:nvSpPr>
         <p:spPr>
           <a:xfrm>
-            <a:off x="6553200" y="6356350"/>
-            <a:ext cx="2133600" cy="365125"/>
+            <a:off x="8737600" y="6356351"/>
+            <a:ext cx="2844800" cy="365125"/>
           </a:xfrm>
           <a:prstGeom prst="rect">
             <a:avLst/>
@@ -3552,8 +3558,8 @@
         </p:nvSpPr>
         <p:spPr>
           <a:xfrm>
-            <a:off x="395536" y="1700809"/>
-            <a:ext cx="8062664" cy="1899642"/>
+            <a:off x="695400" y="1700809"/>
+            <a:ext cx="10945216" cy="1899642"/>
           </a:xfrm>
         </p:spPr>
         <p:txBody>
@@ -3581,89 +3587,6 @@
                 <a:cs typeface="Times New Roman" panose="02020603050405020304" pitchFamily="18" charset="0"/>
               </a:rPr>
               <a:t>ПМ.02 Осуществление интеграции программных модулей</a:t>
-            </a:r>
-          </a:p>
-        </p:txBody>
-      </p:sp>
-      <p:sp>
-        <p:nvSpPr>
-          <p:cNvPr id="3" name="Подзаголовок 2"/>
-          <p:cNvSpPr>
-            <a:spLocks noGrp="1"/>
-          </p:cNvSpPr>
-          <p:nvPr>
-            <p:ph type="subTitle" idx="1"/>
-          </p:nvPr>
-        </p:nvSpPr>
-        <p:spPr>
-          <a:xfrm>
-            <a:off x="4716016" y="3886200"/>
-            <a:ext cx="4427984" cy="2423120"/>
-          </a:xfrm>
-        </p:spPr>
-        <p:txBody>
-          <a:bodyPr>
-            <a:normAutofit/>
-          </a:bodyPr>
-          <a:lstStyle/>
-          <a:p>
-            <a:pPr algn="l"/>
-            <a:r>
-              <a:rPr lang="ru-RU" sz="2000" dirty="0">
-                <a:latin typeface="Times New Roman" panose="02020603050405020304" pitchFamily="18" charset="0"/>
-                <a:cs typeface="Times New Roman" panose="02020603050405020304" pitchFamily="18" charset="0"/>
-              </a:rPr>
-              <a:t>Студент Исупов Дмитрий Андреевич</a:t>
-            </a:r>
-          </a:p>
-          <a:p>
-            <a:pPr algn="l"/>
-            <a:r>
-              <a:rPr lang="ru-RU" sz="2000" dirty="0">
-                <a:latin typeface="Times New Roman" panose="02020603050405020304" pitchFamily="18" charset="0"/>
-                <a:cs typeface="Times New Roman" panose="02020603050405020304" pitchFamily="18" charset="0"/>
-              </a:rPr>
-              <a:t> группа 23П-2</a:t>
-            </a:r>
-          </a:p>
-          <a:p>
-            <a:pPr algn="l"/>
-            <a:r>
-              <a:rPr lang="ru-RU" sz="2000" dirty="0" err="1">
-                <a:latin typeface="Times New Roman" panose="02020603050405020304" pitchFamily="18" charset="0"/>
-                <a:cs typeface="Times New Roman" panose="02020603050405020304" pitchFamily="18" charset="0"/>
-              </a:rPr>
-              <a:t>Специалоность</a:t>
-            </a:r>
-            <a:r>
-              <a:rPr lang="ru-RU" sz="2000" dirty="0">
-                <a:latin typeface="Times New Roman" panose="02020603050405020304" pitchFamily="18" charset="0"/>
-                <a:cs typeface="Times New Roman" panose="02020603050405020304" pitchFamily="18" charset="0"/>
-              </a:rPr>
-              <a:t> 09.02.07 Информационные системы и программирование</a:t>
-            </a:r>
-          </a:p>
-          <a:p>
-            <a:pPr algn="l"/>
-            <a:r>
-              <a:rPr lang="ru-RU" sz="2000" dirty="0">
-                <a:latin typeface="Times New Roman" panose="02020603050405020304" pitchFamily="18" charset="0"/>
-                <a:cs typeface="Times New Roman" panose="02020603050405020304" pitchFamily="18" charset="0"/>
-              </a:rPr>
-              <a:t>Руководитель практики от колледжа</a:t>
-            </a:r>
-            <a:br>
-              <a:rPr lang="ru-RU" sz="2000" dirty="0">
-                <a:latin typeface="Times New Roman" panose="02020603050405020304" pitchFamily="18" charset="0"/>
-                <a:cs typeface="Times New Roman" panose="02020603050405020304" pitchFamily="18" charset="0"/>
-              </a:rPr>
-            </a:br>
-            <a:r>
-              <a:rPr lang="ru-RU" sz="2000" dirty="0">
-                <a:latin typeface="Times New Roman" panose="02020603050405020304" pitchFamily="18" charset="0"/>
-                <a:cs typeface="Times New Roman" panose="02020603050405020304" pitchFamily="18" charset="0"/>
-              </a:rPr>
-              <a:t>Калинин Арсений Олегович</a:t>
             </a:r>
           </a:p>
         </p:txBody>
@@ -3676,8 +3599,8 @@
         </p:nvSpPr>
         <p:spPr>
           <a:xfrm>
-            <a:off x="1115616" y="332656"/>
-            <a:ext cx="7128792" cy="1200329"/>
+            <a:off x="1828800" y="332657"/>
+            <a:ext cx="8803704" cy="923330"/>
           </a:xfrm>
           <a:prstGeom prst="rect">
             <a:avLst/>
@@ -3729,7 +3652,7 @@
         </p:nvSpPr>
         <p:spPr>
           <a:xfrm>
-            <a:off x="3347864" y="6309320"/>
+            <a:off x="4871864" y="6309320"/>
             <a:ext cx="2304256" cy="369332"/>
           </a:xfrm>
           <a:prstGeom prst="rect">
@@ -3754,6 +3677,471 @@
           </a:p>
         </p:txBody>
       </p:sp>
+      <p:sp>
+        <p:nvSpPr>
+          <p:cNvPr id="7" name="Подзаголовок 6">
+            <a:extLst>
+              <a:ext uri="{FF2B5EF4-FFF2-40B4-BE49-F238E27FC236}">
+                <a16:creationId xmlns:a16="http://schemas.microsoft.com/office/drawing/2014/main" id="{1DBC0EC8-FDED-D477-2684-3D9573E7A601}"/>
+              </a:ext>
+            </a:extLst>
+          </p:cNvPr>
+          <p:cNvSpPr>
+            <a:spLocks noGrp="1"/>
+          </p:cNvSpPr>
+          <p:nvPr>
+            <p:ph type="subTitle" idx="1"/>
+          </p:nvPr>
+        </p:nvSpPr>
+        <p:spPr/>
+        <p:txBody>
+          <a:bodyPr/>
+          <a:lstStyle/>
+          <a:p>
+            <a:r>
+              <a:rPr lang="ru-RU" dirty="0"/>
+              <a:t> </a:t>
+            </a:r>
+          </a:p>
+        </p:txBody>
+      </p:sp>
+      <p:sp>
+        <p:nvSpPr>
+          <p:cNvPr id="10" name="Text 2">
+            <a:extLst>
+              <a:ext uri="{FF2B5EF4-FFF2-40B4-BE49-F238E27FC236}">
+                <a16:creationId xmlns:a16="http://schemas.microsoft.com/office/drawing/2014/main" id="{FBD7BE1C-B01F-823D-AFE4-712C65A33E87}"/>
+              </a:ext>
+            </a:extLst>
+          </p:cNvPr>
+          <p:cNvSpPr/>
+          <p:nvPr/>
+        </p:nvSpPr>
+        <p:spPr>
+          <a:xfrm>
+            <a:off x="7512606" y="3786106"/>
+            <a:ext cx="4939188" cy="1952789"/>
+          </a:xfrm>
+          <a:prstGeom prst="rect">
+            <a:avLst/>
+          </a:prstGeom>
+          <a:noFill/>
+          <a:ln/>
+        </p:spPr>
+        <p:txBody>
+          <a:bodyPr wrap="square" lIns="0" tIns="0" rIns="0" bIns="0" rtlCol="0" anchor="t"/>
+          <a:lstStyle>
+            <a:defPPr>
+              <a:defRPr lang="ru-RU"/>
+            </a:defPPr>
+            <a:lvl1pPr marL="0" algn="l" defTabSz="914400" rtl="0" eaLnBrk="1" latinLnBrk="0" hangingPunct="1">
+              <a:defRPr sz="1800" kern="1200">
+                <a:solidFill>
+                  <a:schemeClr val="tx1"/>
+                </a:solidFill>
+                <a:latin typeface="+mn-lt"/>
+                <a:ea typeface="+mn-ea"/>
+                <a:cs typeface="+mn-cs"/>
+              </a:defRPr>
+            </a:lvl1pPr>
+            <a:lvl2pPr marL="457200" algn="l" defTabSz="914400" rtl="0" eaLnBrk="1" latinLnBrk="0" hangingPunct="1">
+              <a:defRPr sz="1800" kern="1200">
+                <a:solidFill>
+                  <a:schemeClr val="tx1"/>
+                </a:solidFill>
+                <a:latin typeface="+mn-lt"/>
+                <a:ea typeface="+mn-ea"/>
+                <a:cs typeface="+mn-cs"/>
+              </a:defRPr>
+            </a:lvl2pPr>
+            <a:lvl3pPr marL="914400" algn="l" defTabSz="914400" rtl="0" eaLnBrk="1" latinLnBrk="0" hangingPunct="1">
+              <a:defRPr sz="1800" kern="1200">
+                <a:solidFill>
+                  <a:schemeClr val="tx1"/>
+                </a:solidFill>
+                <a:latin typeface="+mn-lt"/>
+                <a:ea typeface="+mn-ea"/>
+                <a:cs typeface="+mn-cs"/>
+              </a:defRPr>
+            </a:lvl3pPr>
+            <a:lvl4pPr marL="1371600" algn="l" defTabSz="914400" rtl="0" eaLnBrk="1" latinLnBrk="0" hangingPunct="1">
+              <a:defRPr sz="1800" kern="1200">
+                <a:solidFill>
+                  <a:schemeClr val="tx1"/>
+                </a:solidFill>
+                <a:latin typeface="+mn-lt"/>
+                <a:ea typeface="+mn-ea"/>
+                <a:cs typeface="+mn-cs"/>
+              </a:defRPr>
+            </a:lvl4pPr>
+            <a:lvl5pPr marL="1828800" algn="l" defTabSz="914400" rtl="0" eaLnBrk="1" latinLnBrk="0" hangingPunct="1">
+              <a:defRPr sz="1800" kern="1200">
+                <a:solidFill>
+                  <a:schemeClr val="tx1"/>
+                </a:solidFill>
+                <a:latin typeface="+mn-lt"/>
+                <a:ea typeface="+mn-ea"/>
+                <a:cs typeface="+mn-cs"/>
+              </a:defRPr>
+            </a:lvl5pPr>
+            <a:lvl6pPr marL="2286000" algn="l" defTabSz="914400" rtl="0" eaLnBrk="1" latinLnBrk="0" hangingPunct="1">
+              <a:defRPr sz="1800" kern="1200">
+                <a:solidFill>
+                  <a:schemeClr val="tx1"/>
+                </a:solidFill>
+                <a:latin typeface="+mn-lt"/>
+                <a:ea typeface="+mn-ea"/>
+                <a:cs typeface="+mn-cs"/>
+              </a:defRPr>
+            </a:lvl6pPr>
+            <a:lvl7pPr marL="2743200" algn="l" defTabSz="914400" rtl="0" eaLnBrk="1" latinLnBrk="0" hangingPunct="1">
+              <a:defRPr sz="1800" kern="1200">
+                <a:solidFill>
+                  <a:schemeClr val="tx1"/>
+                </a:solidFill>
+                <a:latin typeface="+mn-lt"/>
+                <a:ea typeface="+mn-ea"/>
+                <a:cs typeface="+mn-cs"/>
+              </a:defRPr>
+            </a:lvl7pPr>
+            <a:lvl8pPr marL="3200400" algn="l" defTabSz="914400" rtl="0" eaLnBrk="1" latinLnBrk="0" hangingPunct="1">
+              <a:defRPr sz="1800" kern="1200">
+                <a:solidFill>
+                  <a:schemeClr val="tx1"/>
+                </a:solidFill>
+                <a:latin typeface="+mn-lt"/>
+                <a:ea typeface="+mn-ea"/>
+                <a:cs typeface="+mn-cs"/>
+              </a:defRPr>
+            </a:lvl8pPr>
+            <a:lvl9pPr marL="3657600" algn="l" defTabSz="914400" rtl="0" eaLnBrk="1" latinLnBrk="0" hangingPunct="1">
+              <a:defRPr sz="1800" kern="1200">
+                <a:solidFill>
+                  <a:schemeClr val="tx1"/>
+                </a:solidFill>
+                <a:latin typeface="+mn-lt"/>
+                <a:ea typeface="+mn-ea"/>
+                <a:cs typeface="+mn-cs"/>
+              </a:defRPr>
+            </a:lvl9pPr>
+          </a:lstStyle>
+          <a:p>
+            <a:pPr>
+              <a:lnSpc>
+                <a:spcPct val="150000"/>
+              </a:lnSpc>
+            </a:pPr>
+            <a:r>
+              <a:rPr lang="en-US" sz="1600" b="1" dirty="0" err="1">
+                <a:latin typeface="Noto Sans SC" pitchFamily="34" charset="0"/>
+                <a:ea typeface="Noto Sans SC" pitchFamily="34" charset="-122"/>
+                <a:cs typeface="Noto Sans SC" pitchFamily="34" charset="-120"/>
+              </a:rPr>
+              <a:t>Выполнил</a:t>
+            </a:r>
+            <a:r>
+              <a:rPr lang="en-US" sz="1600" b="1" dirty="0">
+                <a:latin typeface="Noto Sans SC" pitchFamily="34" charset="0"/>
+                <a:ea typeface="Noto Sans SC" pitchFamily="34" charset="-122"/>
+                <a:cs typeface="Noto Sans SC" pitchFamily="34" charset="-120"/>
+              </a:rPr>
+              <a:t>:</a:t>
+            </a:r>
+            <a:r>
+              <a:rPr lang="en-US" sz="1600" dirty="0">
+                <a:latin typeface="Noto Sans SC" pitchFamily="34" charset="0"/>
+                <a:ea typeface="Noto Sans SC" pitchFamily="34" charset="-122"/>
+                <a:cs typeface="Noto Sans SC" pitchFamily="34" charset="-120"/>
+              </a:rPr>
+              <a:t> </a:t>
+            </a:r>
+            <a:r>
+              <a:rPr lang="ru-RU" sz="1600" dirty="0">
+                <a:latin typeface="Noto Sans SC" pitchFamily="34" charset="0"/>
+                <a:ea typeface="Noto Sans SC" pitchFamily="34" charset="-122"/>
+                <a:cs typeface="Noto Sans SC" pitchFamily="34" charset="-120"/>
+              </a:rPr>
+              <a:t>Исупов Дмитрий Андреевич</a:t>
+            </a:r>
+            <a:endParaRPr lang="en-US" sz="1600" dirty="0"/>
+          </a:p>
+          <a:p>
+            <a:pPr>
+              <a:lnSpc>
+                <a:spcPct val="150000"/>
+              </a:lnSpc>
+            </a:pPr>
+            <a:r>
+              <a:rPr lang="en-US" sz="1600" dirty="0" err="1">
+                <a:latin typeface="Noto Sans SC" pitchFamily="34" charset="0"/>
+                <a:ea typeface="Noto Sans SC" pitchFamily="34" charset="-122"/>
+                <a:cs typeface="Noto Sans SC" pitchFamily="34" charset="-120"/>
+              </a:rPr>
+              <a:t>Группа</a:t>
+            </a:r>
+            <a:r>
+              <a:rPr lang="en-US" sz="1600" dirty="0">
+                <a:latin typeface="Noto Sans SC" pitchFamily="34" charset="0"/>
+                <a:ea typeface="Noto Sans SC" pitchFamily="34" charset="-122"/>
+                <a:cs typeface="Noto Sans SC" pitchFamily="34" charset="-120"/>
+              </a:rPr>
+              <a:t> 23П-</a:t>
+            </a:r>
+            <a:r>
+              <a:rPr lang="ru-RU" sz="1600" dirty="0">
+                <a:latin typeface="Noto Sans SC" pitchFamily="34" charset="0"/>
+                <a:ea typeface="Noto Sans SC" pitchFamily="34" charset="-122"/>
+                <a:cs typeface="Noto Sans SC" pitchFamily="34" charset="-120"/>
+              </a:rPr>
+              <a:t>2</a:t>
+            </a:r>
+          </a:p>
+          <a:p>
+            <a:pPr>
+              <a:lnSpc>
+                <a:spcPct val="150000"/>
+              </a:lnSpc>
+            </a:pPr>
+            <a:r>
+              <a:rPr lang="ru-RU" sz="1600" dirty="0">
+                <a:latin typeface="Noto Sans SC" pitchFamily="34" charset="0"/>
+                <a:ea typeface="Noto Sans SC" pitchFamily="34" charset="-122"/>
+                <a:cs typeface="Noto Sans SC" pitchFamily="34" charset="-120"/>
+              </a:rPr>
+              <a:t>С</a:t>
+            </a:r>
+            <a:r>
+              <a:rPr lang="en-US" sz="1600" dirty="0" err="1">
+                <a:latin typeface="Noto Sans SC" pitchFamily="34" charset="0"/>
+                <a:ea typeface="Noto Sans SC" pitchFamily="34" charset="-122"/>
+                <a:cs typeface="Noto Sans SC" pitchFamily="34" charset="-120"/>
+              </a:rPr>
+              <a:t>пециальность</a:t>
+            </a:r>
+            <a:r>
+              <a:rPr lang="en-US" sz="1600" dirty="0">
+                <a:latin typeface="Noto Sans SC" pitchFamily="34" charset="0"/>
+                <a:ea typeface="Noto Sans SC" pitchFamily="34" charset="-122"/>
+                <a:cs typeface="Noto Sans SC" pitchFamily="34" charset="-120"/>
+              </a:rPr>
+              <a:t> 09.02.07</a:t>
+            </a:r>
+            <a:endParaRPr lang="en-US" sz="1600" dirty="0"/>
+          </a:p>
+          <a:p>
+            <a:pPr>
+              <a:lnSpc>
+                <a:spcPct val="150000"/>
+              </a:lnSpc>
+            </a:pPr>
+            <a:r>
+              <a:rPr lang="en-US" sz="1600" dirty="0">
+                <a:latin typeface="Noto Sans SC" pitchFamily="34" charset="0"/>
+                <a:ea typeface="Noto Sans SC" pitchFamily="34" charset="-122"/>
+                <a:cs typeface="Noto Sans SC" pitchFamily="34" charset="-120"/>
+              </a:rPr>
+              <a:t>«</a:t>
+            </a:r>
+            <a:r>
+              <a:rPr lang="en-US" sz="1600" dirty="0" err="1">
+                <a:latin typeface="Noto Sans SC" pitchFamily="34" charset="0"/>
+                <a:ea typeface="Noto Sans SC" pitchFamily="34" charset="-122"/>
+                <a:cs typeface="Noto Sans SC" pitchFamily="34" charset="-120"/>
+              </a:rPr>
+              <a:t>Информационные</a:t>
+            </a:r>
+            <a:r>
+              <a:rPr lang="en-US" sz="1600" dirty="0">
+                <a:latin typeface="Noto Sans SC" pitchFamily="34" charset="0"/>
+                <a:ea typeface="Noto Sans SC" pitchFamily="34" charset="-122"/>
+                <a:cs typeface="Noto Sans SC" pitchFamily="34" charset="-120"/>
+              </a:rPr>
+              <a:t> </a:t>
+            </a:r>
+            <a:r>
+              <a:rPr lang="en-US" sz="1600" dirty="0" err="1">
+                <a:latin typeface="Noto Sans SC" pitchFamily="34" charset="0"/>
+                <a:ea typeface="Noto Sans SC" pitchFamily="34" charset="-122"/>
+                <a:cs typeface="Noto Sans SC" pitchFamily="34" charset="-120"/>
+              </a:rPr>
+              <a:t>системы</a:t>
+            </a:r>
+            <a:r>
+              <a:rPr lang="en-US" sz="1600" dirty="0">
+                <a:latin typeface="Noto Sans SC" pitchFamily="34" charset="0"/>
+                <a:ea typeface="Noto Sans SC" pitchFamily="34" charset="-122"/>
+                <a:cs typeface="Noto Sans SC" pitchFamily="34" charset="-120"/>
+              </a:rPr>
+              <a:t> и </a:t>
+            </a:r>
+            <a:r>
+              <a:rPr lang="en-US" sz="1600" dirty="0" err="1">
+                <a:latin typeface="Noto Sans SC" pitchFamily="34" charset="0"/>
+                <a:ea typeface="Noto Sans SC" pitchFamily="34" charset="-122"/>
+                <a:cs typeface="Noto Sans SC" pitchFamily="34" charset="-120"/>
+              </a:rPr>
+              <a:t>программирование</a:t>
+            </a:r>
+            <a:r>
+              <a:rPr lang="en-US" sz="1600" dirty="0">
+                <a:latin typeface="Noto Sans SC" pitchFamily="34" charset="0"/>
+                <a:ea typeface="Noto Sans SC" pitchFamily="34" charset="-122"/>
+                <a:cs typeface="Noto Sans SC" pitchFamily="34" charset="-120"/>
+              </a:rPr>
+              <a:t>»</a:t>
+            </a:r>
+            <a:endParaRPr lang="en-US" sz="1600" dirty="0"/>
+          </a:p>
+          <a:p>
+            <a:pPr>
+              <a:lnSpc>
+                <a:spcPct val="150000"/>
+              </a:lnSpc>
+            </a:pPr>
+            <a:r>
+              <a:rPr lang="en-US" sz="1600" dirty="0" err="1">
+                <a:latin typeface="Noto Sans SC" pitchFamily="34" charset="0"/>
+                <a:ea typeface="Noto Sans SC" pitchFamily="34" charset="-122"/>
+                <a:cs typeface="Noto Sans SC" pitchFamily="34" charset="-120"/>
+              </a:rPr>
+              <a:t>Форма</a:t>
+            </a:r>
+            <a:r>
+              <a:rPr lang="en-US" sz="1600" dirty="0">
+                <a:latin typeface="Noto Sans SC" pitchFamily="34" charset="0"/>
+                <a:ea typeface="Noto Sans SC" pitchFamily="34" charset="-122"/>
+                <a:cs typeface="Noto Sans SC" pitchFamily="34" charset="-120"/>
+              </a:rPr>
+              <a:t> </a:t>
+            </a:r>
+            <a:r>
+              <a:rPr lang="en-US" sz="1600" dirty="0" err="1">
+                <a:latin typeface="Noto Sans SC" pitchFamily="34" charset="0"/>
+                <a:ea typeface="Noto Sans SC" pitchFamily="34" charset="-122"/>
+                <a:cs typeface="Noto Sans SC" pitchFamily="34" charset="-120"/>
+              </a:rPr>
+              <a:t>обучения</a:t>
+            </a:r>
+            <a:r>
+              <a:rPr lang="en-US" sz="1600" dirty="0">
+                <a:latin typeface="Noto Sans SC" pitchFamily="34" charset="0"/>
+                <a:ea typeface="Noto Sans SC" pitchFamily="34" charset="-122"/>
+                <a:cs typeface="Noto Sans SC" pitchFamily="34" charset="-120"/>
+              </a:rPr>
+              <a:t>: </a:t>
+            </a:r>
+            <a:r>
+              <a:rPr lang="en-US" sz="1600" dirty="0" err="1">
+                <a:latin typeface="Noto Sans SC" pitchFamily="34" charset="0"/>
+                <a:ea typeface="Noto Sans SC" pitchFamily="34" charset="-122"/>
+                <a:cs typeface="Noto Sans SC" pitchFamily="34" charset="-120"/>
+              </a:rPr>
+              <a:t>очная</a:t>
+            </a:r>
+            <a:endParaRPr lang="en-US" sz="1600" dirty="0"/>
+          </a:p>
+          <a:p>
+            <a:pPr>
+              <a:lnSpc>
+                <a:spcPct val="150000"/>
+              </a:lnSpc>
+            </a:pPr>
+            <a:r>
+              <a:rPr lang="en-US" sz="1600" b="1" dirty="0" err="1">
+                <a:latin typeface="Noto Sans SC" pitchFamily="34" charset="0"/>
+                <a:ea typeface="Noto Sans SC" pitchFamily="34" charset="-122"/>
+                <a:cs typeface="Noto Sans SC" pitchFamily="34" charset="-120"/>
+              </a:rPr>
+              <a:t>Руководитель</a:t>
+            </a:r>
+            <a:r>
+              <a:rPr lang="en-US" sz="1600" b="1" dirty="0">
+                <a:latin typeface="Noto Sans SC" pitchFamily="34" charset="0"/>
+                <a:ea typeface="Noto Sans SC" pitchFamily="34" charset="-122"/>
+                <a:cs typeface="Noto Sans SC" pitchFamily="34" charset="-120"/>
+              </a:rPr>
+              <a:t>:</a:t>
+            </a:r>
+            <a:r>
+              <a:rPr lang="en-US" sz="1600" dirty="0">
+                <a:latin typeface="Noto Sans SC" pitchFamily="34" charset="0"/>
+                <a:ea typeface="Noto Sans SC" pitchFamily="34" charset="-122"/>
+                <a:cs typeface="Noto Sans SC" pitchFamily="34" charset="-120"/>
+              </a:rPr>
+              <a:t> </a:t>
+            </a:r>
+            <a:r>
+              <a:rPr lang="ru-RU" sz="1600" dirty="0">
+                <a:latin typeface="Noto Sans SC" pitchFamily="34" charset="0"/>
+                <a:ea typeface="Noto Sans SC" pitchFamily="34" charset="-122"/>
+                <a:cs typeface="Noto Sans SC" pitchFamily="34" charset="-120"/>
+              </a:rPr>
+              <a:t>Калинин Арсений Олегович</a:t>
+            </a:r>
+            <a:endParaRPr lang="en-US" sz="1600" dirty="0"/>
+          </a:p>
+        </p:txBody>
+      </p:sp>
+      <p:pic>
+        <p:nvPicPr>
+          <p:cNvPr id="11" name="Picture 14" descr="touch-icon-ipad-retina">
+            <a:extLst>
+              <a:ext uri="{FF2B5EF4-FFF2-40B4-BE49-F238E27FC236}">
+                <a16:creationId xmlns:a16="http://schemas.microsoft.com/office/drawing/2014/main" id="{32B953BD-91A1-EF69-41C2-3A26F36F309C}"/>
+              </a:ext>
+            </a:extLst>
+          </p:cNvPr>
+          <p:cNvPicPr>
+            <a:picLocks noChangeAspect="1" noChangeArrowheads="1"/>
+          </p:cNvPicPr>
+          <p:nvPr/>
+        </p:nvPicPr>
+        <p:blipFill>
+          <a:blip r:embed="rId2">
+            <a:extLst>
+              <a:ext uri="{28A0092B-C50C-407E-A947-70E740481C1C}">
+                <a14:useLocalDpi xmlns:a14="http://schemas.microsoft.com/office/drawing/2010/main" val="0"/>
+              </a:ext>
+            </a:extLst>
+          </a:blip>
+          <a:srcRect/>
+          <a:stretch>
+            <a:fillRect/>
+          </a:stretch>
+        </p:blipFill>
+        <p:spPr bwMode="auto">
+          <a:xfrm>
+            <a:off x="911424" y="248703"/>
+            <a:ext cx="1258888" cy="1258888"/>
+          </a:xfrm>
+          <a:prstGeom prst="rect">
+            <a:avLst/>
+          </a:prstGeom>
+          <a:noFill/>
+          <a:ln>
+            <a:noFill/>
+          </a:ln>
+          <a:extLst>
+            <a:ext uri="{909E8E84-426E-40DD-AFC4-6F175D3DCCD1}">
+              <a14:hiddenFill xmlns:a14="http://schemas.microsoft.com/office/drawing/2010/main">
+                <a:solidFill>
+                  <a:srgbClr val="FFFFFF"/>
+                </a:solidFill>
+              </a14:hiddenFill>
+            </a:ext>
+            <a:ext uri="{91240B29-F687-4F45-9708-019B960494DF}">
+              <a14:hiddenLine xmlns:a14="http://schemas.microsoft.com/office/drawing/2010/main" w="9525">
+                <a:solidFill>
+                  <a:srgbClr val="000000"/>
+                </a:solidFill>
+                <a:miter lim="800000"/>
+                <a:headEnd/>
+                <a:tailEnd/>
+              </a14:hiddenLine>
+            </a:ext>
+          </a:extLst>
+        </p:spPr>
+      </p:pic>
     </p:spTree>
     <p:extLst>
       <p:ext uri="{BB962C8B-B14F-4D97-AF65-F5344CB8AC3E}">
@@ -3768,6 +4156,655 @@
 </file>
 
 <file path=ppt/slides/slide10.xml><?xml version="1.0" encoding="utf-8"?>
+<p:sld xmlns:a="http://schemas.openxmlformats.org/drawingml/2006/main" xmlns:r="http://schemas.openxmlformats.org/officeDocument/2006/relationships" xmlns:p="http://schemas.openxmlformats.org/presentationml/2006/main">
+  <p:cSld>
+    <p:spTree>
+      <p:nvGrpSpPr>
+        <p:cNvPr id="1" name=""/>
+        <p:cNvGrpSpPr/>
+        <p:nvPr/>
+      </p:nvGrpSpPr>
+      <p:grpSpPr>
+        <a:xfrm>
+          <a:off x="0" y="0"/>
+          <a:ext cx="0" cy="0"/>
+          <a:chOff x="0" y="0"/>
+          <a:chExt cx="0" cy="0"/>
+        </a:xfrm>
+      </p:grpSpPr>
+      <p:sp>
+        <p:nvSpPr>
+          <p:cNvPr id="2" name="Заголовок 1">
+            <a:extLst>
+              <a:ext uri="{FF2B5EF4-FFF2-40B4-BE49-F238E27FC236}">
+                <a16:creationId xmlns:a16="http://schemas.microsoft.com/office/drawing/2014/main" id="{E20C73A7-70DB-ABDF-5F9E-A581F1175091}"/>
+              </a:ext>
+            </a:extLst>
+          </p:cNvPr>
+          <p:cNvSpPr>
+            <a:spLocks noGrp="1"/>
+          </p:cNvSpPr>
+          <p:nvPr>
+            <p:ph type="title"/>
+          </p:nvPr>
+        </p:nvSpPr>
+        <p:spPr/>
+        <p:txBody>
+          <a:bodyPr/>
+          <a:lstStyle/>
+          <a:p>
+            <a:r>
+              <a:rPr lang="ru-RU" dirty="0">
+                <a:latin typeface="Times New Roman" panose="02020603050405020304" pitchFamily="18" charset="0"/>
+                <a:cs typeface="Times New Roman" panose="02020603050405020304" pitchFamily="18" charset="0"/>
+              </a:rPr>
+              <a:t> </a:t>
+            </a:r>
+          </a:p>
+        </p:txBody>
+      </p:sp>
+      <p:sp>
+        <p:nvSpPr>
+          <p:cNvPr id="3" name="Объект 2">
+            <a:extLst>
+              <a:ext uri="{FF2B5EF4-FFF2-40B4-BE49-F238E27FC236}">
+                <a16:creationId xmlns:a16="http://schemas.microsoft.com/office/drawing/2014/main" id="{9AE52EFF-A977-EFA3-5BED-6D0768C42BCB}"/>
+              </a:ext>
+            </a:extLst>
+          </p:cNvPr>
+          <p:cNvSpPr>
+            <a:spLocks noGrp="1"/>
+          </p:cNvSpPr>
+          <p:nvPr>
+            <p:ph idx="1"/>
+          </p:nvPr>
+        </p:nvSpPr>
+        <p:spPr>
+          <a:xfrm>
+            <a:off x="8544272" y="4789512"/>
+            <a:ext cx="2386608" cy="392907"/>
+          </a:xfrm>
+        </p:spPr>
+        <p:txBody>
+          <a:bodyPr>
+            <a:normAutofit/>
+          </a:bodyPr>
+          <a:lstStyle/>
+          <a:p>
+            <a:pPr marL="0" indent="0">
+              <a:buNone/>
+            </a:pPr>
+            <a:r>
+              <a:rPr lang="ru-RU" sz="1600" dirty="0">
+                <a:latin typeface="Times New Roman" panose="02020603050405020304" pitchFamily="18" charset="0"/>
+                <a:cs typeface="Times New Roman" panose="02020603050405020304" pitchFamily="18" charset="0"/>
+              </a:rPr>
+              <a:t> Карточка партии сырья</a:t>
+            </a:r>
+          </a:p>
+        </p:txBody>
+      </p:sp>
+      <p:sp>
+        <p:nvSpPr>
+          <p:cNvPr id="5" name="TextBox 4">
+            <a:extLst>
+              <a:ext uri="{FF2B5EF4-FFF2-40B4-BE49-F238E27FC236}">
+                <a16:creationId xmlns:a16="http://schemas.microsoft.com/office/drawing/2014/main" id="{0E0D91A1-1449-3199-F6CA-E618C139ED82}"/>
+              </a:ext>
+            </a:extLst>
+          </p:cNvPr>
+          <p:cNvSpPr txBox="1"/>
+          <p:nvPr/>
+        </p:nvSpPr>
+        <p:spPr>
+          <a:xfrm>
+            <a:off x="830658" y="1299227"/>
+            <a:ext cx="2711270" cy="5299410"/>
+          </a:xfrm>
+          <a:prstGeom prst="rect">
+            <a:avLst/>
+          </a:prstGeom>
+          <a:noFill/>
+        </p:spPr>
+        <p:txBody>
+          <a:bodyPr wrap="square">
+            <a:spAutoFit/>
+          </a:bodyPr>
+          <a:lstStyle/>
+          <a:p>
+            <a:pPr>
+              <a:spcBef>
+                <a:spcPts val="1200"/>
+              </a:spcBef>
+            </a:pPr>
+            <a:r>
+              <a:rPr lang="ru-RU" b="1" dirty="0">
+                <a:latin typeface="Times New Roman" panose="02020603050405020304" pitchFamily="18" charset="0"/>
+                <a:cs typeface="Times New Roman" panose="02020603050405020304" pitchFamily="18" charset="0"/>
+              </a:rPr>
+              <a:t>Основные разделы:</a:t>
+            </a:r>
+            <a:endParaRPr lang="ru-RU" dirty="0">
+              <a:latin typeface="Times New Roman" panose="02020603050405020304" pitchFamily="18" charset="0"/>
+              <a:cs typeface="Times New Roman" panose="02020603050405020304" pitchFamily="18" charset="0"/>
+            </a:endParaRPr>
+          </a:p>
+          <a:p>
+            <a:pPr>
+              <a:spcBef>
+                <a:spcPts val="1200"/>
+              </a:spcBef>
+              <a:buFont typeface="Arial" panose="020B0604020202020204" pitchFamily="34" charset="0"/>
+              <a:buChar char="•"/>
+            </a:pPr>
+            <a:r>
+              <a:rPr lang="ru-RU" dirty="0">
+                <a:latin typeface="Times New Roman" panose="02020603050405020304" pitchFamily="18" charset="0"/>
+                <a:cs typeface="Times New Roman" panose="02020603050405020304" pitchFamily="18" charset="0"/>
+              </a:rPr>
+              <a:t>Партии сырья (фильтры: поиск, статус, поставщик, дата, только с испытаниями)</a:t>
+            </a:r>
+          </a:p>
+          <a:p>
+            <a:pPr>
+              <a:spcBef>
+                <a:spcPts val="450"/>
+              </a:spcBef>
+              <a:buFont typeface="Arial" panose="020B0604020202020204" pitchFamily="34" charset="0"/>
+              <a:buChar char="•"/>
+            </a:pPr>
+            <a:r>
+              <a:rPr lang="ru-RU" dirty="0">
+                <a:latin typeface="Times New Roman" panose="02020603050405020304" pitchFamily="18" charset="0"/>
+                <a:cs typeface="Times New Roman" panose="02020603050405020304" pitchFamily="18" charset="0"/>
+              </a:rPr>
+              <a:t>Готовая продукция</a:t>
+            </a:r>
+          </a:p>
+          <a:p>
+            <a:pPr>
+              <a:spcBef>
+                <a:spcPts val="450"/>
+              </a:spcBef>
+              <a:buFont typeface="Arial" panose="020B0604020202020204" pitchFamily="34" charset="0"/>
+              <a:buChar char="•"/>
+            </a:pPr>
+            <a:r>
+              <a:rPr lang="ru-RU" dirty="0">
+                <a:latin typeface="Times New Roman" panose="02020603050405020304" pitchFamily="18" charset="0"/>
+                <a:cs typeface="Times New Roman" panose="02020603050405020304" pitchFamily="18" charset="0"/>
+              </a:rPr>
+              <a:t>Испытания (CRUD)</a:t>
+            </a:r>
+          </a:p>
+          <a:p>
+            <a:pPr>
+              <a:spcBef>
+                <a:spcPts val="1200"/>
+              </a:spcBef>
+            </a:pPr>
+            <a:r>
+              <a:rPr lang="ru-RU" b="1" dirty="0">
+                <a:latin typeface="Times New Roman" panose="02020603050405020304" pitchFamily="18" charset="0"/>
+                <a:cs typeface="Times New Roman" panose="02020603050405020304" pitchFamily="18" charset="0"/>
+              </a:rPr>
+              <a:t>Карточка партии сырья:</a:t>
+            </a:r>
+            <a:endParaRPr lang="ru-RU" dirty="0">
+              <a:latin typeface="Times New Roman" panose="02020603050405020304" pitchFamily="18" charset="0"/>
+              <a:cs typeface="Times New Roman" panose="02020603050405020304" pitchFamily="18" charset="0"/>
+            </a:endParaRPr>
+          </a:p>
+          <a:p>
+            <a:pPr>
+              <a:spcBef>
+                <a:spcPts val="1200"/>
+              </a:spcBef>
+              <a:buFont typeface="Arial" panose="020B0604020202020204" pitchFamily="34" charset="0"/>
+              <a:buChar char="•"/>
+            </a:pPr>
+            <a:r>
+              <a:rPr lang="ru-RU" dirty="0">
+                <a:latin typeface="Times New Roman" panose="02020603050405020304" pitchFamily="18" charset="0"/>
+                <a:cs typeface="Times New Roman" panose="02020603050405020304" pitchFamily="18" charset="0"/>
+              </a:rPr>
+              <a:t>Информационная панель</a:t>
+            </a:r>
+          </a:p>
+          <a:p>
+            <a:pPr>
+              <a:spcBef>
+                <a:spcPts val="450"/>
+              </a:spcBef>
+              <a:buFont typeface="Arial" panose="020B0604020202020204" pitchFamily="34" charset="0"/>
+              <a:buChar char="•"/>
+            </a:pPr>
+            <a:r>
+              <a:rPr lang="ru-RU" dirty="0">
+                <a:latin typeface="Times New Roman" panose="02020603050405020304" pitchFamily="18" charset="0"/>
+                <a:cs typeface="Times New Roman" panose="02020603050405020304" pitchFamily="18" charset="0"/>
+              </a:rPr>
+              <a:t>Таблица испытаний</a:t>
+            </a:r>
+          </a:p>
+          <a:p>
+            <a:pPr>
+              <a:spcBef>
+                <a:spcPts val="450"/>
+              </a:spcBef>
+              <a:buFont typeface="Arial" panose="020B0604020202020204" pitchFamily="34" charset="0"/>
+              <a:buChar char="•"/>
+            </a:pPr>
+            <a:r>
+              <a:rPr lang="ru-RU" dirty="0">
+                <a:latin typeface="Times New Roman" panose="02020603050405020304" pitchFamily="18" charset="0"/>
+                <a:cs typeface="Times New Roman" panose="02020603050405020304" pitchFamily="18" charset="0"/>
+              </a:rPr>
+              <a:t>Блок принятия решения (с комментарием, обязательным при блокировке)</a:t>
+            </a:r>
+          </a:p>
+          <a:p>
+            <a:pPr>
+              <a:spcBef>
+                <a:spcPts val="450"/>
+              </a:spcBef>
+              <a:buFont typeface="Arial" panose="020B0604020202020204" pitchFamily="34" charset="0"/>
+              <a:buChar char="•"/>
+            </a:pPr>
+            <a:r>
+              <a:rPr lang="ru-RU" dirty="0">
+                <a:latin typeface="Times New Roman" panose="02020603050405020304" pitchFamily="18" charset="0"/>
+                <a:cs typeface="Times New Roman" panose="02020603050405020304" pitchFamily="18" charset="0"/>
+              </a:rPr>
+              <a:t>История решений</a:t>
+            </a:r>
+          </a:p>
+        </p:txBody>
+      </p:sp>
+      <p:sp>
+        <p:nvSpPr>
+          <p:cNvPr id="7" name="TextBox 6">
+            <a:extLst>
+              <a:ext uri="{FF2B5EF4-FFF2-40B4-BE49-F238E27FC236}">
+                <a16:creationId xmlns:a16="http://schemas.microsoft.com/office/drawing/2014/main" id="{27A5AD90-FBB4-069A-DA73-8722B249FB10}"/>
+              </a:ext>
+            </a:extLst>
+          </p:cNvPr>
+          <p:cNvSpPr txBox="1"/>
+          <p:nvPr/>
+        </p:nvSpPr>
+        <p:spPr>
+          <a:xfrm>
+            <a:off x="1981200" y="-2280"/>
+            <a:ext cx="8686800" cy="404406"/>
+          </a:xfrm>
+          <a:prstGeom prst="rect">
+            <a:avLst/>
+          </a:prstGeom>
+          <a:noFill/>
+        </p:spPr>
+        <p:txBody>
+          <a:bodyPr wrap="square">
+            <a:spAutoFit/>
+          </a:bodyPr>
+          <a:lstStyle/>
+          <a:p>
+            <a:pPr algn="ctr">
+              <a:lnSpc>
+                <a:spcPts val="2400"/>
+              </a:lnSpc>
+              <a:spcBef>
+                <a:spcPts val="2400"/>
+              </a:spcBef>
+              <a:spcAft>
+                <a:spcPts val="1200"/>
+              </a:spcAft>
+            </a:pPr>
+            <a:r>
+              <a:rPr lang="ru-RU" sz="2400" b="1" dirty="0">
+                <a:latin typeface="Times New Roman" panose="02020603050405020304" pitchFamily="18" charset="0"/>
+                <a:cs typeface="Times New Roman" panose="02020603050405020304" pitchFamily="18" charset="0"/>
+              </a:rPr>
+              <a:t>Задание 4. Модуль лаборатории (</a:t>
+            </a:r>
+            <a:r>
+              <a:rPr lang="ru-RU" sz="2400" b="1" dirty="0" err="1">
+                <a:latin typeface="Times New Roman" panose="02020603050405020304" pitchFamily="18" charset="0"/>
+                <a:cs typeface="Times New Roman" panose="02020603050405020304" pitchFamily="18" charset="0"/>
+              </a:rPr>
+              <a:t>AgroControl.Laboratory</a:t>
+            </a:r>
+            <a:r>
+              <a:rPr lang="ru-RU" sz="2400" b="1" dirty="0">
+                <a:latin typeface="Times New Roman" panose="02020603050405020304" pitchFamily="18" charset="0"/>
+                <a:cs typeface="Times New Roman" panose="02020603050405020304" pitchFamily="18" charset="0"/>
+              </a:rPr>
+              <a:t>)</a:t>
+            </a:r>
+          </a:p>
+        </p:txBody>
+      </p:sp>
+      <p:sp>
+        <p:nvSpPr>
+          <p:cNvPr id="9" name="TextBox 8">
+            <a:extLst>
+              <a:ext uri="{FF2B5EF4-FFF2-40B4-BE49-F238E27FC236}">
+                <a16:creationId xmlns:a16="http://schemas.microsoft.com/office/drawing/2014/main" id="{2DF64B90-893E-9E00-93BA-5567FD9BE99C}"/>
+              </a:ext>
+            </a:extLst>
+          </p:cNvPr>
+          <p:cNvSpPr txBox="1"/>
+          <p:nvPr/>
+        </p:nvSpPr>
+        <p:spPr>
+          <a:xfrm>
+            <a:off x="1415480" y="463767"/>
+            <a:ext cx="8592117" cy="646331"/>
+          </a:xfrm>
+          <a:prstGeom prst="rect">
+            <a:avLst/>
+          </a:prstGeom>
+          <a:noFill/>
+        </p:spPr>
+        <p:txBody>
+          <a:bodyPr wrap="square">
+            <a:spAutoFit/>
+          </a:bodyPr>
+          <a:lstStyle/>
+          <a:p>
+            <a:pPr>
+              <a:spcBef>
+                <a:spcPts val="1200"/>
+              </a:spcBef>
+              <a:spcAft>
+                <a:spcPts val="1200"/>
+              </a:spcAft>
+            </a:pPr>
+            <a:r>
+              <a:rPr lang="ru-RU" b="1" dirty="0">
+                <a:latin typeface="Times New Roman" panose="02020603050405020304" pitchFamily="18" charset="0"/>
+                <a:cs typeface="Times New Roman" panose="02020603050405020304" pitchFamily="18" charset="0"/>
+              </a:rPr>
+              <a:t>Краткое описание:</a:t>
+            </a:r>
+            <a:br>
+              <a:rPr lang="ru-RU" dirty="0">
+                <a:latin typeface="Times New Roman" panose="02020603050405020304" pitchFamily="18" charset="0"/>
+                <a:cs typeface="Times New Roman" panose="02020603050405020304" pitchFamily="18" charset="0"/>
+              </a:rPr>
+            </a:br>
+            <a:r>
+              <a:rPr lang="ru-RU" dirty="0">
+                <a:latin typeface="Times New Roman" panose="02020603050405020304" pitchFamily="18" charset="0"/>
+                <a:cs typeface="Times New Roman" panose="02020603050405020304" pitchFamily="18" charset="0"/>
+              </a:rPr>
+              <a:t>WPF-приложение для контроля качества сырья и готовой продукции.</a:t>
+            </a:r>
+          </a:p>
+        </p:txBody>
+      </p:sp>
+      <p:pic>
+        <p:nvPicPr>
+          <p:cNvPr id="10" name="Рисунок 9">
+            <a:extLst>
+              <a:ext uri="{FF2B5EF4-FFF2-40B4-BE49-F238E27FC236}">
+                <a16:creationId xmlns:a16="http://schemas.microsoft.com/office/drawing/2014/main" id="{26E8057E-43B8-D818-3492-B5B7DBC9BC3A}"/>
+              </a:ext>
+            </a:extLst>
+          </p:cNvPr>
+          <p:cNvPicPr>
+            <a:picLocks noChangeAspect="1"/>
+          </p:cNvPicPr>
+          <p:nvPr/>
+        </p:nvPicPr>
+        <p:blipFill>
+          <a:blip r:embed="rId2"/>
+          <a:stretch>
+            <a:fillRect/>
+          </a:stretch>
+        </p:blipFill>
+        <p:spPr>
+          <a:xfrm>
+            <a:off x="7148195" y="1017468"/>
+            <a:ext cx="4765928" cy="3779684"/>
+          </a:xfrm>
+          <a:prstGeom prst="rect">
+            <a:avLst/>
+          </a:prstGeom>
+          <a:ln>
+            <a:solidFill>
+              <a:schemeClr val="tx1"/>
+            </a:solidFill>
+          </a:ln>
+        </p:spPr>
+      </p:pic>
+      <p:pic>
+        <p:nvPicPr>
+          <p:cNvPr id="11" name="Рисунок 10">
+            <a:extLst>
+              <a:ext uri="{FF2B5EF4-FFF2-40B4-BE49-F238E27FC236}">
+                <a16:creationId xmlns:a16="http://schemas.microsoft.com/office/drawing/2014/main" id="{1EBC535F-AFBB-6C04-49C6-D34DA5FD979E}"/>
+              </a:ext>
+            </a:extLst>
+          </p:cNvPr>
+          <p:cNvPicPr>
+            <a:picLocks noChangeAspect="1"/>
+          </p:cNvPicPr>
+          <p:nvPr/>
+        </p:nvPicPr>
+        <p:blipFill>
+          <a:blip r:embed="rId3"/>
+          <a:stretch>
+            <a:fillRect/>
+          </a:stretch>
+        </p:blipFill>
+        <p:spPr>
+          <a:xfrm>
+            <a:off x="3541929" y="1933028"/>
+            <a:ext cx="3445484" cy="4162670"/>
+          </a:xfrm>
+          <a:prstGeom prst="rect">
+            <a:avLst/>
+          </a:prstGeom>
+          <a:ln>
+            <a:solidFill>
+              <a:schemeClr val="tx1"/>
+            </a:solidFill>
+          </a:ln>
+        </p:spPr>
+      </p:pic>
+      <p:sp>
+        <p:nvSpPr>
+          <p:cNvPr id="12" name="Объект 2">
+            <a:extLst>
+              <a:ext uri="{FF2B5EF4-FFF2-40B4-BE49-F238E27FC236}">
+                <a16:creationId xmlns:a16="http://schemas.microsoft.com/office/drawing/2014/main" id="{B81CB76A-0391-1B6D-C625-0E36722C6BAE}"/>
+              </a:ext>
+            </a:extLst>
+          </p:cNvPr>
+          <p:cNvSpPr txBox="1">
+            <a:spLocks/>
+          </p:cNvSpPr>
+          <p:nvPr/>
+        </p:nvSpPr>
+        <p:spPr>
+          <a:xfrm>
+            <a:off x="3935760" y="6042145"/>
+            <a:ext cx="2711270" cy="392907"/>
+          </a:xfrm>
+          <a:prstGeom prst="rect">
+            <a:avLst/>
+          </a:prstGeom>
+        </p:spPr>
+        <p:txBody>
+          <a:bodyPr vert="horz" lIns="91440" tIns="45720" rIns="91440" bIns="45720" rtlCol="0">
+            <a:noAutofit/>
+          </a:bodyPr>
+          <a:lstStyle>
+            <a:lvl1pPr marL="342900" indent="-342900" algn="l" defTabSz="914400" rtl="0" eaLnBrk="1" latinLnBrk="0" hangingPunct="1">
+              <a:spcBef>
+                <a:spcPct val="20000"/>
+              </a:spcBef>
+              <a:buFont typeface="Arial" pitchFamily="34" charset="0"/>
+              <a:buChar char="•"/>
+              <a:defRPr sz="3200" kern="1200">
+                <a:solidFill>
+                  <a:schemeClr val="tx1"/>
+                </a:solidFill>
+                <a:latin typeface="+mn-lt"/>
+                <a:ea typeface="+mn-ea"/>
+                <a:cs typeface="+mn-cs"/>
+              </a:defRPr>
+            </a:lvl1pPr>
+            <a:lvl2pPr marL="742950" indent="-285750" algn="l" defTabSz="914400" rtl="0" eaLnBrk="1" latinLnBrk="0" hangingPunct="1">
+              <a:spcBef>
+                <a:spcPct val="20000"/>
+              </a:spcBef>
+              <a:buFont typeface="Arial" pitchFamily="34" charset="0"/>
+              <a:buChar char="–"/>
+              <a:defRPr sz="2800" kern="1200">
+                <a:solidFill>
+                  <a:schemeClr val="tx1"/>
+                </a:solidFill>
+                <a:latin typeface="+mn-lt"/>
+                <a:ea typeface="+mn-ea"/>
+                <a:cs typeface="+mn-cs"/>
+              </a:defRPr>
+            </a:lvl2pPr>
+            <a:lvl3pPr marL="1143000" indent="-228600" algn="l" defTabSz="914400" rtl="0" eaLnBrk="1" latinLnBrk="0" hangingPunct="1">
+              <a:spcBef>
+                <a:spcPct val="20000"/>
+              </a:spcBef>
+              <a:buFont typeface="Arial" pitchFamily="34" charset="0"/>
+              <a:buChar char="•"/>
+              <a:defRPr sz="2400" kern="1200">
+                <a:solidFill>
+                  <a:schemeClr val="tx1"/>
+                </a:solidFill>
+                <a:latin typeface="+mn-lt"/>
+                <a:ea typeface="+mn-ea"/>
+                <a:cs typeface="+mn-cs"/>
+              </a:defRPr>
+            </a:lvl3pPr>
+            <a:lvl4pPr marL="1600200" indent="-228600" algn="l" defTabSz="914400" rtl="0" eaLnBrk="1" latinLnBrk="0" hangingPunct="1">
+              <a:spcBef>
+                <a:spcPct val="20000"/>
+              </a:spcBef>
+              <a:buFont typeface="Arial" pitchFamily="34" charset="0"/>
+              <a:buChar char="–"/>
+              <a:defRPr sz="2000" kern="1200">
+                <a:solidFill>
+                  <a:schemeClr val="tx1"/>
+                </a:solidFill>
+                <a:latin typeface="+mn-lt"/>
+                <a:ea typeface="+mn-ea"/>
+                <a:cs typeface="+mn-cs"/>
+              </a:defRPr>
+            </a:lvl4pPr>
+            <a:lvl5pPr marL="2057400" indent="-228600" algn="l" defTabSz="914400" rtl="0" eaLnBrk="1" latinLnBrk="0" hangingPunct="1">
+              <a:spcBef>
+                <a:spcPct val="20000"/>
+              </a:spcBef>
+              <a:buFont typeface="Arial" pitchFamily="34" charset="0"/>
+              <a:buChar char="»"/>
+              <a:defRPr sz="2000" kern="1200">
+                <a:solidFill>
+                  <a:schemeClr val="tx1"/>
+                </a:solidFill>
+                <a:latin typeface="+mn-lt"/>
+                <a:ea typeface="+mn-ea"/>
+                <a:cs typeface="+mn-cs"/>
+              </a:defRPr>
+            </a:lvl5pPr>
+            <a:lvl6pPr marL="2514600" indent="-228600" algn="l" defTabSz="914400" rtl="0" eaLnBrk="1" latinLnBrk="0" hangingPunct="1">
+              <a:spcBef>
+                <a:spcPct val="20000"/>
+              </a:spcBef>
+              <a:buFont typeface="Arial" pitchFamily="34" charset="0"/>
+              <a:buChar char="•"/>
+              <a:defRPr sz="2000" kern="1200">
+                <a:solidFill>
+                  <a:schemeClr val="tx1"/>
+                </a:solidFill>
+                <a:latin typeface="+mn-lt"/>
+                <a:ea typeface="+mn-ea"/>
+                <a:cs typeface="+mn-cs"/>
+              </a:defRPr>
+            </a:lvl6pPr>
+            <a:lvl7pPr marL="2971800" indent="-228600" algn="l" defTabSz="914400" rtl="0" eaLnBrk="1" latinLnBrk="0" hangingPunct="1">
+              <a:spcBef>
+                <a:spcPct val="20000"/>
+              </a:spcBef>
+              <a:buFont typeface="Arial" pitchFamily="34" charset="0"/>
+              <a:buChar char="•"/>
+              <a:defRPr sz="2000" kern="1200">
+                <a:solidFill>
+                  <a:schemeClr val="tx1"/>
+                </a:solidFill>
+                <a:latin typeface="+mn-lt"/>
+                <a:ea typeface="+mn-ea"/>
+                <a:cs typeface="+mn-cs"/>
+              </a:defRPr>
+            </a:lvl7pPr>
+            <a:lvl8pPr marL="3429000" indent="-228600" algn="l" defTabSz="914400" rtl="0" eaLnBrk="1" latinLnBrk="0" hangingPunct="1">
+              <a:spcBef>
+                <a:spcPct val="20000"/>
+              </a:spcBef>
+              <a:buFont typeface="Arial" pitchFamily="34" charset="0"/>
+              <a:buChar char="•"/>
+              <a:defRPr sz="2000" kern="1200">
+                <a:solidFill>
+                  <a:schemeClr val="tx1"/>
+                </a:solidFill>
+                <a:latin typeface="+mn-lt"/>
+                <a:ea typeface="+mn-ea"/>
+                <a:cs typeface="+mn-cs"/>
+              </a:defRPr>
+            </a:lvl8pPr>
+            <a:lvl9pPr marL="3886200" indent="-228600" algn="l" defTabSz="914400" rtl="0" eaLnBrk="1" latinLnBrk="0" hangingPunct="1">
+              <a:spcBef>
+                <a:spcPct val="20000"/>
+              </a:spcBef>
+              <a:buFont typeface="Arial" pitchFamily="34" charset="0"/>
+              <a:buChar char="•"/>
+              <a:defRPr sz="2000" kern="1200">
+                <a:solidFill>
+                  <a:schemeClr val="tx1"/>
+                </a:solidFill>
+                <a:latin typeface="+mn-lt"/>
+                <a:ea typeface="+mn-ea"/>
+                <a:cs typeface="+mn-cs"/>
+              </a:defRPr>
+            </a:lvl9pPr>
+          </a:lstStyle>
+          <a:p>
+            <a:pPr marL="0" indent="0">
+              <a:buNone/>
+            </a:pPr>
+            <a:r>
+              <a:rPr lang="ru-RU" sz="1600" dirty="0">
+                <a:latin typeface="Times New Roman" panose="02020603050405020304" pitchFamily="18" charset="0"/>
+                <a:cs typeface="Times New Roman" panose="02020603050405020304" pitchFamily="18" charset="0"/>
+              </a:rPr>
+              <a:t>Форма создания испытания</a:t>
+            </a:r>
+          </a:p>
+        </p:txBody>
+      </p:sp>
+    </p:spTree>
+    <p:extLst>
+      <p:ext uri="{BB962C8B-B14F-4D97-AF65-F5344CB8AC3E}">
+        <p14:creationId xmlns:p14="http://schemas.microsoft.com/office/powerpoint/2010/main" val="1976711635"/>
+      </p:ext>
+    </p:extLst>
+  </p:cSld>
+  <p:clrMapOvr>
+    <a:masterClrMapping/>
+  </p:clrMapOvr>
+</p:sld>
+</file>
+
+<file path=ppt/slides/slide11.xml><?xml version="1.0" encoding="utf-8"?>
 <p:sld xmlns:a="http://schemas.openxmlformats.org/drawingml/2006/main" xmlns:r="http://schemas.openxmlformats.org/officeDocument/2006/relationships" xmlns:p="http://schemas.openxmlformats.org/presentationml/2006/main">
   <p:cSld>
     <p:spTree>
@@ -3863,7 +4900,7 @@
         </p:nvSpPr>
         <p:spPr>
           <a:xfrm>
-            <a:off x="0" y="943933"/>
+            <a:off x="550458" y="841628"/>
             <a:ext cx="3203848" cy="5978560"/>
           </a:xfrm>
           <a:prstGeom prst="rect">
@@ -3877,28 +4914,25 @@
           </a:bodyPr>
           <a:lstStyle/>
           <a:p>
-            <a:pPr algn="l">
+            <a:pPr>
               <a:spcBef>
                 <a:spcPts val="1200"/>
               </a:spcBef>
-              <a:buNone/>
             </a:pPr>
             <a:r>
-              <a:rPr lang="ru-RU" b="1" i="0" dirty="0">
-                <a:effectLst/>
+              <a:rPr lang="ru-RU" b="1" dirty="0">
                 <a:latin typeface="Times New Roman" panose="02020603050405020304" pitchFamily="18" charset="0"/>
                 <a:cs typeface="Times New Roman" panose="02020603050405020304" pitchFamily="18" charset="0"/>
               </a:rPr>
               <a:t>Экраны:</a:t>
             </a:r>
-            <a:endParaRPr lang="ru-RU" b="0" i="0" dirty="0">
-              <a:effectLst/>
+            <a:endParaRPr lang="ru-RU" dirty="0">
               <a:latin typeface="Times New Roman" panose="02020603050405020304" pitchFamily="18" charset="0"/>
               <a:cs typeface="Times New Roman" panose="02020603050405020304" pitchFamily="18" charset="0"/>
             </a:endParaRPr>
           </a:p>
           <a:p>
-            <a:pPr algn="l">
+            <a:pPr>
               <a:spcBef>
                 <a:spcPts val="1200"/>
               </a:spcBef>
@@ -3906,16 +4940,14 @@
               <a:buChar char="•"/>
             </a:pPr>
             <a:r>
-              <a:rPr lang="ru-RU" b="1" i="0" dirty="0">
-                <a:effectLst/>
+              <a:rPr lang="ru-RU" b="1" dirty="0">
                 <a:latin typeface="Times New Roman" panose="02020603050405020304" pitchFamily="18" charset="0"/>
                 <a:cs typeface="Times New Roman" panose="02020603050405020304" pitchFamily="18" charset="0"/>
               </a:rPr>
               <a:t>Активные партии</a:t>
             </a:r>
             <a:r>
-              <a:rPr lang="ru-RU" b="0" i="0" dirty="0">
-                <a:effectLst/>
+              <a:rPr lang="ru-RU" dirty="0">
                 <a:latin typeface="Times New Roman" panose="02020603050405020304" pitchFamily="18" charset="0"/>
                 <a:cs typeface="Times New Roman" panose="02020603050405020304" pitchFamily="18" charset="0"/>
               </a:rPr>
@@ -3923,7 +4955,7 @@
             </a:r>
           </a:p>
           <a:p>
-            <a:pPr algn="l">
+            <a:pPr>
               <a:spcBef>
                 <a:spcPts val="450"/>
               </a:spcBef>
@@ -3931,16 +4963,14 @@
               <a:buChar char="•"/>
             </a:pPr>
             <a:r>
-              <a:rPr lang="ru-RU" b="1" i="0" dirty="0">
-                <a:effectLst/>
+              <a:rPr lang="ru-RU" b="1" dirty="0">
                 <a:latin typeface="Times New Roman" panose="02020603050405020304" pitchFamily="18" charset="0"/>
                 <a:cs typeface="Times New Roman" panose="02020603050405020304" pitchFamily="18" charset="0"/>
               </a:rPr>
               <a:t>Программа партии</a:t>
             </a:r>
             <a:r>
-              <a:rPr lang="ru-RU" b="0" i="0" dirty="0">
-                <a:effectLst/>
+              <a:rPr lang="ru-RU" dirty="0">
                 <a:latin typeface="Times New Roman" panose="02020603050405020304" pitchFamily="18" charset="0"/>
                 <a:cs typeface="Times New Roman" panose="02020603050405020304" pitchFamily="18" charset="0"/>
               </a:rPr>
@@ -3948,7 +4978,7 @@
             </a:r>
           </a:p>
           <a:p>
-            <a:pPr algn="l">
+            <a:pPr>
               <a:spcBef>
                 <a:spcPts val="450"/>
               </a:spcBef>
@@ -3956,16 +4986,14 @@
               <a:buChar char="•"/>
             </a:pPr>
             <a:r>
-              <a:rPr lang="ru-RU" b="1" i="0" dirty="0">
-                <a:effectLst/>
+              <a:rPr lang="ru-RU" b="1" dirty="0">
                 <a:latin typeface="Times New Roman" panose="02020603050405020304" pitchFamily="18" charset="0"/>
                 <a:cs typeface="Times New Roman" panose="02020603050405020304" pitchFamily="18" charset="0"/>
               </a:rPr>
               <a:t>Экструдер LIVE</a:t>
             </a:r>
             <a:r>
-              <a:rPr lang="ru-RU" b="0" i="0" dirty="0">
-                <a:effectLst/>
+              <a:rPr lang="ru-RU" dirty="0">
                 <a:latin typeface="Times New Roman" panose="02020603050405020304" pitchFamily="18" charset="0"/>
                 <a:cs typeface="Times New Roman" panose="02020603050405020304" pitchFamily="18" charset="0"/>
               </a:rPr>
@@ -3973,7 +5001,7 @@
             </a:r>
           </a:p>
           <a:p>
-            <a:pPr algn="l">
+            <a:pPr>
               <a:spcBef>
                 <a:spcPts val="450"/>
               </a:spcBef>
@@ -3981,48 +5009,42 @@
               <a:buChar char="•"/>
             </a:pPr>
             <a:r>
-              <a:rPr lang="ru-RU" b="1" i="0" dirty="0">
-                <a:effectLst/>
+              <a:rPr lang="ru-RU" b="1" dirty="0">
                 <a:latin typeface="Times New Roman" panose="02020603050405020304" pitchFamily="18" charset="0"/>
                 <a:cs typeface="Times New Roman" panose="02020603050405020304" pitchFamily="18" charset="0"/>
               </a:rPr>
               <a:t>Журнал партии</a:t>
             </a:r>
             <a:r>
-              <a:rPr lang="ru-RU" b="0" i="0" dirty="0">
-                <a:effectLst/>
+              <a:rPr lang="ru-RU" dirty="0">
                 <a:latin typeface="Times New Roman" panose="02020603050405020304" pitchFamily="18" charset="0"/>
                 <a:cs typeface="Times New Roman" panose="02020603050405020304" pitchFamily="18" charset="0"/>
               </a:rPr>
               <a:t>, </a:t>
             </a:r>
             <a:r>
-              <a:rPr lang="ru-RU" b="1" i="0" dirty="0">
-                <a:effectLst/>
+              <a:rPr lang="ru-RU" b="1" dirty="0">
                 <a:latin typeface="Times New Roman" panose="02020603050405020304" pitchFamily="18" charset="0"/>
                 <a:cs typeface="Times New Roman" panose="02020603050405020304" pitchFamily="18" charset="0"/>
               </a:rPr>
               <a:t>Сообщить о проблеме</a:t>
             </a:r>
             <a:r>
-              <a:rPr lang="ru-RU" b="0" i="0" dirty="0">
-                <a:effectLst/>
+              <a:rPr lang="ru-RU" dirty="0">
                 <a:latin typeface="Times New Roman" panose="02020603050405020304" pitchFamily="18" charset="0"/>
                 <a:cs typeface="Times New Roman" panose="02020603050405020304" pitchFamily="18" charset="0"/>
               </a:rPr>
               <a:t>, </a:t>
             </a:r>
             <a:r>
-              <a:rPr lang="ru-RU" b="1" i="0" dirty="0">
-                <a:effectLst/>
+              <a:rPr lang="ru-RU" b="1" dirty="0">
                 <a:latin typeface="Times New Roman" panose="02020603050405020304" pitchFamily="18" charset="0"/>
                 <a:cs typeface="Times New Roman" panose="02020603050405020304" pitchFamily="18" charset="0"/>
               </a:rPr>
               <a:t>Все проблемы</a:t>
             </a:r>
             <a:r>
-              <a:rPr lang="ru-RU" b="0" i="0" dirty="0">
-                <a:effectLst/>
+              <a:rPr lang="ru-RU" dirty="0">
                 <a:latin typeface="Times New Roman" panose="02020603050405020304" pitchFamily="18" charset="0"/>
                 <a:cs typeface="Times New Roman" panose="02020603050405020304" pitchFamily="18" charset="0"/>
               </a:rPr>
@@ -4045,7 +5067,7 @@
         </p:nvSpPr>
         <p:spPr>
           <a:xfrm>
-            <a:off x="457200" y="-44782"/>
+            <a:off x="1981200" y="-44782"/>
             <a:ext cx="8229600" cy="404406"/>
           </a:xfrm>
           <a:prstGeom prst="rect">
@@ -4069,11 +5091,9 @@
               <a:spcAft>
                 <a:spcPts val="1200"/>
               </a:spcAft>
-              <a:buNone/>
             </a:pPr>
             <a:r>
               <a:rPr lang="ru-RU" sz="2400" b="1" dirty="0">
-                <a:effectLst/>
                 <a:latin typeface="Times New Roman" panose="02020603050405020304" pitchFamily="18" charset="0"/>
                 <a:cs typeface="Times New Roman" panose="02020603050405020304" pitchFamily="18" charset="0"/>
               </a:rPr>
@@ -4081,7 +5101,6 @@
             </a:r>
             <a:r>
               <a:rPr lang="ru-RU" sz="2400" b="1" dirty="0" err="1">
-                <a:effectLst/>
                 <a:latin typeface="Times New Roman" panose="02020603050405020304" pitchFamily="18" charset="0"/>
                 <a:cs typeface="Times New Roman" panose="02020603050405020304" pitchFamily="18" charset="0"/>
               </a:rPr>
@@ -4089,7 +5108,6 @@
             </a:r>
             <a:r>
               <a:rPr lang="ru-RU" sz="2400" b="1" dirty="0">
-                <a:effectLst/>
                 <a:latin typeface="Times New Roman" panose="02020603050405020304" pitchFamily="18" charset="0"/>
                 <a:cs typeface="Times New Roman" panose="02020603050405020304" pitchFamily="18" charset="0"/>
               </a:rPr>
@@ -4112,8 +5130,8 @@
         </p:nvSpPr>
         <p:spPr>
           <a:xfrm>
-            <a:off x="0" y="217379"/>
-            <a:ext cx="9144000" cy="646331"/>
+            <a:off x="1319429" y="281971"/>
+            <a:ext cx="8460432" cy="646331"/>
           </a:xfrm>
           <a:prstGeom prst="rect">
             <a:avLst/>
@@ -4126,33 +5144,29 @@
           </a:bodyPr>
           <a:lstStyle/>
           <a:p>
-            <a:pPr algn="l">
+            <a:pPr>
               <a:spcBef>
                 <a:spcPts val="1200"/>
               </a:spcBef>
               <a:spcAft>
                 <a:spcPts val="1200"/>
               </a:spcAft>
-              <a:buNone/>
             </a:pPr>
             <a:r>
-              <a:rPr lang="ru-RU" b="1" i="0" dirty="0">
-                <a:effectLst/>
+              <a:rPr lang="ru-RU" b="1" dirty="0">
                 <a:latin typeface="Times New Roman" panose="02020603050405020304" pitchFamily="18" charset="0"/>
                 <a:cs typeface="Times New Roman" panose="02020603050405020304" pitchFamily="18" charset="0"/>
               </a:rPr>
               <a:t>Краткое описание:</a:t>
             </a:r>
             <a:br>
-              <a:rPr lang="ru-RU" b="0" i="0" dirty="0">
-                <a:effectLst/>
+              <a:rPr lang="ru-RU" dirty="0">
                 <a:latin typeface="Times New Roman" panose="02020603050405020304" pitchFamily="18" charset="0"/>
                 <a:cs typeface="Times New Roman" panose="02020603050405020304" pitchFamily="18" charset="0"/>
               </a:rPr>
             </a:br>
             <a:r>
-              <a:rPr lang="ru-RU" b="0" i="0" dirty="0">
-                <a:effectLst/>
+              <a:rPr lang="ru-RU" dirty="0">
                 <a:latin typeface="Times New Roman" panose="02020603050405020304" pitchFamily="18" charset="0"/>
                 <a:cs typeface="Times New Roman" panose="02020603050405020304" pitchFamily="18" charset="0"/>
               </a:rPr>
@@ -4183,7 +5197,7 @@
         </p:blipFill>
         <p:spPr>
           <a:xfrm>
-            <a:off x="4551041" y="838890"/>
+            <a:off x="7204910" y="837281"/>
             <a:ext cx="4592959" cy="2696517"/>
           </a:xfrm>
           <a:prstGeom prst="rect">
@@ -4210,7 +5224,7 @@
         </p:nvSpPr>
         <p:spPr>
           <a:xfrm>
-            <a:off x="7297689" y="3474872"/>
+            <a:off x="9357884" y="3468450"/>
             <a:ext cx="4639056" cy="369332"/>
           </a:xfrm>
           <a:prstGeom prst="rect">
@@ -4225,17 +5239,12 @@
           <a:lstStyle/>
           <a:p>
             <a:r>
-              <a:rPr lang="ru-RU" b="0" i="0" dirty="0">
-                <a:effectLst/>
+              <a:rPr lang="ru-RU" dirty="0">
                 <a:latin typeface="Times New Roman" panose="02020603050405020304" pitchFamily="18" charset="0"/>
                 <a:cs typeface="Times New Roman" panose="02020603050405020304" pitchFamily="18" charset="0"/>
               </a:rPr>
               <a:t>Активные партии</a:t>
             </a:r>
-            <a:endParaRPr lang="ru-RU" dirty="0">
-              <a:latin typeface="Times New Roman" panose="02020603050405020304" pitchFamily="18" charset="0"/>
-              <a:cs typeface="Times New Roman" panose="02020603050405020304" pitchFamily="18" charset="0"/>
-            </a:endParaRPr>
           </a:p>
         </p:txBody>
       </p:sp>
@@ -4261,8 +5270,8 @@
         </p:blipFill>
         <p:spPr>
           <a:xfrm>
-            <a:off x="3661048" y="3830907"/>
-            <a:ext cx="4715739" cy="2752455"/>
+            <a:off x="3813448" y="3575890"/>
+            <a:ext cx="4946848" cy="2887347"/>
           </a:xfrm>
           <a:prstGeom prst="rect">
             <a:avLst/>
@@ -4288,7 +5297,7 @@
         </p:nvSpPr>
         <p:spPr>
           <a:xfrm>
-            <a:off x="5806480" y="6511141"/>
+            <a:off x="5807968" y="6463237"/>
             <a:ext cx="4639056" cy="369332"/>
           </a:xfrm>
           <a:prstGeom prst="rect">
@@ -4325,7 +5334,7 @@
 </p:sld>
 </file>
 
-<file path=ppt/slides/slide11.xml><?xml version="1.0" encoding="utf-8"?>
+<file path=ppt/slides/slide12.xml><?xml version="1.0" encoding="utf-8"?>
 <p:sld xmlns:a="http://schemas.openxmlformats.org/drawingml/2006/main" xmlns:r="http://schemas.openxmlformats.org/officeDocument/2006/relationships" xmlns:p="http://schemas.openxmlformats.org/presentationml/2006/main">
   <p:cSld>
     <p:spTree>
@@ -4360,7 +5369,7 @@
         </p:nvSpPr>
         <p:spPr>
           <a:xfrm>
-            <a:off x="427848" y="274638"/>
+            <a:off x="1951848" y="274638"/>
             <a:ext cx="8229600" cy="1143000"/>
           </a:xfrm>
         </p:spPr>
@@ -4400,7 +5409,7 @@
         </p:nvSpPr>
         <p:spPr>
           <a:xfrm>
-            <a:off x="427848" y="1600200"/>
+            <a:off x="1951848" y="1600201"/>
             <a:ext cx="8229600" cy="4525963"/>
           </a:xfrm>
         </p:spPr>
@@ -4440,14 +5449,14 @@
           <p:nvPr>
             <p:extLst>
               <p:ext uri="{D42A27DB-BD31-4B8C-83A1-F6EECF244321}">
-                <p14:modId xmlns:p14="http://schemas.microsoft.com/office/powerpoint/2010/main" val="2135903368"/>
+                <p14:modId xmlns:p14="http://schemas.microsoft.com/office/powerpoint/2010/main" val="20613158"/>
               </p:ext>
             </p:extLst>
           </p:nvPr>
         </p:nvGraphicFramePr>
         <p:xfrm>
-          <a:off x="171456" y="1759100"/>
-          <a:ext cx="8793030" cy="3285982"/>
+          <a:off x="911424" y="1417638"/>
+          <a:ext cx="10153127" cy="3627445"/>
         </p:xfrm>
         <a:graphic>
           <a:graphicData uri="http://schemas.openxmlformats.org/drawingml/2006/table">
@@ -4456,28 +5465,28 @@
                 <a:tableStyleId>{3C2FFA5D-87B4-456A-9821-1D502468CF0F}</a:tableStyleId>
               </a:tblPr>
               <a:tblGrid>
-                <a:gridCol w="1879155">
+                <a:gridCol w="2169821">
                   <a:extLst>
                     <a:ext uri="{9D8B030D-6E8A-4147-A177-3AD203B41FA5}">
                       <a16:colId xmlns:a16="http://schemas.microsoft.com/office/drawing/2014/main" val="541131116"/>
                     </a:ext>
                   </a:extLst>
                 </a:gridCol>
-                <a:gridCol w="2304625">
+                <a:gridCol w="2661102">
                   <a:extLst>
                     <a:ext uri="{9D8B030D-6E8A-4147-A177-3AD203B41FA5}">
                       <a16:colId xmlns:a16="http://schemas.microsoft.com/office/drawing/2014/main" val="1392099284"/>
                     </a:ext>
                   </a:extLst>
                 </a:gridCol>
-                <a:gridCol w="2304625">
+                <a:gridCol w="2661102">
                   <a:extLst>
                     <a:ext uri="{9D8B030D-6E8A-4147-A177-3AD203B41FA5}">
                       <a16:colId xmlns:a16="http://schemas.microsoft.com/office/drawing/2014/main" val="1993756178"/>
                     </a:ext>
                   </a:extLst>
                 </a:gridCol>
-                <a:gridCol w="2304625">
+                <a:gridCol w="2661102">
                   <a:extLst>
                     <a:ext uri="{9D8B030D-6E8A-4147-A177-3AD203B41FA5}">
                       <a16:colId xmlns:a16="http://schemas.microsoft.com/office/drawing/2014/main" val="1446944735"/>
@@ -4485,7 +5494,7 @@
                   </a:extLst>
                 </a:gridCol>
               </a:tblGrid>
-              <a:tr h="573257">
+              <a:tr h="632827">
                 <a:tc>
                   <a:txBody>
                     <a:bodyPr/>
@@ -4584,7 +5593,7 @@
                   </a:ext>
                 </a:extLst>
               </a:tr>
-              <a:tr h="893606">
+              <a:tr h="986465">
                 <a:tc>
                   <a:txBody>
                     <a:bodyPr/>
@@ -4683,7 +5692,7 @@
                   </a:ext>
                 </a:extLst>
               </a:tr>
-              <a:tr h="893606">
+              <a:tr h="986465">
                 <a:tc>
                   <a:txBody>
                     <a:bodyPr/>
@@ -4696,7 +5705,7 @@
                         <a:buNone/>
                       </a:pPr>
                       <a:r>
-                        <a:rPr lang="ru-RU" sz="2400" b="0">
+                        <a:rPr lang="ru-RU" sz="2400" b="0" dirty="0">
                           <a:effectLst/>
                           <a:latin typeface="Times New Roman" panose="02020603050405020304" pitchFamily="18" charset="0"/>
                           <a:cs typeface="Times New Roman" panose="02020603050405020304" pitchFamily="18" charset="0"/>
@@ -4782,7 +5791,7 @@
                   </a:ext>
                 </a:extLst>
               </a:tr>
-              <a:tr h="893606">
+              <a:tr h="1021688">
                 <a:tc>
                   <a:txBody>
                     <a:bodyPr/>
@@ -4907,7 +5916,7 @@
         </p:nvSpPr>
         <p:spPr>
           <a:xfrm>
-            <a:off x="151288" y="138329"/>
+            <a:off x="1675288" y="138329"/>
             <a:ext cx="8943192" cy="523220"/>
           </a:xfrm>
           <a:prstGeom prst="rect">
@@ -4921,21 +5930,13 @@
           </a:bodyPr>
           <a:lstStyle/>
           <a:p>
-            <a:pPr marL="0" marR="0" lvl="0" indent="0" algn="ctr" defTabSz="914400" rtl="0" eaLnBrk="0" fontAlgn="base" latinLnBrk="0" hangingPunct="0">
-              <a:lnSpc>
-                <a:spcPct val="100000"/>
-              </a:lnSpc>
+            <a:pPr algn="ctr" eaLnBrk="0" fontAlgn="base" hangingPunct="0">
               <a:spcBef>
                 <a:spcPct val="0"/>
               </a:spcBef>
               <a:spcAft>
                 <a:spcPct val="0"/>
               </a:spcAft>
-              <a:buClrTx/>
-              <a:buSzTx/>
-              <a:buFontTx/>
-              <a:buNone/>
-              <a:tabLst/>
             </a:pPr>
             <a:r>
               <a:rPr lang="ru-RU" altLang="ru-RU" sz="2800" b="1" dirty="0">
@@ -4961,7 +5962,7 @@
         </p:nvSpPr>
         <p:spPr>
           <a:xfrm>
-            <a:off x="171456" y="1242024"/>
+            <a:off x="1315426" y="957025"/>
             <a:ext cx="4803648" cy="369332"/>
           </a:xfrm>
           <a:prstGeom prst="rect">
@@ -4975,21 +5976,13 @@
           </a:bodyPr>
           <a:lstStyle/>
           <a:p>
-            <a:pPr marL="0" marR="0" lvl="0" indent="0" algn="l" defTabSz="914400" rtl="0" eaLnBrk="0" fontAlgn="base" latinLnBrk="0" hangingPunct="0">
-              <a:lnSpc>
-                <a:spcPct val="100000"/>
-              </a:lnSpc>
+            <a:pPr eaLnBrk="0" fontAlgn="base" hangingPunct="0">
               <a:spcBef>
                 <a:spcPct val="0"/>
               </a:spcBef>
               <a:spcAft>
                 <a:spcPct val="0"/>
               </a:spcAft>
-              <a:buClrTx/>
-              <a:buSzTx/>
-              <a:buFontTx/>
-              <a:buNone/>
-              <a:tabLst/>
             </a:pPr>
             <a:r>
               <a:rPr lang="ru-RU" altLang="ru-RU" b="1" dirty="0">
@@ -5015,7 +6008,7 @@
         </p:nvSpPr>
         <p:spPr>
           <a:xfrm>
-            <a:off x="323528" y="5431310"/>
+            <a:off x="1847528" y="5431310"/>
             <a:ext cx="7632848" cy="369332"/>
           </a:xfrm>
           <a:prstGeom prst="rect">
@@ -5029,49 +6022,29 @@
           </a:bodyPr>
           <a:lstStyle/>
           <a:p>
-            <a:pPr marL="0" marR="0" lvl="0" indent="0" algn="l" defTabSz="914400" rtl="0" eaLnBrk="0" fontAlgn="base" latinLnBrk="0" hangingPunct="0">
-              <a:lnSpc>
-                <a:spcPct val="100000"/>
-              </a:lnSpc>
+            <a:pPr eaLnBrk="0" fontAlgn="base" hangingPunct="0">
               <a:spcBef>
                 <a:spcPct val="0"/>
               </a:spcBef>
               <a:spcAft>
                 <a:spcPct val="0"/>
               </a:spcAft>
-              <a:buClrTx/>
-              <a:buSzTx/>
-              <a:buFontTx/>
-              <a:buNone/>
-              <a:tabLst/>
             </a:pPr>
             <a:r>
-              <a:rPr kumimoji="0" lang="ru-RU" altLang="ru-RU" sz="1800" b="1" i="0" u="none" strike="noStrike" cap="none" normalizeH="0" baseline="0" dirty="0">
-                <a:ln>
-                  <a:noFill/>
-                </a:ln>
-                <a:effectLst/>
+              <a:rPr lang="ru-RU" altLang="ru-RU" b="1" dirty="0">
                 <a:latin typeface="Times New Roman" panose="02020603050405020304" pitchFamily="18" charset="0"/>
                 <a:cs typeface="Times New Roman" panose="02020603050405020304" pitchFamily="18" charset="0"/>
               </a:rPr>
               <a:t>Доля негативных сценариев:</a:t>
             </a:r>
             <a:r>
-              <a:rPr kumimoji="0" lang="ru-RU" altLang="ru-RU" sz="1800" b="0" i="0" u="none" strike="noStrike" cap="none" normalizeH="0" baseline="0" dirty="0">
-                <a:ln>
-                  <a:noFill/>
-                </a:ln>
-                <a:effectLst/>
+              <a:rPr lang="ru-RU" altLang="ru-RU" dirty="0">
                 <a:latin typeface="Times New Roman" panose="02020603050405020304" pitchFamily="18" charset="0"/>
                 <a:cs typeface="Times New Roman" panose="02020603050405020304" pitchFamily="18" charset="0"/>
               </a:rPr>
               <a:t> 22,5% (9 из 40) – соответствует ТЗ (&gt;20%).</a:t>
             </a:r>
-            <a:endParaRPr kumimoji="0" lang="ru-RU" altLang="ru-RU" sz="2800" b="0" i="0" u="none" strike="noStrike" cap="none" normalizeH="0" baseline="0" dirty="0">
-              <a:ln>
-                <a:noFill/>
-              </a:ln>
-              <a:effectLst/>
+            <a:endParaRPr lang="ru-RU" altLang="ru-RU" sz="2800" dirty="0">
               <a:latin typeface="Times New Roman" panose="02020603050405020304" pitchFamily="18" charset="0"/>
               <a:cs typeface="Times New Roman" panose="02020603050405020304" pitchFamily="18" charset="0"/>
             </a:endParaRPr>
@@ -5091,7 +6064,7 @@
 </p:sld>
 </file>
 
-<file path=ppt/slides/slide12.xml><?xml version="1.0" encoding="utf-8"?>
+<file path=ppt/slides/slide13.xml><?xml version="1.0" encoding="utf-8"?>
 <p:sld xmlns:a="http://schemas.openxmlformats.org/drawingml/2006/main" xmlns:r="http://schemas.openxmlformats.org/officeDocument/2006/relationships" xmlns:p="http://schemas.openxmlformats.org/presentationml/2006/main">
   <p:cSld>
     <p:spTree>
@@ -5183,74 +6156,6 @@
       </p:sp>
       <p:sp>
         <p:nvSpPr>
-          <p:cNvPr id="5" name="TextBox 4">
-            <a:extLst>
-              <a:ext uri="{FF2B5EF4-FFF2-40B4-BE49-F238E27FC236}">
-                <a16:creationId xmlns:a16="http://schemas.microsoft.com/office/drawing/2014/main" id="{669F88DC-2935-E4F4-B250-95B632AE1744}"/>
-              </a:ext>
-            </a:extLst>
-          </p:cNvPr>
-          <p:cNvSpPr txBox="1"/>
-          <p:nvPr/>
-        </p:nvSpPr>
-        <p:spPr>
-          <a:xfrm>
-            <a:off x="107504" y="547171"/>
-            <a:ext cx="6704720" cy="369332"/>
-          </a:xfrm>
-          <a:prstGeom prst="rect">
-            <a:avLst/>
-          </a:prstGeom>
-          <a:noFill/>
-        </p:spPr>
-        <p:txBody>
-          <a:bodyPr wrap="square">
-            <a:spAutoFit/>
-          </a:bodyPr>
-          <a:lstStyle/>
-          <a:p>
-            <a:pPr algn="l">
-              <a:spcBef>
-                <a:spcPts val="1200"/>
-              </a:spcBef>
-              <a:spcAft>
-                <a:spcPts val="1200"/>
-              </a:spcAft>
-              <a:buNone/>
-            </a:pPr>
-            <a:r>
-              <a:rPr lang="ru-RU" b="1" i="0" dirty="0">
-                <a:effectLst/>
-                <a:latin typeface="Times New Roman" panose="02020603050405020304" pitchFamily="18" charset="0"/>
-                <a:cs typeface="Times New Roman" panose="02020603050405020304" pitchFamily="18" charset="0"/>
-              </a:rPr>
-              <a:t>Выявленные и устранённые ошибки (таблиц</a:t>
-            </a:r>
-            <a:r>
-              <a:rPr lang="ru-RU" b="1" dirty="0">
-                <a:latin typeface="Times New Roman" panose="02020603050405020304" pitchFamily="18" charset="0"/>
-                <a:cs typeface="Times New Roman" panose="02020603050405020304" pitchFamily="18" charset="0"/>
-              </a:rPr>
-              <a:t>ы</a:t>
-            </a:r>
-            <a:r>
-              <a:rPr lang="ru-RU" b="1" i="0" dirty="0">
-                <a:effectLst/>
-                <a:latin typeface="Times New Roman" panose="02020603050405020304" pitchFamily="18" charset="0"/>
-                <a:cs typeface="Times New Roman" panose="02020603050405020304" pitchFamily="18" charset="0"/>
-              </a:rPr>
-              <a:t>):</a:t>
-            </a:r>
-            <a:endParaRPr lang="ru-RU" b="0" i="0" dirty="0">
-              <a:effectLst/>
-              <a:latin typeface="Times New Roman" panose="02020603050405020304" pitchFamily="18" charset="0"/>
-              <a:cs typeface="Times New Roman" panose="02020603050405020304" pitchFamily="18" charset="0"/>
-            </a:endParaRPr>
-          </a:p>
-        </p:txBody>
-      </p:sp>
-      <p:sp>
-        <p:nvSpPr>
           <p:cNvPr id="7" name="TextBox 6">
             <a:extLst>
               <a:ext uri="{FF2B5EF4-FFF2-40B4-BE49-F238E27FC236}">
@@ -5263,7 +6168,7 @@
         </p:nvSpPr>
         <p:spPr>
           <a:xfrm>
-            <a:off x="251520" y="82598"/>
+            <a:off x="1775520" y="258596"/>
             <a:ext cx="8435280" cy="431528"/>
           </a:xfrm>
           <a:prstGeom prst="rect">
@@ -5287,15 +6192,13 @@
               <a:spcAft>
                 <a:spcPts val="1200"/>
               </a:spcAft>
-              <a:buNone/>
             </a:pPr>
             <a:r>
               <a:rPr lang="ru-RU" sz="3200" b="1" dirty="0">
-                <a:effectLst/>
-                <a:latin typeface="Times New Roman" panose="02020603050405020304" pitchFamily="18" charset="0"/>
-                <a:cs typeface="Times New Roman" panose="02020603050405020304" pitchFamily="18" charset="0"/>
-              </a:rPr>
-              <a:t> Задание 7. Отладка программного модуля</a:t>
+                <a:latin typeface="Times New Roman" panose="02020603050405020304" pitchFamily="18" charset="0"/>
+                <a:cs typeface="Times New Roman" panose="02020603050405020304" pitchFamily="18" charset="0"/>
+              </a:rPr>
+              <a:t> Задание 7. Примеры ручных тестов</a:t>
             </a:r>
           </a:p>
         </p:txBody>
@@ -5315,14 +6218,14 @@
           <p:nvPr>
             <p:extLst>
               <p:ext uri="{D42A27DB-BD31-4B8C-83A1-F6EECF244321}">
-                <p14:modId xmlns:p14="http://schemas.microsoft.com/office/powerpoint/2010/main" val="4250607237"/>
+                <p14:modId xmlns:p14="http://schemas.microsoft.com/office/powerpoint/2010/main" val="1177798243"/>
               </p:ext>
             </p:extLst>
           </p:nvPr>
         </p:nvGraphicFramePr>
         <p:xfrm>
-          <a:off x="97272" y="929036"/>
-          <a:ext cx="4177578" cy="5831955"/>
+          <a:off x="767408" y="916503"/>
+          <a:ext cx="5031442" cy="5844491"/>
         </p:xfrm>
         <a:graphic>
           <a:graphicData uri="http://schemas.openxmlformats.org/drawingml/2006/table">
@@ -5331,14 +6234,14 @@
                 <a:tableStyleId>{5C22544A-7EE6-4342-B048-85BDC9FD1C3A}</a:tableStyleId>
               </a:tblPr>
               <a:tblGrid>
-                <a:gridCol w="1417538">
+                <a:gridCol w="1707272">
                   <a:extLst>
                     <a:ext uri="{9D8B030D-6E8A-4147-A177-3AD203B41FA5}">
                       <a16:colId xmlns:a16="http://schemas.microsoft.com/office/drawing/2014/main" val="2066203632"/>
                     </a:ext>
                   </a:extLst>
                 </a:gridCol>
-                <a:gridCol w="2760040">
+                <a:gridCol w="3324170">
                   <a:extLst>
                     <a:ext uri="{9D8B030D-6E8A-4147-A177-3AD203B41FA5}">
                       <a16:colId xmlns:a16="http://schemas.microsoft.com/office/drawing/2014/main" val="4262163776"/>
@@ -5346,7 +6249,7 @@
                   </a:extLst>
                 </a:gridCol>
               </a:tblGrid>
-              <a:tr h="255201">
+              <a:tr h="255749">
                 <a:tc>
                   <a:txBody>
                     <a:bodyPr/>
@@ -5417,7 +6320,7 @@
                   </a:ext>
                 </a:extLst>
               </a:tr>
-              <a:tr h="255201">
+              <a:tr h="255749">
                 <a:tc>
                   <a:txBody>
                     <a:bodyPr/>
@@ -5488,7 +6391,7 @@
                   </a:ext>
                 </a:extLst>
               </a:tr>
-              <a:tr h="349304">
+              <a:tr h="370938">
                 <a:tc>
                   <a:txBody>
                     <a:bodyPr/>
@@ -5559,7 +6462,7 @@
                   </a:ext>
                 </a:extLst>
               </a:tr>
-              <a:tr h="255201">
+              <a:tr h="370938">
                 <a:tc>
                   <a:txBody>
                     <a:bodyPr/>
@@ -5630,7 +6533,7 @@
                   </a:ext>
                 </a:extLst>
               </a:tr>
-              <a:tr h="1069010">
+              <a:tr h="1530140">
                 <a:tc>
                   <a:txBody>
                     <a:bodyPr/>
@@ -5893,7 +6796,7 @@
                   </a:ext>
                 </a:extLst>
               </a:tr>
-              <a:tr h="255201">
+              <a:tr h="370938">
                 <a:tc>
                   <a:txBody>
                     <a:bodyPr/>
@@ -5964,7 +6867,7 @@
                   </a:ext>
                 </a:extLst>
               </a:tr>
-              <a:tr h="349304">
+              <a:tr h="564138">
                 <a:tc>
                   <a:txBody>
                     <a:bodyPr/>
@@ -6035,7 +6938,7 @@
                   </a:ext>
                 </a:extLst>
               </a:tr>
-              <a:tr h="349304">
+              <a:tr h="564138">
                 <a:tc>
                   <a:txBody>
                     <a:bodyPr/>
@@ -6106,7 +7009,7 @@
                   </a:ext>
                 </a:extLst>
               </a:tr>
-              <a:tr h="349304">
+              <a:tr h="564138">
                 <a:tc>
                   <a:txBody>
                     <a:bodyPr/>
@@ -6193,7 +7096,7 @@
                   </a:ext>
                 </a:extLst>
               </a:tr>
-              <a:tr h="255201">
+              <a:tr h="370938">
                 <a:tc>
                   <a:txBody>
                     <a:bodyPr/>
@@ -6264,7 +7167,7 @@
                   </a:ext>
                 </a:extLst>
               </a:tr>
-              <a:tr h="255201">
+              <a:tr h="370938">
                 <a:tc>
                   <a:txBody>
                     <a:bodyPr/>
@@ -6344,7 +7247,7 @@
                   </a:ext>
                 </a:extLst>
               </a:tr>
-              <a:tr h="255201">
+              <a:tr h="255749">
                 <a:tc>
                   <a:txBody>
                     <a:bodyPr/>
@@ -6434,14 +7337,14 @@
           <p:nvPr>
             <p:extLst>
               <p:ext uri="{D42A27DB-BD31-4B8C-83A1-F6EECF244321}">
-                <p14:modId xmlns:p14="http://schemas.microsoft.com/office/powerpoint/2010/main" val="3626057807"/>
+                <p14:modId xmlns:p14="http://schemas.microsoft.com/office/powerpoint/2010/main" val="2235777674"/>
               </p:ext>
             </p:extLst>
           </p:nvPr>
         </p:nvGraphicFramePr>
         <p:xfrm>
-          <a:off x="4572000" y="929036"/>
-          <a:ext cx="4464496" cy="5807399"/>
+          <a:off x="6096000" y="916503"/>
+          <a:ext cx="5400600" cy="5819931"/>
         </p:xfrm>
         <a:graphic>
           <a:graphicData uri="http://schemas.openxmlformats.org/drawingml/2006/table">
@@ -6450,14 +7353,14 @@
                 <a:tableStyleId>{5C22544A-7EE6-4342-B048-85BDC9FD1C3A}</a:tableStyleId>
               </a:tblPr>
               <a:tblGrid>
-                <a:gridCol w="1514896">
+                <a:gridCol w="1832535">
                   <a:extLst>
                     <a:ext uri="{9D8B030D-6E8A-4147-A177-3AD203B41FA5}">
                       <a16:colId xmlns:a16="http://schemas.microsoft.com/office/drawing/2014/main" val="4240350624"/>
                     </a:ext>
                   </a:extLst>
                 </a:gridCol>
-                <a:gridCol w="2949600">
+                <a:gridCol w="3568065">
                   <a:extLst>
                     <a:ext uri="{9D8B030D-6E8A-4147-A177-3AD203B41FA5}">
                       <a16:colId xmlns:a16="http://schemas.microsoft.com/office/drawing/2014/main" val="4250973427"/>
@@ -6465,7 +7368,7 @@
                   </a:extLst>
                 </a:gridCol>
               </a:tblGrid>
-              <a:tr h="368978">
+              <a:tr h="369774">
                 <a:tc>
                   <a:txBody>
                     <a:bodyPr/>
@@ -6536,7 +7439,7 @@
                   </a:ext>
                 </a:extLst>
               </a:tr>
-              <a:tr h="368978">
+              <a:tr h="369774">
                 <a:tc>
                   <a:txBody>
                     <a:bodyPr/>
@@ -6584,14 +7487,14 @@
                         <a:buNone/>
                       </a:pPr>
                       <a:r>
-                        <a:rPr lang="ru-RU" sz="1200">
+                        <a:rPr lang="ru-RU" sz="1200" dirty="0">
                           <a:effectLst/>
                           <a:latin typeface="Times New Roman" panose="02020603050405020304" pitchFamily="18" charset="0"/>
                           <a:cs typeface="Times New Roman" panose="02020603050405020304" pitchFamily="18" charset="0"/>
                         </a:rPr>
                         <a:t> High</a:t>
                       </a:r>
-                      <a:endParaRPr lang="ru-RU" sz="1000">
+                      <a:endParaRPr lang="ru-RU" sz="1000" dirty="0">
                         <a:effectLst/>
                         <a:latin typeface="Times New Roman" panose="02020603050405020304" pitchFamily="18" charset="0"/>
                         <a:ea typeface="Times New Roman" panose="02020603050405020304" pitchFamily="18" charset="0"/>
@@ -6607,7 +7510,7 @@
                   </a:ext>
                 </a:extLst>
               </a:tr>
-              <a:tr h="494242">
+              <a:tr h="495309">
                 <a:tc>
                   <a:txBody>
                     <a:bodyPr/>
@@ -6678,7 +7581,7 @@
                   </a:ext>
                 </a:extLst>
               </a:tr>
-              <a:tr h="437440">
+              <a:tr h="438384">
                 <a:tc>
                   <a:txBody>
                     <a:bodyPr/>
@@ -6749,7 +7652,7 @@
                   </a:ext>
                 </a:extLst>
               </a:tr>
-              <a:tr h="1257972">
+              <a:tr h="1260687">
                 <a:tc>
                   <a:txBody>
                     <a:bodyPr/>
@@ -6880,7 +7783,7 @@
                   </a:ext>
                 </a:extLst>
               </a:tr>
-              <a:tr h="437440">
+              <a:tr h="438384">
                 <a:tc>
                   <a:txBody>
                     <a:bodyPr/>
@@ -6951,7 +7854,7 @@
                   </a:ext>
                 </a:extLst>
               </a:tr>
-              <a:tr h="494242">
+              <a:tr h="495309">
                 <a:tc>
                   <a:txBody>
                     <a:bodyPr/>
@@ -7022,7 +7925,7 @@
                   </a:ext>
                 </a:extLst>
               </a:tr>
-              <a:tr h="437440">
+              <a:tr h="438384">
                 <a:tc>
                   <a:txBody>
                     <a:bodyPr/>
@@ -7093,7 +7996,7 @@
                   </a:ext>
                 </a:extLst>
               </a:tr>
-              <a:tr h="368978">
+              <a:tr h="369774">
                 <a:tc>
                   <a:txBody>
                     <a:bodyPr/>
@@ -7164,7 +8067,7 @@
                   </a:ext>
                 </a:extLst>
               </a:tr>
-              <a:tr h="368978">
+              <a:tr h="369774">
                 <a:tc>
                   <a:txBody>
                     <a:bodyPr/>
@@ -7235,7 +8138,7 @@
                   </a:ext>
                 </a:extLst>
               </a:tr>
-              <a:tr h="368978">
+              <a:tr h="404604">
                 <a:tc>
                   <a:txBody>
                     <a:bodyPr/>
@@ -7307,7 +8210,7 @@
                   </a:ext>
                 </a:extLst>
               </a:tr>
-              <a:tr h="368978">
+              <a:tr h="369774">
                 <a:tc>
                   <a:txBody>
                     <a:bodyPr/>
@@ -7395,7 +8298,7 @@
 </p:sld>
 </file>
 
-<file path=ppt/slides/slide13.xml><?xml version="1.0" encoding="utf-8"?>
+<file path=ppt/slides/slide14.xml><?xml version="1.0" encoding="utf-8"?>
 <p:sld xmlns:a="http://schemas.openxmlformats.org/drawingml/2006/main" xmlns:r="http://schemas.openxmlformats.org/officeDocument/2006/relationships" xmlns:p="http://schemas.openxmlformats.org/presentationml/2006/main">
   <p:cSld>
     <p:spTree>
@@ -7430,7 +8333,7 @@
         </p:nvSpPr>
         <p:spPr>
           <a:xfrm>
-            <a:off x="-396552" y="1553835"/>
+            <a:off x="1127448" y="1553835"/>
             <a:ext cx="8229600" cy="1143000"/>
           </a:xfrm>
         </p:spPr>
@@ -7463,14 +8366,14 @@
           <p:nvPr>
             <p:extLst>
               <p:ext uri="{D42A27DB-BD31-4B8C-83A1-F6EECF244321}">
-                <p14:modId xmlns:p14="http://schemas.microsoft.com/office/powerpoint/2010/main" val="3233396494"/>
+                <p14:modId xmlns:p14="http://schemas.microsoft.com/office/powerpoint/2010/main" val="1039705867"/>
               </p:ext>
             </p:extLst>
           </p:nvPr>
         </p:nvGraphicFramePr>
         <p:xfrm>
-          <a:off x="564369" y="620688"/>
-          <a:ext cx="8003166" cy="5807774"/>
+          <a:off x="1271464" y="476672"/>
+          <a:ext cx="9937104" cy="6192688"/>
         </p:xfrm>
         <a:graphic>
           <a:graphicData uri="http://schemas.openxmlformats.org/drawingml/2006/table">
@@ -7479,21 +8382,21 @@
                 <a:tableStyleId>{3C2FFA5D-87B4-456A-9821-1D502468CF0F}</a:tableStyleId>
               </a:tblPr>
               <a:tblGrid>
-                <a:gridCol w="2667722">
+                <a:gridCol w="3312368">
                   <a:extLst>
                     <a:ext uri="{9D8B030D-6E8A-4147-A177-3AD203B41FA5}">
                       <a16:colId xmlns:a16="http://schemas.microsoft.com/office/drawing/2014/main" val="1944581442"/>
                     </a:ext>
                   </a:extLst>
                 </a:gridCol>
-                <a:gridCol w="2667722">
+                <a:gridCol w="3312368">
                   <a:extLst>
                     <a:ext uri="{9D8B030D-6E8A-4147-A177-3AD203B41FA5}">
                       <a16:colId xmlns:a16="http://schemas.microsoft.com/office/drawing/2014/main" val="4263503372"/>
                     </a:ext>
                   </a:extLst>
                 </a:gridCol>
-                <a:gridCol w="2667722">
+                <a:gridCol w="3312368">
                   <a:extLst>
                     <a:ext uri="{9D8B030D-6E8A-4147-A177-3AD203B41FA5}">
                       <a16:colId xmlns:a16="http://schemas.microsoft.com/office/drawing/2014/main" val="2436839837"/>
@@ -7501,7 +8404,7 @@
                   </a:extLst>
                 </a:gridCol>
               </a:tblGrid>
-              <a:tr h="427557">
+              <a:tr h="455893">
                 <a:tc>
                   <a:txBody>
                     <a:bodyPr/>
@@ -7577,7 +8480,7 @@
                   </a:ext>
                 </a:extLst>
               </a:tr>
-              <a:tr h="1307058">
+              <a:tr h="1393685">
                 <a:tc>
                   <a:txBody>
                     <a:bodyPr/>
@@ -7669,7 +8572,7 @@
                   </a:ext>
                 </a:extLst>
               </a:tr>
-              <a:tr h="1018290">
+              <a:tr h="1085777">
                 <a:tc>
                   <a:txBody>
                     <a:bodyPr/>
@@ -7761,7 +8664,7 @@
                   </a:ext>
                 </a:extLst>
               </a:tr>
-              <a:tr h="1018290">
+              <a:tr h="1085777">
                 <a:tc>
                   <a:txBody>
                     <a:bodyPr/>
@@ -7861,7 +8764,7 @@
                   </a:ext>
                 </a:extLst>
               </a:tr>
-              <a:tr h="922033">
+              <a:tr h="983142">
                 <a:tc>
                   <a:txBody>
                     <a:bodyPr/>
@@ -7953,7 +8856,7 @@
                   </a:ext>
                 </a:extLst>
               </a:tr>
-              <a:tr h="1114546">
+              <a:tr h="1188414">
                 <a:tc>
                   <a:txBody>
                     <a:bodyPr/>
@@ -8097,7 +9000,7 @@
         </p:nvSpPr>
         <p:spPr>
           <a:xfrm>
-            <a:off x="179512" y="-148176"/>
+            <a:off x="1703512" y="-148176"/>
             <a:ext cx="8640960" cy="1077218"/>
           </a:xfrm>
           <a:prstGeom prst="rect">
@@ -8111,28 +9014,16 @@
           </a:bodyPr>
           <a:lstStyle/>
           <a:p>
-            <a:pPr marL="0" marR="0" lvl="0" indent="0" algn="ctr" defTabSz="914400" rtl="0" eaLnBrk="0" fontAlgn="base" latinLnBrk="0" hangingPunct="0">
-              <a:lnSpc>
-                <a:spcPct val="100000"/>
-              </a:lnSpc>
+            <a:pPr algn="ctr" eaLnBrk="0" fontAlgn="base" hangingPunct="0">
               <a:spcBef>
                 <a:spcPct val="0"/>
               </a:spcBef>
               <a:spcAft>
                 <a:spcPct val="0"/>
               </a:spcAft>
-              <a:buClrTx/>
-              <a:buSzTx/>
-              <a:buFontTx/>
-              <a:buNone/>
-              <a:tabLst/>
             </a:pPr>
             <a:r>
-              <a:rPr kumimoji="0" lang="ru-RU" altLang="ru-RU" sz="3200" b="1" i="0" u="none" strike="noStrike" cap="none" normalizeH="0" baseline="0" dirty="0">
-                <a:ln>
-                  <a:noFill/>
-                </a:ln>
-                <a:effectLst/>
+              <a:rPr lang="ru-RU" altLang="ru-RU" sz="3200" b="1" dirty="0">
                 <a:latin typeface="Times New Roman" panose="02020603050405020304" pitchFamily="18" charset="0"/>
                 <a:cs typeface="Times New Roman" panose="02020603050405020304" pitchFamily="18" charset="0"/>
               </a:rPr>
@@ -8140,27 +9031,15 @@
             </a:r>
           </a:p>
           <a:p>
-            <a:pPr marL="0" marR="0" lvl="0" indent="0" algn="ctr" defTabSz="914400" rtl="0" eaLnBrk="0" fontAlgn="base" latinLnBrk="0" hangingPunct="0">
-              <a:lnSpc>
-                <a:spcPct val="100000"/>
-              </a:lnSpc>
+            <a:pPr algn="ctr" eaLnBrk="0" fontAlgn="base" hangingPunct="0">
               <a:spcBef>
                 <a:spcPct val="0"/>
               </a:spcBef>
               <a:spcAft>
                 <a:spcPct val="0"/>
               </a:spcAft>
-              <a:buClrTx/>
-              <a:buSzTx/>
-              <a:buFontTx/>
-              <a:buNone/>
-              <a:tabLst/>
             </a:pPr>
-            <a:endParaRPr kumimoji="0" lang="ru-RU" altLang="ru-RU" sz="3200" b="0" i="0" u="none" strike="noStrike" cap="none" normalizeH="0" baseline="0" dirty="0">
-              <a:ln>
-                <a:noFill/>
-              </a:ln>
-              <a:effectLst/>
+            <a:endParaRPr lang="ru-RU" altLang="ru-RU" sz="3200" dirty="0">
               <a:latin typeface="Times New Roman" panose="02020603050405020304" pitchFamily="18" charset="0"/>
               <a:cs typeface="Times New Roman" panose="02020603050405020304" pitchFamily="18" charset="0"/>
             </a:endParaRPr>
@@ -8185,7 +9064,7 @@
         </p:nvSpPr>
         <p:spPr>
           <a:xfrm>
-            <a:off x="451152" y="2288720"/>
+            <a:off x="1975152" y="2288721"/>
             <a:ext cx="8229600" cy="4525963"/>
           </a:xfrm>
         </p:spPr>
@@ -8223,7 +9102,7 @@
 </p:sld>
 </file>
 
-<file path=ppt/slides/slide14.xml><?xml version="1.0" encoding="utf-8"?>
+<file path=ppt/slides/slide15.xml><?xml version="1.0" encoding="utf-8"?>
 <p:sld xmlns:a="http://schemas.openxmlformats.org/drawingml/2006/main" xmlns:r="http://schemas.openxmlformats.org/officeDocument/2006/relationships" xmlns:p="http://schemas.openxmlformats.org/presentationml/2006/main">
   <p:cSld>
     <p:spTree>
@@ -8252,7 +9131,7 @@
         </p:nvSpPr>
         <p:spPr>
           <a:xfrm>
-            <a:off x="395536" y="-243408"/>
+            <a:off x="1919536" y="-243408"/>
             <a:ext cx="8229600" cy="1143000"/>
           </a:xfrm>
         </p:spPr>
@@ -8278,8 +9157,8 @@
         </p:nvSpPr>
         <p:spPr>
           <a:xfrm>
-            <a:off x="227856" y="751344"/>
-            <a:ext cx="8520608" cy="5355312"/>
+            <a:off x="551384" y="882971"/>
+            <a:ext cx="10945216" cy="5324535"/>
           </a:xfrm>
           <a:prstGeom prst="rect">
             <a:avLst/>
@@ -8293,34 +9172,34 @@
           <a:lstStyle/>
           <a:p>
             <a:r>
-              <a:rPr lang="ru-RU" b="1" dirty="0">
+              <a:rPr lang="ru-RU" sz="2000" b="1" dirty="0">
                 <a:latin typeface="Times New Roman" panose="02020603050405020304" pitchFamily="18" charset="0"/>
                 <a:cs typeface="Times New Roman" panose="02020603050405020304" pitchFamily="18" charset="0"/>
               </a:rPr>
               <a:t>Общие выводы по практике:</a:t>
             </a:r>
-            <a:endParaRPr lang="ru-RU" dirty="0">
+            <a:endParaRPr lang="ru-RU" sz="2000" dirty="0">
               <a:latin typeface="Times New Roman" panose="02020603050405020304" pitchFamily="18" charset="0"/>
               <a:cs typeface="Times New Roman" panose="02020603050405020304" pitchFamily="18" charset="0"/>
             </a:endParaRPr>
           </a:p>
           <a:p>
             <a:r>
-              <a:rPr lang="ru-RU" dirty="0">
+              <a:rPr lang="ru-RU" sz="2000" dirty="0">
                 <a:latin typeface="Times New Roman" panose="02020603050405020304" pitchFamily="18" charset="0"/>
                 <a:cs typeface="Times New Roman" panose="02020603050405020304" pitchFamily="18" charset="0"/>
               </a:rPr>
               <a:t>Проведён анализ предметной области, спроектирована база данных (14 таблиц, 3НФ, уникальные фильтрованные индексы для активных рецептур/</a:t>
             </a:r>
             <a:r>
-              <a:rPr lang="ru-RU" dirty="0" err="1">
+              <a:rPr lang="ru-RU" sz="2000" dirty="0" err="1">
                 <a:latin typeface="Times New Roman" panose="02020603050405020304" pitchFamily="18" charset="0"/>
                 <a:cs typeface="Times New Roman" panose="02020603050405020304" pitchFamily="18" charset="0"/>
               </a:rPr>
               <a:t>техкарт</a:t>
             </a:r>
             <a:r>
-              <a:rPr lang="ru-RU" dirty="0">
+              <a:rPr lang="ru-RU" sz="2000" dirty="0">
                 <a:latin typeface="Times New Roman" panose="02020603050405020304" pitchFamily="18" charset="0"/>
                 <a:cs typeface="Times New Roman" panose="02020603050405020304" pitchFamily="18" charset="0"/>
               </a:rPr>
@@ -8329,14 +9208,14 @@
           </a:p>
           <a:p>
             <a:r>
-              <a:rPr lang="ru-RU" dirty="0">
+              <a:rPr lang="ru-RU" sz="2000" dirty="0">
                 <a:latin typeface="Times New Roman" panose="02020603050405020304" pitchFamily="18" charset="0"/>
                 <a:cs typeface="Times New Roman" panose="02020603050405020304" pitchFamily="18" charset="0"/>
               </a:rPr>
               <a:t>Разработан API на </a:t>
             </a:r>
             <a:r>
-              <a:rPr lang="ru-RU" dirty="0">
+              <a:rPr lang="ru-RU" sz="2000" dirty="0">
                 <a:latin typeface="Times New Roman" panose="02020603050405020304" pitchFamily="18" charset="0"/>
                 <a:cs typeface="Times New Roman" panose="02020603050405020304" pitchFamily="18" charset="0"/>
                 <a:hlinkClick r:id="rId2"/>
@@ -8344,7 +9223,7 @@
               <a:t>ASP.NET</a:t>
             </a:r>
             <a:r>
-              <a:rPr lang="ru-RU" dirty="0">
+              <a:rPr lang="ru-RU" sz="2000" dirty="0">
                 <a:latin typeface="Times New Roman" panose="02020603050405020304" pitchFamily="18" charset="0"/>
                 <a:cs typeface="Times New Roman" panose="02020603050405020304" pitchFamily="18" charset="0"/>
               </a:rPr>
@@ -8353,7 +9232,7 @@
           </a:p>
           <a:p>
             <a:r>
-              <a:rPr lang="ru-RU" dirty="0">
+              <a:rPr lang="ru-RU" sz="2000" dirty="0">
                 <a:latin typeface="Times New Roman" panose="02020603050405020304" pitchFamily="18" charset="0"/>
                 <a:cs typeface="Times New Roman" panose="02020603050405020304" pitchFamily="18" charset="0"/>
               </a:rPr>
@@ -8363,28 +9242,28 @@
           <a:p>
             <a:pPr lvl="1"/>
             <a:r>
-              <a:rPr lang="ru-RU" b="1" dirty="0">
+              <a:rPr lang="ru-RU" sz="2000" b="1" dirty="0">
                 <a:latin typeface="Times New Roman" panose="02020603050405020304" pitchFamily="18" charset="0"/>
                 <a:cs typeface="Times New Roman" panose="02020603050405020304" pitchFamily="18" charset="0"/>
               </a:rPr>
               <a:t>Технолог</a:t>
             </a:r>
             <a:r>
-              <a:rPr lang="ru-RU" dirty="0">
+              <a:rPr lang="ru-RU" sz="2000" dirty="0">
                 <a:latin typeface="Times New Roman" panose="02020603050405020304" pitchFamily="18" charset="0"/>
                 <a:cs typeface="Times New Roman" panose="02020603050405020304" pitchFamily="18" charset="0"/>
               </a:rPr>
               <a:t> – управление рецептурами, </a:t>
             </a:r>
             <a:r>
-              <a:rPr lang="ru-RU" dirty="0" err="1">
+              <a:rPr lang="ru-RU" sz="2000" dirty="0" err="1">
                 <a:latin typeface="Times New Roman" panose="02020603050405020304" pitchFamily="18" charset="0"/>
                 <a:cs typeface="Times New Roman" panose="02020603050405020304" pitchFamily="18" charset="0"/>
               </a:rPr>
               <a:t>техкартами</a:t>
             </a:r>
             <a:r>
-              <a:rPr lang="ru-RU" dirty="0">
+              <a:rPr lang="ru-RU" sz="2000" dirty="0">
                 <a:latin typeface="Times New Roman" panose="02020603050405020304" pitchFamily="18" charset="0"/>
                 <a:cs typeface="Times New Roman" panose="02020603050405020304" pitchFamily="18" charset="0"/>
               </a:rPr>
@@ -8394,14 +9273,14 @@
           <a:p>
             <a:pPr lvl="1"/>
             <a:r>
-              <a:rPr lang="ru-RU" b="1" dirty="0">
+              <a:rPr lang="ru-RU" sz="2000" b="1" dirty="0">
                 <a:latin typeface="Times New Roman" panose="02020603050405020304" pitchFamily="18" charset="0"/>
                 <a:cs typeface="Times New Roman" panose="02020603050405020304" pitchFamily="18" charset="0"/>
               </a:rPr>
               <a:t>Лаборант</a:t>
             </a:r>
             <a:r>
-              <a:rPr lang="ru-RU" dirty="0">
+              <a:rPr lang="ru-RU" sz="2000" dirty="0">
                 <a:latin typeface="Times New Roman" panose="02020603050405020304" pitchFamily="18" charset="0"/>
                 <a:cs typeface="Times New Roman" panose="02020603050405020304" pitchFamily="18" charset="0"/>
               </a:rPr>
@@ -8411,14 +9290,14 @@
           <a:p>
             <a:pPr lvl="1"/>
             <a:r>
-              <a:rPr lang="ru-RU" b="1" dirty="0">
+              <a:rPr lang="ru-RU" sz="2000" b="1" dirty="0">
                 <a:latin typeface="Times New Roman" panose="02020603050405020304" pitchFamily="18" charset="0"/>
                 <a:cs typeface="Times New Roman" panose="02020603050405020304" pitchFamily="18" charset="0"/>
               </a:rPr>
               <a:t>Аппаратчик</a:t>
             </a:r>
             <a:r>
-              <a:rPr lang="ru-RU" dirty="0">
+              <a:rPr lang="ru-RU" sz="2000" dirty="0">
                 <a:latin typeface="Times New Roman" panose="02020603050405020304" pitchFamily="18" charset="0"/>
                 <a:cs typeface="Times New Roman" panose="02020603050405020304" pitchFamily="18" charset="0"/>
               </a:rPr>
@@ -8427,7 +9306,7 @@
           </a:p>
           <a:p>
             <a:r>
-              <a:rPr lang="ru-RU" dirty="0">
+              <a:rPr lang="ru-RU" sz="2000" dirty="0">
                 <a:latin typeface="Times New Roman" panose="02020603050405020304" pitchFamily="18" charset="0"/>
                 <a:cs typeface="Times New Roman" panose="02020603050405020304" pitchFamily="18" charset="0"/>
               </a:rPr>
@@ -8436,21 +9315,21 @@
           </a:p>
           <a:p>
             <a:r>
-              <a:rPr lang="ru-RU" dirty="0">
+              <a:rPr lang="ru-RU" sz="2000" dirty="0">
                 <a:latin typeface="Times New Roman" panose="02020603050405020304" pitchFamily="18" charset="0"/>
                 <a:cs typeface="Times New Roman" panose="02020603050405020304" pitchFamily="18" charset="0"/>
               </a:rPr>
               <a:t>Разработано </a:t>
             </a:r>
             <a:r>
-              <a:rPr lang="ru-RU" b="1" dirty="0">
+              <a:rPr lang="ru-RU" sz="2000" b="1" dirty="0">
                 <a:latin typeface="Times New Roman" panose="02020603050405020304" pitchFamily="18" charset="0"/>
                 <a:cs typeface="Times New Roman" panose="02020603050405020304" pitchFamily="18" charset="0"/>
               </a:rPr>
               <a:t>80 тестов</a:t>
             </a:r>
             <a:r>
-              <a:rPr lang="ru-RU" dirty="0">
+              <a:rPr lang="ru-RU" sz="2000" dirty="0">
                 <a:latin typeface="Times New Roman" panose="02020603050405020304" pitchFamily="18" charset="0"/>
                 <a:cs typeface="Times New Roman" panose="02020603050405020304" pitchFamily="18" charset="0"/>
               </a:rPr>
@@ -8459,7 +9338,7 @@
           </a:p>
           <a:p>
             <a:r>
-              <a:rPr lang="ru-RU" dirty="0">
+              <a:rPr lang="ru-RU" sz="2000" dirty="0">
                 <a:latin typeface="Times New Roman" panose="02020603050405020304" pitchFamily="18" charset="0"/>
                 <a:cs typeface="Times New Roman" panose="02020603050405020304" pitchFamily="18" charset="0"/>
               </a:rPr>
@@ -8468,34 +9347,34 @@
           </a:p>
           <a:p>
             <a:r>
-              <a:rPr lang="ru-RU" b="1" dirty="0">
+              <a:rPr lang="ru-RU" sz="2000" b="1" dirty="0">
                 <a:latin typeface="Times New Roman" panose="02020603050405020304" pitchFamily="18" charset="0"/>
                 <a:cs typeface="Times New Roman" panose="02020603050405020304" pitchFamily="18" charset="0"/>
               </a:rPr>
               <a:t>Чего удалось достичь:</a:t>
             </a:r>
             <a:br>
-              <a:rPr lang="ru-RU" dirty="0">
+              <a:rPr lang="ru-RU" sz="2000" dirty="0">
                 <a:latin typeface="Times New Roman" panose="02020603050405020304" pitchFamily="18" charset="0"/>
                 <a:cs typeface="Times New Roman" panose="02020603050405020304" pitchFamily="18" charset="0"/>
               </a:rPr>
             </a:br>
             <a:r>
-              <a:rPr lang="ru-RU" dirty="0">
+              <a:rPr lang="ru-RU" sz="2000" dirty="0">
                 <a:latin typeface="Times New Roman" panose="02020603050405020304" pitchFamily="18" charset="0"/>
                 <a:cs typeface="Times New Roman" panose="02020603050405020304" pitchFamily="18" charset="0"/>
               </a:rPr>
               <a:t>Полностью рабочая система «</a:t>
             </a:r>
             <a:r>
-              <a:rPr lang="ru-RU" dirty="0" err="1">
+              <a:rPr lang="ru-RU" sz="2000" dirty="0" err="1">
                 <a:latin typeface="Times New Roman" panose="02020603050405020304" pitchFamily="18" charset="0"/>
                 <a:cs typeface="Times New Roman" panose="02020603050405020304" pitchFamily="18" charset="0"/>
               </a:rPr>
               <a:t>АгроКонтроль</a:t>
             </a:r>
             <a:r>
-              <a:rPr lang="ru-RU" dirty="0">
+              <a:rPr lang="ru-RU" sz="2000" dirty="0">
                 <a:latin typeface="Times New Roman" panose="02020603050405020304" pitchFamily="18" charset="0"/>
                 <a:cs typeface="Times New Roman" panose="02020603050405020304" pitchFamily="18" charset="0"/>
               </a:rPr>
@@ -8517,7 +9396,7 @@
 </p:sld>
 </file>
 
-<file path=ppt/slides/slide15.xml><?xml version="1.0" encoding="utf-8"?>
+<file path=ppt/slides/slide16.xml><?xml version="1.0" encoding="utf-8"?>
 <p:sld xmlns:a="http://schemas.openxmlformats.org/drawingml/2006/main" xmlns:r="http://schemas.openxmlformats.org/officeDocument/2006/relationships" xmlns:p="http://schemas.openxmlformats.org/presentationml/2006/main">
   <p:cSld>
     <p:spTree>
@@ -8552,7 +9431,7 @@
         </p:nvSpPr>
         <p:spPr>
           <a:xfrm>
-            <a:off x="323528" y="-171400"/>
+            <a:off x="1847528" y="-171400"/>
             <a:ext cx="8229600" cy="1143000"/>
           </a:xfrm>
         </p:spPr>
@@ -8605,7 +9484,7 @@
         </p:blipFill>
         <p:spPr>
           <a:xfrm>
-            <a:off x="1599469" y="764704"/>
+            <a:off x="3123470" y="764705"/>
             <a:ext cx="5945061" cy="5945061"/>
           </a:xfrm>
           <a:prstGeom prst="rect">
@@ -8658,7 +9537,12 @@
             <p:ph type="title"/>
           </p:nvPr>
         </p:nvSpPr>
-        <p:spPr/>
+        <p:spPr>
+          <a:xfrm>
+            <a:off x="609600" y="0"/>
+            <a:ext cx="10972800" cy="1143000"/>
+          </a:xfrm>
+        </p:spPr>
         <p:txBody>
           <a:bodyPr/>
           <a:lstStyle/>
@@ -8720,14 +9604,14 @@
           <p:nvPr>
             <p:extLst>
               <p:ext uri="{D42A27DB-BD31-4B8C-83A1-F6EECF244321}">
-                <p14:modId xmlns:p14="http://schemas.microsoft.com/office/powerpoint/2010/main" val="3885014174"/>
+                <p14:modId xmlns:p14="http://schemas.microsoft.com/office/powerpoint/2010/main" val="2774096479"/>
               </p:ext>
             </p:extLst>
           </p:nvPr>
         </p:nvGraphicFramePr>
         <p:xfrm>
-          <a:off x="323528" y="1331118"/>
-          <a:ext cx="8496944" cy="5050210"/>
+          <a:off x="1127448" y="1052736"/>
+          <a:ext cx="10009112" cy="5616625"/>
         </p:xfrm>
         <a:graphic>
           <a:graphicData uri="http://schemas.openxmlformats.org/drawingml/2006/table">
@@ -8736,14 +9620,14 @@
                 <a:tableStyleId>{5C22544A-7EE6-4342-B048-85BDC9FD1C3A}</a:tableStyleId>
               </a:tblPr>
               <a:tblGrid>
-                <a:gridCol w="4248472">
+                <a:gridCol w="5004556">
                   <a:extLst>
                     <a:ext uri="{9D8B030D-6E8A-4147-A177-3AD203B41FA5}">
                       <a16:colId xmlns:a16="http://schemas.microsoft.com/office/drawing/2014/main" val="509164893"/>
                     </a:ext>
                   </a:extLst>
                 </a:gridCol>
-                <a:gridCol w="4248472">
+                <a:gridCol w="5004556">
                   <a:extLst>
                     <a:ext uri="{9D8B030D-6E8A-4147-A177-3AD203B41FA5}">
                       <a16:colId xmlns:a16="http://schemas.microsoft.com/office/drawing/2014/main" val="989058367"/>
@@ -8751,7 +9635,7 @@
                   </a:extLst>
                 </a:gridCol>
               </a:tblGrid>
-              <a:tr h="466421">
+              <a:tr h="518733">
                 <a:tc>
                   <a:txBody>
                     <a:bodyPr/>
@@ -8816,7 +9700,7 @@
                   </a:ext>
                 </a:extLst>
               </a:tr>
-              <a:tr h="772007">
+              <a:tr h="858592">
                 <a:tc>
                   <a:txBody>
                     <a:bodyPr/>
@@ -8829,7 +9713,7 @@
                         <a:buNone/>
                       </a:pPr>
                       <a:r>
-                        <a:rPr lang="ru-RU" sz="1800">
+                        <a:rPr lang="ru-RU" sz="1800" dirty="0">
                           <a:effectLst/>
                           <a:latin typeface="Times New Roman" panose="02020603050405020304" pitchFamily="18" charset="0"/>
                           <a:cs typeface="Times New Roman" panose="02020603050405020304" pitchFamily="18" charset="0"/>
@@ -8837,14 +9721,14 @@
                         <a:t>Название </a:t>
                       </a:r>
                       <a:r>
-                        <a:rPr lang="ru-RU" sz="1800" spc="-10">
+                        <a:rPr lang="ru-RU" sz="1800" spc="-10" dirty="0">
                           <a:effectLst/>
                           <a:latin typeface="Times New Roman" panose="02020603050405020304" pitchFamily="18" charset="0"/>
                           <a:cs typeface="Times New Roman" panose="02020603050405020304" pitchFamily="18" charset="0"/>
                         </a:rPr>
                         <a:t>организации</a:t>
                       </a:r>
-                      <a:endParaRPr lang="ru-RU" sz="1100">
+                      <a:endParaRPr lang="ru-RU" sz="1100" dirty="0">
                         <a:effectLst/>
                         <a:latin typeface="Times New Roman" panose="02020603050405020304" pitchFamily="18" charset="0"/>
                         <a:ea typeface="Calibri" panose="020F0502020204030204" pitchFamily="34" charset="0"/>
@@ -9003,7 +9887,7 @@
                   </a:ext>
                 </a:extLst>
               </a:tr>
-              <a:tr h="482504">
+              <a:tr h="536620">
                 <a:tc>
                   <a:txBody>
                     <a:bodyPr/>
@@ -9155,7 +10039,7 @@
                   </a:ext>
                 </a:extLst>
               </a:tr>
-              <a:tr h="788090">
+              <a:tr h="876480">
                 <a:tc>
                   <a:txBody>
                     <a:bodyPr/>
@@ -9294,7 +10178,7 @@
                   </a:ext>
                 </a:extLst>
               </a:tr>
-              <a:tr h="482504">
+              <a:tr h="536620">
                 <a:tc>
                   <a:txBody>
                     <a:bodyPr/>
@@ -9406,7 +10290,7 @@
                   </a:ext>
                 </a:extLst>
               </a:tr>
-              <a:tr h="482504">
+              <a:tr h="536620">
                 <a:tc>
                   <a:txBody>
                     <a:bodyPr/>
@@ -9494,7 +10378,7 @@
                   </a:ext>
                 </a:extLst>
               </a:tr>
-              <a:tr h="788090">
+              <a:tr h="876480">
                 <a:tc>
                   <a:txBody>
                     <a:bodyPr/>
@@ -9625,7 +10509,7 @@
                   </a:ext>
                 </a:extLst>
               </a:tr>
-              <a:tr h="788090">
+              <a:tr h="876480">
                 <a:tc>
                   <a:txBody>
                     <a:bodyPr/>
@@ -9843,7 +10727,12 @@
             <p:ph type="title"/>
           </p:nvPr>
         </p:nvSpPr>
-        <p:spPr/>
+        <p:spPr>
+          <a:xfrm>
+            <a:off x="600542" y="0"/>
+            <a:ext cx="10972800" cy="1143000"/>
+          </a:xfrm>
+        </p:spPr>
         <p:txBody>
           <a:bodyPr/>
           <a:lstStyle/>
@@ -9905,14 +10794,14 @@
           <p:nvPr>
             <p:extLst>
               <p:ext uri="{D42A27DB-BD31-4B8C-83A1-F6EECF244321}">
-                <p14:modId xmlns:p14="http://schemas.microsoft.com/office/powerpoint/2010/main" val="3328122822"/>
+                <p14:modId xmlns:p14="http://schemas.microsoft.com/office/powerpoint/2010/main" val="2196024201"/>
               </p:ext>
             </p:extLst>
           </p:nvPr>
         </p:nvGraphicFramePr>
         <p:xfrm>
-          <a:off x="457201" y="1268760"/>
-          <a:ext cx="8363273" cy="5400598"/>
+          <a:off x="1055440" y="980728"/>
+          <a:ext cx="10081120" cy="5688629"/>
         </p:xfrm>
         <a:graphic>
           <a:graphicData uri="http://schemas.openxmlformats.org/drawingml/2006/table">
@@ -9921,21 +10810,21 @@
                 <a:tableStyleId>{5C22544A-7EE6-4342-B048-85BDC9FD1C3A}</a:tableStyleId>
               </a:tblPr>
               <a:tblGrid>
-                <a:gridCol w="695816">
+                <a:gridCol w="838739">
                   <a:extLst>
                     <a:ext uri="{9D8B030D-6E8A-4147-A177-3AD203B41FA5}">
                       <a16:colId xmlns:a16="http://schemas.microsoft.com/office/drawing/2014/main" val="2061436974"/>
                     </a:ext>
                   </a:extLst>
                 </a:gridCol>
-                <a:gridCol w="6036642">
+                <a:gridCol w="7276591">
                   <a:extLst>
                     <a:ext uri="{9D8B030D-6E8A-4147-A177-3AD203B41FA5}">
                       <a16:colId xmlns:a16="http://schemas.microsoft.com/office/drawing/2014/main" val="2787470248"/>
                     </a:ext>
                   </a:extLst>
                 </a:gridCol>
-                <a:gridCol w="1630815">
+                <a:gridCol w="1965790">
                   <a:extLst>
                     <a:ext uri="{9D8B030D-6E8A-4147-A177-3AD203B41FA5}">
                       <a16:colId xmlns:a16="http://schemas.microsoft.com/office/drawing/2014/main" val="1086291828"/>
@@ -9943,7 +10832,7 @@
                   </a:extLst>
                 </a:gridCol>
               </a:tblGrid>
-              <a:tr h="347180">
+              <a:tr h="365696">
                 <a:tc>
                   <a:txBody>
                     <a:bodyPr/>
@@ -10037,7 +10926,7 @@
                   </a:ext>
                 </a:extLst>
               </a:tr>
-              <a:tr h="620703">
+              <a:tr h="653807">
                 <a:tc>
                   <a:txBody>
                     <a:bodyPr/>
@@ -10245,7 +11134,7 @@
                   </a:ext>
                 </a:extLst>
               </a:tr>
-              <a:tr h="646755">
+              <a:tr h="681248">
                 <a:tc>
                   <a:txBody>
                     <a:bodyPr/>
@@ -10486,7 +11375,7 @@
                   </a:ext>
                 </a:extLst>
               </a:tr>
-              <a:tr h="620703">
+              <a:tr h="653807">
                 <a:tc>
                   <a:txBody>
                     <a:bodyPr/>
@@ -10678,7 +11567,7 @@
                   </a:ext>
                 </a:extLst>
               </a:tr>
-              <a:tr h="620703">
+              <a:tr h="653807">
                 <a:tc>
                   <a:txBody>
                     <a:bodyPr/>
@@ -10870,7 +11759,7 @@
                   </a:ext>
                 </a:extLst>
               </a:tr>
-              <a:tr h="620703">
+              <a:tr h="653807">
                 <a:tc>
                   <a:txBody>
                     <a:bodyPr/>
@@ -11062,7 +11951,7 @@
                   </a:ext>
                 </a:extLst>
               </a:tr>
-              <a:tr h="438164">
+              <a:tr h="461533">
                 <a:tc>
                   <a:txBody>
                     <a:bodyPr/>
@@ -11227,7 +12116,7 @@
                   </a:ext>
                 </a:extLst>
               </a:tr>
-              <a:tr h="609359">
+              <a:tr h="641858">
                 <a:tc>
                   <a:txBody>
                     <a:bodyPr/>
@@ -11395,7 +12284,7 @@
                   </a:ext>
                 </a:extLst>
               </a:tr>
-              <a:tr h="438164">
+              <a:tr h="461533">
                 <a:tc>
                   <a:txBody>
                     <a:bodyPr/>
@@ -11552,7 +12441,7 @@
                   </a:ext>
                 </a:extLst>
               </a:tr>
-              <a:tr h="438164">
+              <a:tr h="461533">
                 <a:tc>
                   <a:txBody>
                     <a:bodyPr/>
@@ -11772,7 +12661,7 @@
         </p:nvSpPr>
         <p:spPr>
           <a:xfrm>
-            <a:off x="457200" y="3068960"/>
+            <a:off x="1271464" y="2924944"/>
             <a:ext cx="8229600" cy="4525963"/>
           </a:xfrm>
         </p:spPr>
@@ -11827,14 +12716,14 @@
           <p:nvPr>
             <p:extLst>
               <p:ext uri="{D42A27DB-BD31-4B8C-83A1-F6EECF244321}">
-                <p14:modId xmlns:p14="http://schemas.microsoft.com/office/powerpoint/2010/main" val="2155225033"/>
+                <p14:modId xmlns:p14="http://schemas.microsoft.com/office/powerpoint/2010/main" val="2576626496"/>
               </p:ext>
             </p:extLst>
           </p:nvPr>
         </p:nvGraphicFramePr>
         <p:xfrm>
-          <a:off x="414216" y="3691479"/>
-          <a:ext cx="8406256" cy="2761856"/>
+          <a:off x="1127448" y="3429000"/>
+          <a:ext cx="10297144" cy="3024335"/>
         </p:xfrm>
         <a:graphic>
           <a:graphicData uri="http://schemas.openxmlformats.org/drawingml/2006/table">
@@ -11843,14 +12732,14 @@
                 <a:tableStyleId>{5C22544A-7EE6-4342-B048-85BDC9FD1C3A}</a:tableStyleId>
               </a:tblPr>
               <a:tblGrid>
-                <a:gridCol w="4203128">
+                <a:gridCol w="5148572">
                   <a:extLst>
                     <a:ext uri="{9D8B030D-6E8A-4147-A177-3AD203B41FA5}">
                       <a16:colId xmlns:a16="http://schemas.microsoft.com/office/drawing/2014/main" val="3765770522"/>
                     </a:ext>
                   </a:extLst>
                 </a:gridCol>
-                <a:gridCol w="4203128">
+                <a:gridCol w="5148572">
                   <a:extLst>
                     <a:ext uri="{9D8B030D-6E8A-4147-A177-3AD203B41FA5}">
                       <a16:colId xmlns:a16="http://schemas.microsoft.com/office/drawing/2014/main" val="1710878607"/>
@@ -11858,7 +12747,7 @@
                   </a:extLst>
                 </a:gridCol>
               </a:tblGrid>
-              <a:tr h="450092">
+              <a:tr h="492868">
                 <a:tc>
                   <a:txBody>
                     <a:bodyPr/>
@@ -11923,7 +12812,7 @@
                   </a:ext>
                 </a:extLst>
               </a:tr>
-              <a:tr h="450092">
+              <a:tr h="492868">
                 <a:tc>
                   <a:txBody>
                     <a:bodyPr/>
@@ -12035,7 +12924,7 @@
                   </a:ext>
                 </a:extLst>
               </a:tr>
-              <a:tr h="465612">
+              <a:tr h="509862">
                 <a:tc>
                   <a:txBody>
                     <a:bodyPr/>
@@ -12155,7 +13044,7 @@
                   </a:ext>
                 </a:extLst>
               </a:tr>
-              <a:tr h="465612">
+              <a:tr h="509862">
                 <a:tc>
                   <a:txBody>
                     <a:bodyPr/>
@@ -12243,7 +13132,7 @@
                   </a:ext>
                 </a:extLst>
               </a:tr>
-              <a:tr h="464836">
+              <a:tr h="509013">
                 <a:tc>
                   <a:txBody>
                     <a:bodyPr/>
@@ -12363,7 +13252,7 @@
                   </a:ext>
                 </a:extLst>
               </a:tr>
-              <a:tr h="465612">
+              <a:tr h="509862">
                 <a:tc>
                   <a:txBody>
                     <a:bodyPr/>
@@ -12503,7 +13392,7 @@
         </p:nvSpPr>
         <p:spPr bwMode="auto">
           <a:xfrm>
-            <a:off x="0" y="1198475"/>
+            <a:off x="1127448" y="1132754"/>
             <a:ext cx="4631162" cy="1421804"/>
           </a:xfrm>
           <a:prstGeom prst="rect">
@@ -12552,164 +13441,83 @@
           </a:bodyPr>
           <a:lstStyle/>
           <a:p>
-            <a:pPr marL="0" marR="0" lvl="0" indent="0" algn="l" defTabSz="914400" rtl="0" eaLnBrk="0" fontAlgn="base" latinLnBrk="0" hangingPunct="0">
-              <a:lnSpc>
-                <a:spcPct val="100000"/>
-              </a:lnSpc>
+            <a:pPr eaLnBrk="0" fontAlgn="base" hangingPunct="0">
               <a:spcBef>
                 <a:spcPct val="0"/>
               </a:spcBef>
               <a:spcAft>
                 <a:spcPct val="0"/>
               </a:spcAft>
-              <a:buClrTx/>
-              <a:buSzTx/>
-              <a:buFontTx/>
-              <a:buNone/>
-              <a:tabLst/>
             </a:pPr>
             <a:r>
-              <a:rPr kumimoji="0" lang="ru-RU" altLang="ru-RU" sz="2000" b="1" i="0" u="none" strike="noStrike" cap="none" normalizeH="0" baseline="0" dirty="0">
-                <a:ln>
-                  <a:noFill/>
-                </a:ln>
-                <a:solidFill>
-                  <a:schemeClr val="tx1"/>
-                </a:solidFill>
-                <a:effectLst/>
+              <a:rPr lang="ru-RU" altLang="ru-RU" sz="2000" b="1" dirty="0">
                 <a:latin typeface="Times New Roman" panose="02020603050405020304" pitchFamily="18" charset="0"/>
                 <a:ea typeface="Calibri" panose="020F0502020204030204" pitchFamily="34" charset="0"/>
                 <a:cs typeface="Times New Roman" panose="02020603050405020304" pitchFamily="18" charset="0"/>
               </a:rPr>
               <a:t>Периферийные устройства:</a:t>
             </a:r>
-            <a:endParaRPr kumimoji="0" lang="ru-RU" altLang="ru-RU" sz="2000" b="0" i="0" u="none" strike="noStrike" cap="none" normalizeH="0" baseline="0" dirty="0">
-              <a:ln>
-                <a:noFill/>
-              </a:ln>
-              <a:solidFill>
-                <a:schemeClr val="tx1"/>
-              </a:solidFill>
-              <a:effectLst/>
+            <a:endParaRPr lang="ru-RU" altLang="ru-RU" sz="2000" dirty="0">
               <a:latin typeface="Times New Roman" panose="02020603050405020304" pitchFamily="18" charset="0"/>
               <a:cs typeface="Times New Roman" panose="02020603050405020304" pitchFamily="18" charset="0"/>
             </a:endParaRPr>
           </a:p>
           <a:p>
-            <a:pPr marL="0" marR="0" lvl="0" indent="0" algn="l" defTabSz="914400" rtl="0" eaLnBrk="0" fontAlgn="base" latinLnBrk="0" hangingPunct="0">
-              <a:lnSpc>
-                <a:spcPct val="100000"/>
-              </a:lnSpc>
+            <a:pPr eaLnBrk="0" fontAlgn="base" hangingPunct="0">
               <a:spcBef>
                 <a:spcPct val="0"/>
               </a:spcBef>
               <a:spcAft>
                 <a:spcPct val="0"/>
               </a:spcAft>
-              <a:buClrTx/>
-              <a:buSzTx/>
-              <a:buFontTx/>
-              <a:buNone/>
-              <a:tabLst/>
             </a:pPr>
             <a:r>
-              <a:rPr kumimoji="0" lang="ru-RU" altLang="ru-RU" sz="2000" b="0" i="0" u="none" strike="noStrike" cap="none" normalizeH="0" baseline="0" dirty="0">
-                <a:ln>
-                  <a:noFill/>
-                </a:ln>
-                <a:solidFill>
-                  <a:schemeClr val="tx1"/>
-                </a:solidFill>
-                <a:effectLst/>
+              <a:rPr lang="ru-RU" altLang="ru-RU" sz="2000" dirty="0">
                 <a:latin typeface="Times New Roman" panose="02020603050405020304" pitchFamily="18" charset="0"/>
                 <a:ea typeface="Calibri" panose="020F0502020204030204" pitchFamily="34" charset="0"/>
                 <a:cs typeface="Times New Roman" panose="02020603050405020304" pitchFamily="18" charset="0"/>
               </a:rPr>
               <a:t>Монитор: 15.6" IPS (1920x1080)</a:t>
             </a:r>
-            <a:endParaRPr kumimoji="0" lang="ru-RU" altLang="ru-RU" sz="2000" b="0" i="0" u="none" strike="noStrike" cap="none" normalizeH="0" baseline="0" dirty="0">
-              <a:ln>
-                <a:noFill/>
-              </a:ln>
-              <a:solidFill>
-                <a:schemeClr val="tx1"/>
-              </a:solidFill>
-              <a:effectLst/>
+            <a:endParaRPr lang="ru-RU" altLang="ru-RU" sz="2000" dirty="0">
               <a:latin typeface="Times New Roman" panose="02020603050405020304" pitchFamily="18" charset="0"/>
               <a:cs typeface="Times New Roman" panose="02020603050405020304" pitchFamily="18" charset="0"/>
             </a:endParaRPr>
           </a:p>
           <a:p>
-            <a:pPr marL="0" marR="0" lvl="0" indent="0" algn="l" defTabSz="914400" rtl="0" eaLnBrk="0" fontAlgn="base" latinLnBrk="0" hangingPunct="0">
-              <a:lnSpc>
-                <a:spcPct val="100000"/>
-              </a:lnSpc>
+            <a:pPr eaLnBrk="0" fontAlgn="base" hangingPunct="0">
               <a:spcBef>
                 <a:spcPct val="0"/>
               </a:spcBef>
               <a:spcAft>
                 <a:spcPct val="0"/>
               </a:spcAft>
-              <a:buClrTx/>
-              <a:buSzTx/>
-              <a:buFontTx/>
-              <a:buNone/>
-              <a:tabLst/>
             </a:pPr>
             <a:r>
-              <a:rPr kumimoji="0" lang="ru-RU" altLang="ru-RU" sz="2000" b="0" i="0" u="none" strike="noStrike" cap="none" normalizeH="0" baseline="0" dirty="0">
-                <a:ln>
-                  <a:noFill/>
-                </a:ln>
-                <a:solidFill>
-                  <a:schemeClr val="tx1"/>
-                </a:solidFill>
-                <a:effectLst/>
+              <a:rPr lang="ru-RU" altLang="ru-RU" sz="2000" dirty="0">
                 <a:latin typeface="Times New Roman" panose="02020603050405020304" pitchFamily="18" charset="0"/>
                 <a:ea typeface="Calibri" panose="020F0502020204030204" pitchFamily="34" charset="0"/>
                 <a:cs typeface="Times New Roman" panose="02020603050405020304" pitchFamily="18" charset="0"/>
               </a:rPr>
               <a:t>Клавиатура: встроенная ноутбучная </a:t>
             </a:r>
-            <a:endParaRPr kumimoji="0" lang="en-US" altLang="ru-RU" sz="2000" b="0" i="0" u="none" strike="noStrike" cap="none" normalizeH="0" baseline="0" dirty="0">
-              <a:ln>
-                <a:noFill/>
-              </a:ln>
-              <a:solidFill>
-                <a:schemeClr val="tx1"/>
-              </a:solidFill>
-              <a:effectLst/>
+            <a:endParaRPr lang="en-US" altLang="ru-RU" sz="2000" dirty="0">
               <a:latin typeface="Times New Roman" panose="02020603050405020304" pitchFamily="18" charset="0"/>
               <a:ea typeface="Calibri" panose="020F0502020204030204" pitchFamily="34" charset="0"/>
               <a:cs typeface="Times New Roman" panose="02020603050405020304" pitchFamily="18" charset="0"/>
             </a:endParaRPr>
           </a:p>
           <a:p>
-            <a:pPr marL="0" marR="0" lvl="0" indent="0" algn="l" defTabSz="914400" rtl="0" eaLnBrk="0" fontAlgn="base" latinLnBrk="0" hangingPunct="0">
-              <a:lnSpc>
-                <a:spcPct val="100000"/>
-              </a:lnSpc>
+            <a:pPr eaLnBrk="0" fontAlgn="base" hangingPunct="0">
               <a:spcBef>
                 <a:spcPct val="0"/>
               </a:spcBef>
               <a:spcAft>
                 <a:spcPct val="0"/>
               </a:spcAft>
-              <a:buClrTx/>
-              <a:buSzTx/>
-              <a:buFontTx/>
-              <a:buNone/>
-              <a:tabLst/>
             </a:pPr>
             <a:r>
-              <a:rPr kumimoji="0" lang="ru-RU" altLang="ru-RU" sz="2000" b="0" i="0" u="none" strike="noStrike" cap="none" normalizeH="0" baseline="0" dirty="0">
-                <a:ln>
-                  <a:noFill/>
-                </a:ln>
-                <a:solidFill>
-                  <a:schemeClr val="tx1"/>
-                </a:solidFill>
-                <a:effectLst/>
+              <a:rPr lang="ru-RU" altLang="ru-RU" sz="2000" dirty="0">
                 <a:latin typeface="Times New Roman" panose="02020603050405020304" pitchFamily="18" charset="0"/>
                 <a:ea typeface="Calibri" panose="020F0502020204030204" pitchFamily="34" charset="0"/>
                 <a:cs typeface="Times New Roman" panose="02020603050405020304" pitchFamily="18" charset="0"/>
@@ -12717,28 +13525,14 @@
               <a:t>Мышь: Logitech </a:t>
             </a:r>
             <a:r>
-              <a:rPr kumimoji="0" lang="en-US" altLang="ru-RU" sz="2000" b="0" i="0" u="none" strike="noStrike" cap="none" normalizeH="0" baseline="0" dirty="0">
-                <a:ln>
-                  <a:noFill/>
-                </a:ln>
-                <a:solidFill>
-                  <a:schemeClr val="tx1"/>
-                </a:solidFill>
-                <a:effectLst/>
+              <a:rPr lang="en-US" altLang="ru-RU" sz="2000" dirty="0">
                 <a:latin typeface="Times New Roman" panose="02020603050405020304" pitchFamily="18" charset="0"/>
                 <a:ea typeface="Calibri" panose="020F0502020204030204" pitchFamily="34" charset="0"/>
                 <a:cs typeface="Times New Roman" panose="02020603050405020304" pitchFamily="18" charset="0"/>
               </a:rPr>
               <a:t>G102</a:t>
             </a:r>
-            <a:endParaRPr kumimoji="0" lang="ru-RU" altLang="ru-RU" sz="2000" b="0" i="0" u="none" strike="noStrike" cap="none" normalizeH="0" baseline="0" dirty="0">
-              <a:ln>
-                <a:noFill/>
-              </a:ln>
-              <a:solidFill>
-                <a:schemeClr val="tx1"/>
-              </a:solidFill>
-              <a:effectLst/>
+            <a:endParaRPr lang="ru-RU" altLang="ru-RU" sz="2000" dirty="0">
               <a:latin typeface="Times New Roman" panose="02020603050405020304" pitchFamily="18" charset="0"/>
               <a:cs typeface="Times New Roman" panose="02020603050405020304" pitchFamily="18" charset="0"/>
             </a:endParaRPr>
@@ -12863,14 +13657,14 @@
           <p:nvPr>
             <p:extLst>
               <p:ext uri="{D42A27DB-BD31-4B8C-83A1-F6EECF244321}">
-                <p14:modId xmlns:p14="http://schemas.microsoft.com/office/powerpoint/2010/main" val="639039725"/>
+                <p14:modId xmlns:p14="http://schemas.microsoft.com/office/powerpoint/2010/main" val="3272402859"/>
               </p:ext>
             </p:extLst>
           </p:nvPr>
         </p:nvGraphicFramePr>
         <p:xfrm>
-          <a:off x="323528" y="1655700"/>
-          <a:ext cx="8568952" cy="4653026"/>
+          <a:off x="1344488" y="1417638"/>
+          <a:ext cx="9732840" cy="5165724"/>
         </p:xfrm>
         <a:graphic>
           <a:graphicData uri="http://schemas.openxmlformats.org/drawingml/2006/table">
@@ -12879,14 +13673,14 @@
                 <a:tableStyleId>{5C22544A-7EE6-4342-B048-85BDC9FD1C3A}</a:tableStyleId>
               </a:tblPr>
               <a:tblGrid>
-                <a:gridCol w="4284476">
+                <a:gridCol w="4866420">
                   <a:extLst>
                     <a:ext uri="{9D8B030D-6E8A-4147-A177-3AD203B41FA5}">
                       <a16:colId xmlns:a16="http://schemas.microsoft.com/office/drawing/2014/main" val="1426121117"/>
                     </a:ext>
                   </a:extLst>
                 </a:gridCol>
-                <a:gridCol w="4284476">
+                <a:gridCol w="4866420">
                   <a:extLst>
                     <a:ext uri="{9D8B030D-6E8A-4147-A177-3AD203B41FA5}">
                       <a16:colId xmlns:a16="http://schemas.microsoft.com/office/drawing/2014/main" val="378620072"/>
@@ -12894,7 +13688,7 @@
                   </a:extLst>
                 </a:gridCol>
               </a:tblGrid>
-              <a:tr h="525049">
+              <a:tr h="582902">
                 <a:tc>
                   <a:txBody>
                     <a:bodyPr/>
@@ -12959,7 +13753,7 @@
                   </a:ext>
                 </a:extLst>
               </a:tr>
-              <a:tr h="525049">
+              <a:tr h="582902">
                 <a:tc>
                   <a:txBody>
                     <a:bodyPr/>
@@ -13135,7 +13929,7 @@
                   </a:ext>
                 </a:extLst>
               </a:tr>
-              <a:tr h="887153">
+              <a:tr h="984905">
                 <a:tc>
                   <a:txBody>
                     <a:bodyPr/>
@@ -13330,7 +14124,7 @@
                   </a:ext>
                 </a:extLst>
               </a:tr>
-              <a:tr h="543155">
+              <a:tr h="603003">
                 <a:tc>
                   <a:txBody>
                     <a:bodyPr/>
@@ -13466,7 +14260,7 @@
                   </a:ext>
                 </a:extLst>
               </a:tr>
-              <a:tr h="543155">
+              <a:tr h="603003">
                 <a:tc>
                   <a:txBody>
                     <a:bodyPr/>
@@ -13570,7 +14364,7 @@
                   </a:ext>
                 </a:extLst>
               </a:tr>
-              <a:tr h="543155">
+              <a:tr h="603003">
                 <a:tc>
                   <a:txBody>
                     <a:bodyPr/>
@@ -13658,7 +14452,7 @@
                   </a:ext>
                 </a:extLst>
               </a:tr>
-              <a:tr h="543155">
+              <a:tr h="603003">
                 <a:tc>
                   <a:txBody>
                     <a:bodyPr/>
@@ -13746,7 +14540,7 @@
                   </a:ext>
                 </a:extLst>
               </a:tr>
-              <a:tr h="543155">
+              <a:tr h="603003">
                 <a:tc>
                   <a:txBody>
                     <a:bodyPr/>
@@ -13870,7 +14664,7 @@
         </p:nvSpPr>
         <p:spPr bwMode="auto">
           <a:xfrm>
-            <a:off x="-684584" y="36576"/>
+            <a:off x="839416" y="36576"/>
             <a:ext cx="10008096" cy="1938992"/>
           </a:xfrm>
           <a:prstGeom prst="rect">
@@ -13919,118 +14713,59 @@
           </a:bodyPr>
           <a:lstStyle/>
           <a:p>
-            <a:pPr marL="0" marR="0" lvl="0" indent="0" algn="ctr" defTabSz="914400" rtl="0" eaLnBrk="0" fontAlgn="base" latinLnBrk="0" hangingPunct="0">
-              <a:lnSpc>
-                <a:spcPct val="100000"/>
-              </a:lnSpc>
+            <a:pPr algn="ctr" eaLnBrk="0" fontAlgn="base" hangingPunct="0">
               <a:spcBef>
                 <a:spcPct val="0"/>
               </a:spcBef>
               <a:spcAft>
                 <a:spcPct val="0"/>
               </a:spcAft>
-              <a:buClrTx/>
-              <a:buSzTx/>
-              <a:buFontTx/>
-              <a:buNone/>
-              <a:tabLst/>
             </a:pPr>
             <a:r>
-              <a:rPr kumimoji="0" lang="ru-RU" altLang="ru-RU" sz="4000" b="0" i="0" u="none" strike="noStrike" cap="none" normalizeH="0" baseline="0" dirty="0">
-                <a:ln>
-                  <a:noFill/>
-                </a:ln>
-                <a:solidFill>
-                  <a:schemeClr val="tx1"/>
-                </a:solidFill>
-                <a:effectLst/>
+              <a:rPr lang="ru-RU" altLang="ru-RU" sz="4000" dirty="0">
                 <a:latin typeface="Times New Roman" panose="02020603050405020304" pitchFamily="18" charset="0"/>
                 <a:ea typeface="Calibri" panose="020F0502020204030204" pitchFamily="34" charset="0"/>
                 <a:cs typeface="Times New Roman" panose="02020603050405020304" pitchFamily="18" charset="0"/>
               </a:rPr>
               <a:t>Используемые на практике</a:t>
             </a:r>
-            <a:endParaRPr kumimoji="0" lang="ru-RU" altLang="ru-RU" sz="4000" b="0" i="0" u="none" strike="noStrike" cap="none" normalizeH="0" baseline="0" dirty="0">
-              <a:ln>
-                <a:noFill/>
-              </a:ln>
-              <a:solidFill>
-                <a:schemeClr val="tx1"/>
-              </a:solidFill>
-              <a:effectLst/>
+            <a:endParaRPr lang="ru-RU" altLang="ru-RU" sz="4000" dirty="0">
               <a:latin typeface="Times New Roman" panose="02020603050405020304" pitchFamily="18" charset="0"/>
               <a:cs typeface="Times New Roman" panose="02020603050405020304" pitchFamily="18" charset="0"/>
             </a:endParaRPr>
           </a:p>
           <a:p>
-            <a:pPr marL="0" marR="0" lvl="0" indent="0" algn="ctr" defTabSz="914400" rtl="0" eaLnBrk="0" fontAlgn="base" latinLnBrk="0" hangingPunct="0">
-              <a:lnSpc>
-                <a:spcPct val="100000"/>
-              </a:lnSpc>
+            <a:pPr algn="ctr" eaLnBrk="0" fontAlgn="base" hangingPunct="0">
               <a:spcBef>
                 <a:spcPct val="0"/>
               </a:spcBef>
               <a:spcAft>
                 <a:spcPct val="0"/>
               </a:spcAft>
-              <a:buClrTx/>
-              <a:buSzTx/>
-              <a:buFontTx/>
-              <a:buNone/>
-              <a:tabLst/>
             </a:pPr>
             <a:r>
-              <a:rPr kumimoji="0" lang="ru-RU" altLang="ru-RU" sz="4000" b="0" i="0" u="none" strike="noStrike" cap="none" normalizeH="0" baseline="0" dirty="0">
-                <a:ln>
-                  <a:noFill/>
-                </a:ln>
-                <a:solidFill>
-                  <a:schemeClr val="tx1"/>
-                </a:solidFill>
-                <a:effectLst/>
+              <a:rPr lang="ru-RU" altLang="ru-RU" sz="4000" dirty="0">
                 <a:latin typeface="Times New Roman" panose="02020603050405020304" pitchFamily="18" charset="0"/>
                 <a:ea typeface="Calibri" panose="020F0502020204030204" pitchFamily="34" charset="0"/>
                 <a:cs typeface="Times New Roman" panose="02020603050405020304" pitchFamily="18" charset="0"/>
               </a:rPr>
               <a:t>программы</a:t>
             </a:r>
-            <a:endParaRPr kumimoji="0" lang="ru-RU" altLang="ru-RU" sz="4000" b="0" i="0" u="none" strike="noStrike" cap="none" normalizeH="0" baseline="0" dirty="0">
-              <a:ln>
-                <a:noFill/>
-              </a:ln>
-              <a:solidFill>
-                <a:schemeClr val="tx1"/>
-              </a:solidFill>
-              <a:effectLst/>
+            <a:endParaRPr lang="ru-RU" altLang="ru-RU" sz="4000" dirty="0">
               <a:latin typeface="Times New Roman" panose="02020603050405020304" pitchFamily="18" charset="0"/>
               <a:cs typeface="Times New Roman" panose="02020603050405020304" pitchFamily="18" charset="0"/>
             </a:endParaRPr>
           </a:p>
           <a:p>
-            <a:pPr marL="0" marR="0" lvl="0" indent="0" algn="ctr" defTabSz="914400" rtl="0" eaLnBrk="0" fontAlgn="base" latinLnBrk="0" hangingPunct="0">
-              <a:lnSpc>
-                <a:spcPct val="100000"/>
-              </a:lnSpc>
+            <a:pPr algn="ctr" eaLnBrk="0" fontAlgn="base" hangingPunct="0">
               <a:spcBef>
                 <a:spcPct val="0"/>
               </a:spcBef>
               <a:spcAft>
                 <a:spcPct val="0"/>
               </a:spcAft>
-              <a:buClrTx/>
-              <a:buSzTx/>
-              <a:buFontTx/>
-              <a:buNone/>
-              <a:tabLst/>
             </a:pPr>
-            <a:endParaRPr kumimoji="0" lang="ru-RU" altLang="ru-RU" sz="4000" b="0" i="0" u="none" strike="noStrike" cap="none" normalizeH="0" baseline="0" dirty="0">
-              <a:ln>
-                <a:noFill/>
-              </a:ln>
-              <a:solidFill>
-                <a:schemeClr val="tx1"/>
-              </a:solidFill>
-              <a:effectLst/>
+            <a:endParaRPr lang="ru-RU" altLang="ru-RU" sz="4000" dirty="0">
               <a:latin typeface="Times New Roman" panose="02020603050405020304" pitchFamily="18" charset="0"/>
               <a:cs typeface="Times New Roman" panose="02020603050405020304" pitchFamily="18" charset="0"/>
             </a:endParaRPr>
@@ -14051,6 +14786,149 @@
 </file>
 
 <file path=ppt/slides/slide6.xml><?xml version="1.0" encoding="utf-8"?>
+<p:sld xmlns:a="http://schemas.openxmlformats.org/drawingml/2006/main" xmlns:r="http://schemas.openxmlformats.org/officeDocument/2006/relationships" xmlns:p="http://schemas.openxmlformats.org/presentationml/2006/main">
+  <p:cSld>
+    <p:spTree>
+      <p:nvGrpSpPr>
+        <p:cNvPr id="1" name=""/>
+        <p:cNvGrpSpPr/>
+        <p:nvPr/>
+      </p:nvGrpSpPr>
+      <p:grpSpPr>
+        <a:xfrm>
+          <a:off x="0" y="0"/>
+          <a:ext cx="0" cy="0"/>
+          <a:chOff x="0" y="0"/>
+          <a:chExt cx="0" cy="0"/>
+        </a:xfrm>
+      </p:grpSpPr>
+      <p:sp>
+        <p:nvSpPr>
+          <p:cNvPr id="2" name="Заголовок 1">
+            <a:extLst>
+              <a:ext uri="{FF2B5EF4-FFF2-40B4-BE49-F238E27FC236}">
+                <a16:creationId xmlns:a16="http://schemas.microsoft.com/office/drawing/2014/main" id="{4A2397DD-3061-C42D-7756-0ED3746AC11F}"/>
+              </a:ext>
+            </a:extLst>
+          </p:cNvPr>
+          <p:cNvSpPr>
+            <a:spLocks noGrp="1"/>
+          </p:cNvSpPr>
+          <p:nvPr>
+            <p:ph type="title"/>
+          </p:nvPr>
+        </p:nvSpPr>
+        <p:spPr>
+          <a:xfrm>
+            <a:off x="-2832992" y="25698"/>
+            <a:ext cx="10972800" cy="1143000"/>
+          </a:xfrm>
+        </p:spPr>
+        <p:txBody>
+          <a:bodyPr/>
+          <a:lstStyle/>
+          <a:p>
+            <a:r>
+              <a:rPr lang="en-US" dirty="0">
+                <a:latin typeface="Times New Roman" panose="02020603050405020304" pitchFamily="18" charset="0"/>
+                <a:cs typeface="Times New Roman" panose="02020603050405020304" pitchFamily="18" charset="0"/>
+              </a:rPr>
+              <a:t>UML </a:t>
+            </a:r>
+            <a:r>
+              <a:rPr lang="ru-RU" dirty="0">
+                <a:latin typeface="Times New Roman" panose="02020603050405020304" pitchFamily="18" charset="0"/>
+                <a:cs typeface="Times New Roman" panose="02020603050405020304" pitchFamily="18" charset="0"/>
+              </a:rPr>
+              <a:t>Диаграмма</a:t>
+            </a:r>
+          </a:p>
+        </p:txBody>
+      </p:sp>
+      <p:sp>
+        <p:nvSpPr>
+          <p:cNvPr id="3" name="Объект 2">
+            <a:extLst>
+              <a:ext uri="{FF2B5EF4-FFF2-40B4-BE49-F238E27FC236}">
+                <a16:creationId xmlns:a16="http://schemas.microsoft.com/office/drawing/2014/main" id="{813124E9-AC61-95CB-85EB-E2CFA718C2B7}"/>
+              </a:ext>
+            </a:extLst>
+          </p:cNvPr>
+          <p:cNvSpPr>
+            <a:spLocks noGrp="1"/>
+          </p:cNvSpPr>
+          <p:nvPr>
+            <p:ph idx="1"/>
+          </p:nvPr>
+        </p:nvSpPr>
+        <p:spPr/>
+        <p:txBody>
+          <a:bodyPr/>
+          <a:lstStyle/>
+          <a:p>
+            <a:pPr marL="0" indent="0">
+              <a:buNone/>
+            </a:pPr>
+            <a:r>
+              <a:rPr lang="ru-RU" dirty="0">
+                <a:latin typeface="Times New Roman" panose="02020603050405020304" pitchFamily="18" charset="0"/>
+                <a:cs typeface="Times New Roman" panose="02020603050405020304" pitchFamily="18" charset="0"/>
+              </a:rPr>
+              <a:t> </a:t>
+            </a:r>
+          </a:p>
+        </p:txBody>
+      </p:sp>
+      <p:pic>
+        <p:nvPicPr>
+          <p:cNvPr id="5" name="Рисунок 4">
+            <a:extLst>
+              <a:ext uri="{FF2B5EF4-FFF2-40B4-BE49-F238E27FC236}">
+                <a16:creationId xmlns:a16="http://schemas.microsoft.com/office/drawing/2014/main" id="{2EAF7028-67B1-31CE-0B97-013441501D22}"/>
+              </a:ext>
+            </a:extLst>
+          </p:cNvPr>
+          <p:cNvPicPr>
+            <a:picLocks noChangeAspect="1"/>
+          </p:cNvPicPr>
+          <p:nvPr/>
+        </p:nvPicPr>
+        <p:blipFill>
+          <a:blip r:embed="rId2">
+            <a:extLst>
+              <a:ext uri="{28A0092B-C50C-407E-A947-70E740481C1C}">
+                <a14:useLocalDpi xmlns:a14="http://schemas.microsoft.com/office/drawing/2010/main" val="0"/>
+              </a:ext>
+            </a:extLst>
+          </a:blip>
+          <a:stretch>
+            <a:fillRect/>
+          </a:stretch>
+        </p:blipFill>
+        <p:spPr>
+          <a:xfrm>
+            <a:off x="5951984" y="-10294"/>
+            <a:ext cx="3600399" cy="6827895"/>
+          </a:xfrm>
+          <a:prstGeom prst="rect">
+            <a:avLst/>
+          </a:prstGeom>
+        </p:spPr>
+      </p:pic>
+    </p:spTree>
+    <p:extLst>
+      <p:ext uri="{BB962C8B-B14F-4D97-AF65-F5344CB8AC3E}">
+        <p14:creationId xmlns:p14="http://schemas.microsoft.com/office/powerpoint/2010/main" val="4291219756"/>
+      </p:ext>
+    </p:extLst>
+  </p:cSld>
+  <p:clrMapOvr>
+    <a:masterClrMapping/>
+  </p:clrMapOvr>
+</p:sld>
+</file>
+
+<file path=ppt/slides/slide7.xml><?xml version="1.0" encoding="utf-8"?>
 <p:sld xmlns:a="http://schemas.openxmlformats.org/drawingml/2006/main" xmlns:r="http://schemas.openxmlformats.org/officeDocument/2006/relationships" xmlns:p="http://schemas.openxmlformats.org/presentationml/2006/main">
   <p:cSld>
     <p:spTree>
@@ -14089,8 +14967,8 @@
         </p:blipFill>
         <p:spPr>
           <a:xfrm>
-            <a:off x="2627784" y="1782049"/>
-            <a:ext cx="6445177" cy="4777030"/>
+            <a:off x="4132956" y="1544312"/>
+            <a:ext cx="7078230" cy="5246236"/>
           </a:xfrm>
           <a:prstGeom prst="rect">
             <a:avLst/>
@@ -14189,7 +15067,7 @@
         </p:nvSpPr>
         <p:spPr>
           <a:xfrm>
-            <a:off x="71039" y="2018759"/>
+            <a:off x="980814" y="1840439"/>
             <a:ext cx="2799757" cy="4660250"/>
           </a:xfrm>
           <a:prstGeom prst="rect">
@@ -14203,49 +15081,43 @@
           </a:bodyPr>
           <a:lstStyle/>
           <a:p>
-            <a:pPr algn="l">
+            <a:pPr>
               <a:spcBef>
                 <a:spcPts val="1200"/>
               </a:spcBef>
-              <a:buNone/>
             </a:pPr>
             <a:r>
-              <a:rPr lang="ru-RU" sz="1600" b="1" i="0" dirty="0">
-                <a:effectLst/>
+              <a:rPr lang="ru-RU" sz="1600" b="1" dirty="0">
                 <a:latin typeface="Times New Roman" panose="02020603050405020304" pitchFamily="18" charset="0"/>
                 <a:cs typeface="Times New Roman" panose="02020603050405020304" pitchFamily="18" charset="0"/>
               </a:rPr>
               <a:t>База данных содержит 14 таблиц, нормализованных до 3НФ.</a:t>
             </a:r>
-            <a:endParaRPr lang="ru-RU" sz="1600" b="0" i="0" dirty="0">
-              <a:effectLst/>
+            <a:endParaRPr lang="ru-RU" sz="1600" dirty="0">
               <a:latin typeface="Times New Roman" panose="02020603050405020304" pitchFamily="18" charset="0"/>
               <a:cs typeface="Times New Roman" panose="02020603050405020304" pitchFamily="18" charset="0"/>
             </a:endParaRPr>
           </a:p>
           <a:p>
-            <a:pPr algn="l">
+            <a:pPr>
               <a:spcBef>
                 <a:spcPts val="1200"/>
               </a:spcBef>
-              <a:buNone/>
             </a:pPr>
             <a:r>
-              <a:rPr lang="ru-RU" sz="1600" b="1" i="0" dirty="0">
-                <a:effectLst/>
+              <a:rPr lang="ru-RU" sz="1600" b="1" dirty="0">
                 <a:latin typeface="Times New Roman" panose="02020603050405020304" pitchFamily="18" charset="0"/>
                 <a:cs typeface="Times New Roman" panose="02020603050405020304" pitchFamily="18" charset="0"/>
               </a:rPr>
               <a:t>Основные таблицы:</a:t>
             </a:r>
-            <a:endParaRPr lang="ru-RU" sz="1600" b="0" i="0" dirty="0">
-              <a:effectLst/>
+            <a:endParaRPr lang="ru-RU" sz="1600" dirty="0">
               <a:latin typeface="Times New Roman" panose="02020603050405020304" pitchFamily="18" charset="0"/>
               <a:cs typeface="Times New Roman" panose="02020603050405020304" pitchFamily="18" charset="0"/>
             </a:endParaRPr>
           </a:p>
           <a:p>
-            <a:pPr algn="l">
+            <a:pPr>
               <a:spcBef>
                 <a:spcPts val="1200"/>
               </a:spcBef>
@@ -14253,8 +15125,7 @@
               <a:buChar char="•"/>
             </a:pPr>
             <a:r>
-              <a:rPr lang="ru-RU" sz="1600" b="0" i="0" dirty="0">
-                <a:effectLst/>
+              <a:rPr lang="ru-RU" sz="1600" dirty="0">
                 <a:latin typeface="Times New Roman" panose="02020603050405020304" pitchFamily="18" charset="0"/>
                 <a:cs typeface="Times New Roman" panose="02020603050405020304" pitchFamily="18" charset="0"/>
               </a:rPr>
@@ -14262,7 +15133,7 @@
             </a:r>
           </a:p>
           <a:p>
-            <a:pPr algn="l">
+            <a:pPr>
               <a:spcBef>
                 <a:spcPts val="450"/>
               </a:spcBef>
@@ -14270,29 +15141,26 @@
               <a:buChar char="•"/>
             </a:pPr>
             <a:r>
-              <a:rPr lang="ru-RU" sz="1600" b="0" i="0" dirty="0">
-                <a:effectLst/>
+              <a:rPr lang="ru-RU" sz="1600" dirty="0">
                 <a:latin typeface="Times New Roman" panose="02020603050405020304" pitchFamily="18" charset="0"/>
                 <a:cs typeface="Times New Roman" panose="02020603050405020304" pitchFamily="18" charset="0"/>
               </a:rPr>
               <a:t>Рецептуры, </a:t>
             </a:r>
             <a:r>
-              <a:rPr lang="ru-RU" sz="1600" b="0" i="0" dirty="0" err="1">
-                <a:effectLst/>
+              <a:rPr lang="ru-RU" sz="1600" dirty="0" err="1">
                 <a:latin typeface="Times New Roman" panose="02020603050405020304" pitchFamily="18" charset="0"/>
                 <a:cs typeface="Times New Roman" panose="02020603050405020304" pitchFamily="18" charset="0"/>
               </a:rPr>
               <a:t>СоставРецептуры</a:t>
             </a:r>
-            <a:endParaRPr lang="ru-RU" sz="1600" b="0" i="0" dirty="0">
-              <a:effectLst/>
+            <a:endParaRPr lang="ru-RU" sz="1600" dirty="0">
               <a:latin typeface="Times New Roman" panose="02020603050405020304" pitchFamily="18" charset="0"/>
               <a:cs typeface="Times New Roman" panose="02020603050405020304" pitchFamily="18" charset="0"/>
             </a:endParaRPr>
           </a:p>
           <a:p>
-            <a:pPr algn="l">
+            <a:pPr>
               <a:spcBef>
                 <a:spcPts val="450"/>
               </a:spcBef>
@@ -14300,37 +15168,33 @@
               <a:buChar char="•"/>
             </a:pPr>
             <a:r>
-              <a:rPr lang="ru-RU" sz="1600" b="0" i="0" dirty="0" err="1">
-                <a:effectLst/>
+              <a:rPr lang="ru-RU" sz="1600" dirty="0" err="1">
                 <a:latin typeface="Times New Roman" panose="02020603050405020304" pitchFamily="18" charset="0"/>
                 <a:cs typeface="Times New Roman" panose="02020603050405020304" pitchFamily="18" charset="0"/>
               </a:rPr>
               <a:t>ТехКарты</a:t>
             </a:r>
             <a:r>
-              <a:rPr lang="ru-RU" sz="1600" b="0" i="0" dirty="0">
-                <a:effectLst/>
+              <a:rPr lang="ru-RU" sz="1600" dirty="0">
                 <a:latin typeface="Times New Roman" panose="02020603050405020304" pitchFamily="18" charset="0"/>
                 <a:cs typeface="Times New Roman" panose="02020603050405020304" pitchFamily="18" charset="0"/>
               </a:rPr>
               <a:t>, </a:t>
             </a:r>
             <a:r>
-              <a:rPr lang="ru-RU" sz="1600" b="0" i="0" dirty="0" err="1">
-                <a:effectLst/>
+              <a:rPr lang="ru-RU" sz="1600" dirty="0" err="1">
                 <a:latin typeface="Times New Roman" panose="02020603050405020304" pitchFamily="18" charset="0"/>
                 <a:cs typeface="Times New Roman" panose="02020603050405020304" pitchFamily="18" charset="0"/>
               </a:rPr>
               <a:t>ШагиТехКарты</a:t>
             </a:r>
-            <a:endParaRPr lang="ru-RU" sz="1600" b="0" i="0" dirty="0">
-              <a:effectLst/>
+            <a:endParaRPr lang="ru-RU" sz="1600" dirty="0">
               <a:latin typeface="Times New Roman" panose="02020603050405020304" pitchFamily="18" charset="0"/>
               <a:cs typeface="Times New Roman" panose="02020603050405020304" pitchFamily="18" charset="0"/>
             </a:endParaRPr>
           </a:p>
           <a:p>
-            <a:pPr algn="l">
+            <a:pPr>
               <a:spcBef>
                 <a:spcPts val="450"/>
               </a:spcBef>
@@ -14338,53 +15202,47 @@
               <a:buChar char="•"/>
             </a:pPr>
             <a:r>
-              <a:rPr lang="ru-RU" sz="1600" b="0" i="0" dirty="0" err="1">
-                <a:effectLst/>
+              <a:rPr lang="ru-RU" sz="1600" dirty="0" err="1">
                 <a:latin typeface="Times New Roman" panose="02020603050405020304" pitchFamily="18" charset="0"/>
                 <a:cs typeface="Times New Roman" panose="02020603050405020304" pitchFamily="18" charset="0"/>
               </a:rPr>
               <a:t>ПроизводственныеЗаказы</a:t>
             </a:r>
             <a:r>
-              <a:rPr lang="ru-RU" sz="1600" b="0" i="0" dirty="0">
-                <a:effectLst/>
+              <a:rPr lang="ru-RU" sz="1600" dirty="0">
                 <a:latin typeface="Times New Roman" panose="02020603050405020304" pitchFamily="18" charset="0"/>
                 <a:cs typeface="Times New Roman" panose="02020603050405020304" pitchFamily="18" charset="0"/>
               </a:rPr>
               <a:t>, </a:t>
             </a:r>
             <a:r>
-              <a:rPr lang="ru-RU" sz="1600" b="0" i="0" dirty="0" err="1">
-                <a:effectLst/>
+              <a:rPr lang="ru-RU" sz="1600" dirty="0" err="1">
                 <a:latin typeface="Times New Roman" panose="02020603050405020304" pitchFamily="18" charset="0"/>
                 <a:cs typeface="Times New Roman" panose="02020603050405020304" pitchFamily="18" charset="0"/>
               </a:rPr>
               <a:t>ПроизводственныеПартии</a:t>
             </a:r>
             <a:r>
-              <a:rPr lang="ru-RU" sz="1600" b="0" i="0" dirty="0">
-                <a:effectLst/>
+              <a:rPr lang="ru-RU" sz="1600" dirty="0">
                 <a:latin typeface="Times New Roman" panose="02020603050405020304" pitchFamily="18" charset="0"/>
                 <a:cs typeface="Times New Roman" panose="02020603050405020304" pitchFamily="18" charset="0"/>
               </a:rPr>
               <a:t>, </a:t>
             </a:r>
             <a:r>
-              <a:rPr lang="ru-RU" sz="1600" b="0" i="0" dirty="0" err="1">
-                <a:effectLst/>
+              <a:rPr lang="ru-RU" sz="1600" dirty="0" err="1">
                 <a:latin typeface="Times New Roman" panose="02020603050405020304" pitchFamily="18" charset="0"/>
                 <a:cs typeface="Times New Roman" panose="02020603050405020304" pitchFamily="18" charset="0"/>
               </a:rPr>
               <a:t>ВыполнениеШаговПартии</a:t>
             </a:r>
-            <a:endParaRPr lang="ru-RU" sz="1600" b="0" i="0" dirty="0">
-              <a:effectLst/>
+            <a:endParaRPr lang="ru-RU" sz="1600" dirty="0">
               <a:latin typeface="Times New Roman" panose="02020603050405020304" pitchFamily="18" charset="0"/>
               <a:cs typeface="Times New Roman" panose="02020603050405020304" pitchFamily="18" charset="0"/>
             </a:endParaRPr>
           </a:p>
           <a:p>
-            <a:pPr algn="l">
+            <a:pPr>
               <a:spcBef>
                 <a:spcPts val="450"/>
               </a:spcBef>
@@ -14392,37 +15250,33 @@
               <a:buChar char="•"/>
             </a:pPr>
             <a:r>
-              <a:rPr lang="ru-RU" sz="1600" b="0" i="0" dirty="0" err="1">
-                <a:effectLst/>
+              <a:rPr lang="ru-RU" sz="1600" dirty="0" err="1">
                 <a:latin typeface="Times New Roman" panose="02020603050405020304" pitchFamily="18" charset="0"/>
                 <a:cs typeface="Times New Roman" panose="02020603050405020304" pitchFamily="18" charset="0"/>
               </a:rPr>
               <a:t>ЛабораторныеИспытания</a:t>
             </a:r>
             <a:r>
-              <a:rPr lang="ru-RU" sz="1600" b="0" i="0" dirty="0">
-                <a:effectLst/>
+              <a:rPr lang="ru-RU" sz="1600" dirty="0">
                 <a:latin typeface="Times New Roman" panose="02020603050405020304" pitchFamily="18" charset="0"/>
                 <a:cs typeface="Times New Roman" panose="02020603050405020304" pitchFamily="18" charset="0"/>
               </a:rPr>
               <a:t>, </a:t>
             </a:r>
             <a:r>
-              <a:rPr lang="ru-RU" sz="1600" b="0" i="0" dirty="0" err="1">
-                <a:effectLst/>
+              <a:rPr lang="ru-RU" sz="1600" dirty="0" err="1">
                 <a:latin typeface="Times New Roman" panose="02020603050405020304" pitchFamily="18" charset="0"/>
                 <a:cs typeface="Times New Roman" panose="02020603050405020304" pitchFamily="18" charset="0"/>
               </a:rPr>
               <a:t>ПартииСырья</a:t>
             </a:r>
-            <a:endParaRPr lang="ru-RU" sz="1600" b="0" i="0" dirty="0">
-              <a:effectLst/>
+            <a:endParaRPr lang="ru-RU" sz="1600" dirty="0">
               <a:latin typeface="Times New Roman" panose="02020603050405020304" pitchFamily="18" charset="0"/>
               <a:cs typeface="Times New Roman" panose="02020603050405020304" pitchFamily="18" charset="0"/>
             </a:endParaRPr>
           </a:p>
           <a:p>
-            <a:pPr algn="l">
+            <a:pPr>
               <a:spcBef>
                 <a:spcPts val="450"/>
               </a:spcBef>
@@ -14430,16 +15284,14 @@
               <a:buChar char="•"/>
             </a:pPr>
             <a:r>
-              <a:rPr lang="ru-RU" sz="1600" b="0" i="0" dirty="0" err="1">
-                <a:effectLst/>
+              <a:rPr lang="ru-RU" sz="1600" dirty="0" err="1">
                 <a:latin typeface="Times New Roman" panose="02020603050405020304" pitchFamily="18" charset="0"/>
                 <a:cs typeface="Times New Roman" panose="02020603050405020304" pitchFamily="18" charset="0"/>
               </a:rPr>
               <a:t>ЖурналСобытий</a:t>
             </a:r>
             <a:r>
-              <a:rPr lang="ru-RU" sz="1600" b="0" i="0" dirty="0">
-                <a:effectLst/>
+              <a:rPr lang="ru-RU" sz="1600" dirty="0">
                 <a:latin typeface="Times New Roman" panose="02020603050405020304" pitchFamily="18" charset="0"/>
                 <a:cs typeface="Times New Roman" panose="02020603050405020304" pitchFamily="18" charset="0"/>
               </a:rPr>
@@ -14462,7 +15314,7 @@
         </p:nvSpPr>
         <p:spPr>
           <a:xfrm>
-            <a:off x="683568" y="133271"/>
+            <a:off x="2207568" y="133271"/>
             <a:ext cx="8003232" cy="707886"/>
           </a:xfrm>
           <a:prstGeom prst="rect">
@@ -14486,11 +15338,9 @@
               <a:spcAft>
                 <a:spcPts val="1200"/>
               </a:spcAft>
-              <a:buNone/>
             </a:pPr>
             <a:r>
               <a:rPr lang="ru-RU" sz="2400" b="1" dirty="0">
-                <a:effectLst/>
                 <a:latin typeface="Times New Roman" panose="02020603050405020304" pitchFamily="18" charset="0"/>
                 <a:cs typeface="Times New Roman" panose="02020603050405020304" pitchFamily="18" charset="0"/>
               </a:rPr>
@@ -14513,7 +15363,7 @@
         </p:nvSpPr>
         <p:spPr>
           <a:xfrm>
-            <a:off x="125768" y="640981"/>
+            <a:off x="1496680" y="643102"/>
             <a:ext cx="9118832" cy="1077218"/>
           </a:xfrm>
           <a:prstGeom prst="rect">
@@ -14531,23 +15381,20 @@
               <a:buNone/>
             </a:pPr>
             <a:r>
-              <a:rPr lang="ru-RU" sz="1600" b="1" i="0" dirty="0">
-                <a:effectLst/>
+              <a:rPr lang="ru-RU" sz="1600" b="1" dirty="0">
                 <a:latin typeface="Times New Roman" panose="02020603050405020304" pitchFamily="18" charset="0"/>
                 <a:cs typeface="Times New Roman" panose="02020603050405020304" pitchFamily="18" charset="0"/>
               </a:rPr>
               <a:t>Краткое описание:</a:t>
             </a:r>
             <a:br>
-              <a:rPr lang="ru-RU" sz="1600" b="0" i="0" dirty="0">
-                <a:effectLst/>
+              <a:rPr lang="ru-RU" sz="1600" dirty="0">
                 <a:latin typeface="Times New Roman" panose="02020603050405020304" pitchFamily="18" charset="0"/>
                 <a:cs typeface="Times New Roman" panose="02020603050405020304" pitchFamily="18" charset="0"/>
               </a:rPr>
             </a:br>
             <a:r>
-              <a:rPr lang="ru-RU" sz="1600" b="0" i="0" dirty="0">
-                <a:effectLst/>
+              <a:rPr lang="ru-RU" sz="1600" dirty="0">
                 <a:latin typeface="Times New Roman" panose="02020603050405020304" pitchFamily="18" charset="0"/>
                 <a:cs typeface="Times New Roman" panose="02020603050405020304" pitchFamily="18" charset="0"/>
               </a:rPr>
@@ -14569,7 +15416,7 @@
 </p:sld>
 </file>
 
-<file path=ppt/slides/slide7.xml><?xml version="1.0" encoding="utf-8"?>
+<file path=ppt/slides/slide8.xml><?xml version="1.0" encoding="utf-8"?>
 <p:sld xmlns:a="http://schemas.openxmlformats.org/drawingml/2006/main" xmlns:r="http://schemas.openxmlformats.org/officeDocument/2006/relationships" xmlns:p="http://schemas.openxmlformats.org/presentationml/2006/main">
   <p:cSld>
     <p:spTree>
@@ -14649,8 +15496,8 @@
         </p:nvSpPr>
         <p:spPr>
           <a:xfrm>
-            <a:off x="16408" y="1925474"/>
-            <a:ext cx="3043424" cy="4383251"/>
+            <a:off x="312641" y="1745398"/>
+            <a:ext cx="2808312" cy="4601260"/>
           </a:xfrm>
           <a:prstGeom prst="rect">
             <a:avLst/>
@@ -14663,31 +15510,28 @@
           </a:bodyPr>
           <a:lstStyle/>
           <a:p>
-            <a:pPr algn="l">
+            <a:pPr>
               <a:spcBef>
                 <a:spcPts val="1200"/>
               </a:spcBef>
               <a:spcAft>
                 <a:spcPts val="1200"/>
               </a:spcAft>
-              <a:buNone/>
             </a:pPr>
             <a:r>
-              <a:rPr lang="ru-RU" b="1" i="0" dirty="0">
-                <a:effectLst/>
+              <a:rPr lang="ru-RU" b="1" dirty="0">
                 <a:latin typeface="Times New Roman" panose="02020603050405020304" pitchFamily="18" charset="0"/>
                 <a:cs typeface="Times New Roman" panose="02020603050405020304" pitchFamily="18" charset="0"/>
               </a:rPr>
               <a:t>Основные контроллеры:</a:t>
             </a:r>
-            <a:endParaRPr lang="ru-RU" b="0" i="0" dirty="0">
-              <a:effectLst/>
+            <a:endParaRPr lang="ru-RU" dirty="0">
               <a:latin typeface="Times New Roman" panose="02020603050405020304" pitchFamily="18" charset="0"/>
               <a:cs typeface="Times New Roman" panose="02020603050405020304" pitchFamily="18" charset="0"/>
             </a:endParaRPr>
           </a:p>
           <a:p>
-            <a:pPr algn="l">
+            <a:pPr>
               <a:lnSpc>
                 <a:spcPts val="1650"/>
               </a:lnSpc>
@@ -14701,40 +15545,35 @@
               <a:buChar char="•"/>
             </a:pPr>
             <a:r>
-              <a:rPr lang="en-US" b="0" i="0" dirty="0" err="1">
-                <a:effectLst/>
+              <a:rPr lang="en-US" dirty="0" err="1">
                 <a:latin typeface="Times New Roman" panose="02020603050405020304" pitchFamily="18" charset="0"/>
                 <a:cs typeface="Times New Roman" panose="02020603050405020304" pitchFamily="18" charset="0"/>
               </a:rPr>
               <a:t>AuthController</a:t>
             </a:r>
             <a:r>
-              <a:rPr lang="en-US" b="0" i="0" dirty="0">
-                <a:effectLst/>
+              <a:rPr lang="en-US" dirty="0">
                 <a:latin typeface="Times New Roman" panose="02020603050405020304" pitchFamily="18" charset="0"/>
                 <a:cs typeface="Times New Roman" panose="02020603050405020304" pitchFamily="18" charset="0"/>
               </a:rPr>
               <a:t> – </a:t>
             </a:r>
             <a:r>
-              <a:rPr lang="ru-RU" b="0" i="0" dirty="0">
-                <a:effectLst/>
+              <a:rPr lang="ru-RU" dirty="0">
                 <a:latin typeface="Times New Roman" panose="02020603050405020304" pitchFamily="18" charset="0"/>
                 <a:cs typeface="Times New Roman" panose="02020603050405020304" pitchFamily="18" charset="0"/>
               </a:rPr>
               <a:t>авторизация (</a:t>
             </a:r>
             <a:r>
-              <a:rPr lang="en-US" b="0" i="0" dirty="0" err="1">
-                <a:effectLst/>
+              <a:rPr lang="en-US" dirty="0" err="1">
                 <a:latin typeface="Times New Roman" panose="02020603050405020304" pitchFamily="18" charset="0"/>
                 <a:cs typeface="Times New Roman" panose="02020603050405020304" pitchFamily="18" charset="0"/>
               </a:rPr>
               <a:t>BCrypt</a:t>
             </a:r>
             <a:r>
-              <a:rPr lang="en-US" b="0" i="0" dirty="0">
-                <a:effectLst/>
+              <a:rPr lang="en-US" dirty="0">
                 <a:latin typeface="Times New Roman" panose="02020603050405020304" pitchFamily="18" charset="0"/>
                 <a:cs typeface="Times New Roman" panose="02020603050405020304" pitchFamily="18" charset="0"/>
               </a:rPr>
@@ -14742,7 +15581,7 @@
             </a:r>
           </a:p>
           <a:p>
-            <a:pPr algn="l">
+            <a:pPr>
               <a:lnSpc>
                 <a:spcPts val="1650"/>
               </a:lnSpc>
@@ -14756,56 +15595,49 @@
               <a:buChar char="•"/>
             </a:pPr>
             <a:r>
-              <a:rPr lang="en-US" b="0" i="0" dirty="0" err="1">
-                <a:effectLst/>
+              <a:rPr lang="en-US" dirty="0" err="1">
                 <a:latin typeface="Times New Roman" panose="02020603050405020304" pitchFamily="18" charset="0"/>
                 <a:cs typeface="Times New Roman" panose="02020603050405020304" pitchFamily="18" charset="0"/>
               </a:rPr>
               <a:t>ProductsController</a:t>
             </a:r>
             <a:r>
-              <a:rPr lang="en-US" b="0" i="0" dirty="0">
-                <a:effectLst/>
+              <a:rPr lang="en-US" dirty="0">
                 <a:latin typeface="Times New Roman" panose="02020603050405020304" pitchFamily="18" charset="0"/>
                 <a:cs typeface="Times New Roman" panose="02020603050405020304" pitchFamily="18" charset="0"/>
               </a:rPr>
               <a:t>, </a:t>
             </a:r>
             <a:r>
-              <a:rPr lang="en-US" b="0" i="0" dirty="0" err="1">
-                <a:effectLst/>
+              <a:rPr lang="en-US" dirty="0" err="1">
                 <a:latin typeface="Times New Roman" panose="02020603050405020304" pitchFamily="18" charset="0"/>
                 <a:cs typeface="Times New Roman" panose="02020603050405020304" pitchFamily="18" charset="0"/>
               </a:rPr>
               <a:t>RecipesController</a:t>
             </a:r>
             <a:r>
-              <a:rPr lang="en-US" b="0" i="0" dirty="0">
-                <a:effectLst/>
+              <a:rPr lang="en-US" dirty="0">
                 <a:latin typeface="Times New Roman" panose="02020603050405020304" pitchFamily="18" charset="0"/>
                 <a:cs typeface="Times New Roman" panose="02020603050405020304" pitchFamily="18" charset="0"/>
               </a:rPr>
               <a:t>, </a:t>
             </a:r>
             <a:r>
-              <a:rPr lang="en-US" b="0" i="0" dirty="0" err="1">
-                <a:effectLst/>
+              <a:rPr lang="en-US" dirty="0" err="1">
                 <a:latin typeface="Times New Roman" panose="02020603050405020304" pitchFamily="18" charset="0"/>
                 <a:cs typeface="Times New Roman" panose="02020603050405020304" pitchFamily="18" charset="0"/>
               </a:rPr>
               <a:t>TechCardsController</a:t>
             </a:r>
             <a:r>
-              <a:rPr lang="en-US" b="0" i="0" dirty="0">
-                <a:effectLst/>
+              <a:rPr lang="en-US" dirty="0">
                 <a:latin typeface="Times New Roman" panose="02020603050405020304" pitchFamily="18" charset="0"/>
                 <a:cs typeface="Times New Roman" panose="02020603050405020304" pitchFamily="18" charset="0"/>
               </a:rPr>
               <a:t> – </a:t>
             </a:r>
             <a:r>
-              <a:rPr lang="ru-RU" b="0" i="0" dirty="0">
-                <a:effectLst/>
+              <a:rPr lang="ru-RU" dirty="0">
                 <a:latin typeface="Times New Roman" panose="02020603050405020304" pitchFamily="18" charset="0"/>
                 <a:cs typeface="Times New Roman" panose="02020603050405020304" pitchFamily="18" charset="0"/>
               </a:rPr>
@@ -14813,7 +15645,7 @@
             </a:r>
           </a:p>
           <a:p>
-            <a:pPr algn="l">
+            <a:pPr>
               <a:lnSpc>
                 <a:spcPts val="1650"/>
               </a:lnSpc>
@@ -14827,24 +15659,21 @@
               <a:buChar char="•"/>
             </a:pPr>
             <a:r>
-              <a:rPr lang="en-US" b="0" i="0" dirty="0" err="1">
-                <a:effectLst/>
+              <a:rPr lang="en-US" dirty="0" err="1">
                 <a:latin typeface="Times New Roman" panose="02020603050405020304" pitchFamily="18" charset="0"/>
                 <a:cs typeface="Times New Roman" panose="02020603050405020304" pitchFamily="18" charset="0"/>
               </a:rPr>
               <a:t>BatchesController</a:t>
             </a:r>
             <a:r>
-              <a:rPr lang="en-US" b="0" i="0" dirty="0">
-                <a:effectLst/>
+              <a:rPr lang="en-US" dirty="0">
                 <a:latin typeface="Times New Roman" panose="02020603050405020304" pitchFamily="18" charset="0"/>
                 <a:cs typeface="Times New Roman" panose="02020603050405020304" pitchFamily="18" charset="0"/>
               </a:rPr>
               <a:t> – </a:t>
             </a:r>
             <a:r>
-              <a:rPr lang="ru-RU" b="0" i="0" dirty="0">
-                <a:effectLst/>
+              <a:rPr lang="ru-RU" dirty="0">
                 <a:latin typeface="Times New Roman" panose="02020603050405020304" pitchFamily="18" charset="0"/>
                 <a:cs typeface="Times New Roman" panose="02020603050405020304" pitchFamily="18" charset="0"/>
               </a:rPr>
@@ -14852,7 +15681,7 @@
             </a:r>
           </a:p>
           <a:p>
-            <a:pPr algn="l">
+            <a:pPr>
               <a:lnSpc>
                 <a:spcPts val="1650"/>
               </a:lnSpc>
@@ -14866,24 +15695,21 @@
               <a:buChar char="•"/>
             </a:pPr>
             <a:r>
-              <a:rPr lang="en-US" b="0" i="0" dirty="0" err="1">
-                <a:effectLst/>
+              <a:rPr lang="en-US" dirty="0" err="1">
                 <a:latin typeface="Times New Roman" panose="02020603050405020304" pitchFamily="18" charset="0"/>
                 <a:cs typeface="Times New Roman" panose="02020603050405020304" pitchFamily="18" charset="0"/>
               </a:rPr>
               <a:t>QualityControlController</a:t>
             </a:r>
             <a:r>
-              <a:rPr lang="en-US" b="0" i="0" dirty="0">
-                <a:effectLst/>
+              <a:rPr lang="en-US" dirty="0">
                 <a:latin typeface="Times New Roman" panose="02020603050405020304" pitchFamily="18" charset="0"/>
                 <a:cs typeface="Times New Roman" panose="02020603050405020304" pitchFamily="18" charset="0"/>
               </a:rPr>
               <a:t> – </a:t>
             </a:r>
             <a:r>
-              <a:rPr lang="ru-RU" b="0" i="0" dirty="0">
-                <a:effectLst/>
+              <a:rPr lang="ru-RU" dirty="0">
                 <a:latin typeface="Times New Roman" panose="02020603050405020304" pitchFamily="18" charset="0"/>
                 <a:cs typeface="Times New Roman" panose="02020603050405020304" pitchFamily="18" charset="0"/>
               </a:rPr>
@@ -14891,7 +15717,7 @@
             </a:r>
           </a:p>
           <a:p>
-            <a:pPr algn="l">
+            <a:pPr>
               <a:lnSpc>
                 <a:spcPts val="1650"/>
               </a:lnSpc>
@@ -14905,24 +15731,21 @@
               <a:buChar char="•"/>
             </a:pPr>
             <a:r>
-              <a:rPr lang="en-US" b="0" i="0" dirty="0" err="1">
-                <a:effectLst/>
+              <a:rPr lang="en-US" dirty="0" err="1">
                 <a:latin typeface="Times New Roman" panose="02020603050405020304" pitchFamily="18" charset="0"/>
                 <a:cs typeface="Times New Roman" panose="02020603050405020304" pitchFamily="18" charset="0"/>
               </a:rPr>
               <a:t>ReportsController</a:t>
             </a:r>
             <a:r>
-              <a:rPr lang="en-US" b="0" i="0" dirty="0">
-                <a:effectLst/>
+              <a:rPr lang="en-US" dirty="0">
                 <a:latin typeface="Times New Roman" panose="02020603050405020304" pitchFamily="18" charset="0"/>
                 <a:cs typeface="Times New Roman" panose="02020603050405020304" pitchFamily="18" charset="0"/>
               </a:rPr>
               <a:t> – </a:t>
             </a:r>
             <a:r>
-              <a:rPr lang="ru-RU" b="0" i="0" dirty="0">
-                <a:effectLst/>
+              <a:rPr lang="ru-RU" dirty="0">
                 <a:latin typeface="Times New Roman" panose="02020603050405020304" pitchFamily="18" charset="0"/>
                 <a:cs typeface="Times New Roman" panose="02020603050405020304" pitchFamily="18" charset="0"/>
               </a:rPr>
@@ -14945,7 +15768,7 @@
         </p:nvSpPr>
         <p:spPr>
           <a:xfrm>
-            <a:off x="457200" y="76460"/>
+            <a:off x="1981200" y="76461"/>
             <a:ext cx="8686800" cy="407291"/>
           </a:xfrm>
           <a:prstGeom prst="rect">
@@ -14969,11 +15792,9 @@
               <a:spcAft>
                 <a:spcPts val="1200"/>
               </a:spcAft>
-              <a:buNone/>
             </a:pPr>
             <a:r>
               <a:rPr lang="ru-RU" sz="2800" b="1" dirty="0">
-                <a:effectLst/>
                 <a:latin typeface="Times New Roman" panose="02020603050405020304" pitchFamily="18" charset="0"/>
                 <a:cs typeface="Times New Roman" panose="02020603050405020304" pitchFamily="18" charset="0"/>
               </a:rPr>
@@ -14981,7 +15802,6 @@
             </a:r>
             <a:r>
               <a:rPr lang="en-US" sz="2800" b="1" dirty="0">
-                <a:effectLst/>
                 <a:latin typeface="Times New Roman" panose="02020603050405020304" pitchFamily="18" charset="0"/>
                 <a:cs typeface="Times New Roman" panose="02020603050405020304" pitchFamily="18" charset="0"/>
               </a:rPr>
@@ -14989,7 +15809,6 @@
             </a:r>
             <a:r>
               <a:rPr lang="en-US" sz="2800" b="1" dirty="0" err="1">
-                <a:effectLst/>
                 <a:latin typeface="Times New Roman" panose="02020603050405020304" pitchFamily="18" charset="0"/>
                 <a:cs typeface="Times New Roman" panose="02020603050405020304" pitchFamily="18" charset="0"/>
               </a:rPr>
@@ -14997,7 +15816,6 @@
             </a:r>
             <a:r>
               <a:rPr lang="en-US" sz="2800" b="1" dirty="0">
-                <a:effectLst/>
                 <a:latin typeface="Times New Roman" panose="02020603050405020304" pitchFamily="18" charset="0"/>
                 <a:cs typeface="Times New Roman" panose="02020603050405020304" pitchFamily="18" charset="0"/>
               </a:rPr>
@@ -15020,8 +15838,8 @@
         </p:nvSpPr>
         <p:spPr>
           <a:xfrm>
-            <a:off x="16408" y="626477"/>
-            <a:ext cx="9127592" cy="830997"/>
+            <a:off x="911424" y="494375"/>
+            <a:ext cx="8686800" cy="830997"/>
           </a:xfrm>
           <a:prstGeom prst="rect">
             <a:avLst/>
@@ -15034,57 +15852,50 @@
           </a:bodyPr>
           <a:lstStyle/>
           <a:p>
-            <a:pPr algn="l">
+            <a:pPr>
               <a:spcBef>
                 <a:spcPts val="1200"/>
               </a:spcBef>
               <a:spcAft>
                 <a:spcPts val="1200"/>
               </a:spcAft>
-              <a:buNone/>
             </a:pPr>
             <a:r>
-              <a:rPr lang="ru-RU" sz="1600" b="1" i="0" dirty="0">
-                <a:effectLst/>
+              <a:rPr lang="ru-RU" sz="1600" b="1" dirty="0">
                 <a:latin typeface="Times New Roman" panose="02020603050405020304" pitchFamily="18" charset="0"/>
                 <a:cs typeface="Times New Roman" panose="02020603050405020304" pitchFamily="18" charset="0"/>
               </a:rPr>
               <a:t>Краткое описание:</a:t>
             </a:r>
             <a:br>
-              <a:rPr lang="ru-RU" sz="1600" b="0" i="0" dirty="0">
-                <a:effectLst/>
+              <a:rPr lang="ru-RU" sz="1600" dirty="0">
                 <a:latin typeface="Times New Roman" panose="02020603050405020304" pitchFamily="18" charset="0"/>
                 <a:cs typeface="Times New Roman" panose="02020603050405020304" pitchFamily="18" charset="0"/>
               </a:rPr>
             </a:br>
             <a:r>
-              <a:rPr lang="ru-RU" sz="1600" b="0" i="0" dirty="0">
-                <a:effectLst/>
+              <a:rPr lang="ru-RU" sz="1600" dirty="0">
                 <a:latin typeface="Times New Roman" panose="02020603050405020304" pitchFamily="18" charset="0"/>
                 <a:cs typeface="Times New Roman" panose="02020603050405020304" pitchFamily="18" charset="0"/>
               </a:rPr>
               <a:t>Разработан </a:t>
             </a:r>
             <a:r>
-              <a:rPr lang="en-US" sz="1600" b="0" i="0" dirty="0">
-                <a:effectLst/>
+              <a:rPr lang="en-US" sz="1600" dirty="0">
                 <a:latin typeface="Times New Roman" panose="02020603050405020304" pitchFamily="18" charset="0"/>
                 <a:cs typeface="Times New Roman" panose="02020603050405020304" pitchFamily="18" charset="0"/>
               </a:rPr>
               <a:t>backend-</a:t>
             </a:r>
             <a:r>
-              <a:rPr lang="ru-RU" sz="1600" b="0" i="0" dirty="0">
-                <a:effectLst/>
+              <a:rPr lang="ru-RU" sz="1600" dirty="0">
                 <a:latin typeface="Times New Roman" panose="02020603050405020304" pitchFamily="18" charset="0"/>
                 <a:cs typeface="Times New Roman" panose="02020603050405020304" pitchFamily="18" charset="0"/>
               </a:rPr>
               <a:t>сервер на </a:t>
             </a:r>
             <a:r>
-              <a:rPr lang="en-US" sz="1600" b="0" i="0" u="none" strike="noStrike" dirty="0">
-                <a:effectLst/>
+              <a:rPr lang="en-US" sz="1600" dirty="0">
                 <a:latin typeface="Times New Roman" panose="02020603050405020304" pitchFamily="18" charset="0"/>
                 <a:cs typeface="Times New Roman" panose="02020603050405020304" pitchFamily="18" charset="0"/>
                 <a:hlinkClick r:id="rId2">
@@ -15098,32 +15909,28 @@
               <a:t>ASP.NET</a:t>
             </a:r>
             <a:r>
-              <a:rPr lang="en-US" sz="1600" b="0" i="0" dirty="0">
-                <a:effectLst/>
+              <a:rPr lang="en-US" sz="1600" dirty="0">
                 <a:latin typeface="Times New Roman" panose="02020603050405020304" pitchFamily="18" charset="0"/>
                 <a:cs typeface="Times New Roman" panose="02020603050405020304" pitchFamily="18" charset="0"/>
               </a:rPr>
               <a:t> Core 8.0 </a:t>
             </a:r>
             <a:r>
-              <a:rPr lang="ru-RU" sz="1600" b="0" i="0" dirty="0">
-                <a:effectLst/>
+              <a:rPr lang="ru-RU" sz="1600" dirty="0">
                 <a:latin typeface="Times New Roman" panose="02020603050405020304" pitchFamily="18" charset="0"/>
                 <a:cs typeface="Times New Roman" panose="02020603050405020304" pitchFamily="18" charset="0"/>
               </a:rPr>
               <a:t>с использованием </a:t>
             </a:r>
             <a:r>
-              <a:rPr lang="en-US" sz="1600" b="0" i="0" dirty="0">
-                <a:effectLst/>
+              <a:rPr lang="en-US" sz="1600" dirty="0">
                 <a:latin typeface="Times New Roman" panose="02020603050405020304" pitchFamily="18" charset="0"/>
                 <a:cs typeface="Times New Roman" panose="02020603050405020304" pitchFamily="18" charset="0"/>
               </a:rPr>
               <a:t>Entity Framework Core. </a:t>
             </a:r>
             <a:r>
-              <a:rPr lang="ru-RU" sz="1600" b="0" i="0" dirty="0">
-                <a:effectLst/>
+              <a:rPr lang="ru-RU" sz="1600" dirty="0">
                 <a:latin typeface="Times New Roman" panose="02020603050405020304" pitchFamily="18" charset="0"/>
                 <a:cs typeface="Times New Roman" panose="02020603050405020304" pitchFamily="18" charset="0"/>
               </a:rPr>
@@ -15154,8 +15961,43 @@
         </p:blipFill>
         <p:spPr>
           <a:xfrm>
-            <a:off x="3076240" y="2736345"/>
-            <a:ext cx="6067760" cy="3692952"/>
+            <a:off x="3166469" y="1359969"/>
+            <a:ext cx="5174260" cy="3149151"/>
+          </a:xfrm>
+          <a:prstGeom prst="rect">
+            <a:avLst/>
+          </a:prstGeom>
+          <a:ln>
+            <a:solidFill>
+              <a:schemeClr val="tx1"/>
+            </a:solidFill>
+          </a:ln>
+        </p:spPr>
+      </p:pic>
+      <p:pic>
+        <p:nvPicPr>
+          <p:cNvPr id="6" name="Рисунок 5">
+            <a:extLst>
+              <a:ext uri="{FF2B5EF4-FFF2-40B4-BE49-F238E27FC236}">
+                <a16:creationId xmlns:a16="http://schemas.microsoft.com/office/drawing/2014/main" id="{532FC51A-9689-7D07-3A94-959B102A975C}"/>
+              </a:ext>
+            </a:extLst>
+          </p:cNvPr>
+          <p:cNvPicPr>
+            <a:picLocks noChangeAspect="1"/>
+          </p:cNvPicPr>
+          <p:nvPr/>
+        </p:nvPicPr>
+        <p:blipFill>
+          <a:blip r:embed="rId4"/>
+          <a:stretch>
+            <a:fillRect/>
+          </a:stretch>
+        </p:blipFill>
+        <p:spPr>
+          <a:xfrm>
+            <a:off x="7787229" y="3140969"/>
+            <a:ext cx="4317387" cy="3612590"/>
           </a:xfrm>
           <a:prstGeom prst="rect">
             <a:avLst/>
@@ -15180,7 +16022,7 @@
 </p:sld>
 </file>
 
-<file path=ppt/slides/slide8.xml><?xml version="1.0" encoding="utf-8"?>
+<file path=ppt/slides/slide9.xml><?xml version="1.0" encoding="utf-8"?>
 <p:sld xmlns:a="http://schemas.openxmlformats.org/drawingml/2006/main" xmlns:r="http://schemas.openxmlformats.org/officeDocument/2006/relationships" xmlns:p="http://schemas.openxmlformats.org/presentationml/2006/main">
   <p:cSld>
     <p:spTree>
@@ -15250,7 +16092,7 @@
         </p:nvSpPr>
         <p:spPr>
           <a:xfrm>
-            <a:off x="6876697" y="3795761"/>
+            <a:off x="9157290" y="3782008"/>
             <a:ext cx="2818656" cy="752947"/>
           </a:xfrm>
         </p:spPr>
@@ -15294,8 +16136,8 @@
         </p:nvSpPr>
         <p:spPr>
           <a:xfrm>
-            <a:off x="0" y="1899264"/>
-            <a:ext cx="3275856" cy="3983142"/>
+            <a:off x="1055440" y="1454912"/>
+            <a:ext cx="2952328" cy="4537139"/>
           </a:xfrm>
           <a:prstGeom prst="rect">
             <a:avLst/>
@@ -15308,31 +16150,28 @@
           </a:bodyPr>
           <a:lstStyle/>
           <a:p>
-            <a:pPr algn="l">
+            <a:pPr>
               <a:spcBef>
                 <a:spcPts val="1200"/>
               </a:spcBef>
               <a:spcAft>
                 <a:spcPts val="1200"/>
               </a:spcAft>
-              <a:buNone/>
             </a:pPr>
             <a:r>
-              <a:rPr lang="ru-RU" b="1" i="0" dirty="0">
-                <a:effectLst/>
+              <a:rPr lang="ru-RU" b="1" dirty="0">
                 <a:latin typeface="Times New Roman" panose="02020603050405020304" pitchFamily="18" charset="0"/>
                 <a:cs typeface="Times New Roman" panose="02020603050405020304" pitchFamily="18" charset="0"/>
               </a:rPr>
               <a:t>Основные страницы:</a:t>
             </a:r>
-            <a:endParaRPr lang="ru-RU" b="0" i="0" dirty="0">
-              <a:effectLst/>
+            <a:endParaRPr lang="ru-RU" dirty="0">
               <a:latin typeface="Times New Roman" panose="02020603050405020304" pitchFamily="18" charset="0"/>
               <a:cs typeface="Times New Roman" panose="02020603050405020304" pitchFamily="18" charset="0"/>
             </a:endParaRPr>
           </a:p>
           <a:p>
-            <a:pPr algn="l">
+            <a:pPr>
               <a:spcBef>
                 <a:spcPts val="1200"/>
               </a:spcBef>
@@ -15343,8 +16182,7 @@
               <a:buChar char="•"/>
             </a:pPr>
             <a:r>
-              <a:rPr lang="ru-RU" b="0" i="0" dirty="0">
-                <a:effectLst/>
+              <a:rPr lang="ru-RU" dirty="0">
                 <a:latin typeface="Times New Roman" panose="02020603050405020304" pitchFamily="18" charset="0"/>
                 <a:cs typeface="Times New Roman" panose="02020603050405020304" pitchFamily="18" charset="0"/>
               </a:rPr>
@@ -15352,7 +16190,7 @@
             </a:r>
           </a:p>
           <a:p>
-            <a:pPr algn="l">
+            <a:pPr>
               <a:spcBef>
                 <a:spcPts val="450"/>
               </a:spcBef>
@@ -15363,8 +16201,7 @@
               <a:buChar char="•"/>
             </a:pPr>
             <a:r>
-              <a:rPr lang="ru-RU" b="0" i="0" dirty="0">
-                <a:effectLst/>
+              <a:rPr lang="ru-RU" dirty="0">
                 <a:latin typeface="Times New Roman" panose="02020603050405020304" pitchFamily="18" charset="0"/>
                 <a:cs typeface="Times New Roman" panose="02020603050405020304" pitchFamily="18" charset="0"/>
               </a:rPr>
@@ -15372,7 +16209,7 @@
             </a:r>
           </a:p>
           <a:p>
-            <a:pPr algn="l">
+            <a:pPr>
               <a:spcBef>
                 <a:spcPts val="450"/>
               </a:spcBef>
@@ -15383,8 +16220,7 @@
               <a:buChar char="•"/>
             </a:pPr>
             <a:r>
-              <a:rPr lang="ru-RU" b="0" i="0" dirty="0">
-                <a:effectLst/>
+              <a:rPr lang="ru-RU" dirty="0">
                 <a:latin typeface="Times New Roman" panose="02020603050405020304" pitchFamily="18" charset="0"/>
                 <a:cs typeface="Times New Roman" panose="02020603050405020304" pitchFamily="18" charset="0"/>
               </a:rPr>
@@ -15392,7 +16228,7 @@
             </a:r>
           </a:p>
           <a:p>
-            <a:pPr algn="l">
+            <a:pPr>
               <a:spcBef>
                 <a:spcPts val="450"/>
               </a:spcBef>
@@ -15403,8 +16239,7 @@
               <a:buChar char="•"/>
             </a:pPr>
             <a:r>
-              <a:rPr lang="ru-RU" b="0" i="0" dirty="0">
-                <a:effectLst/>
+              <a:rPr lang="ru-RU" dirty="0">
                 <a:latin typeface="Times New Roman" panose="02020603050405020304" pitchFamily="18" charset="0"/>
                 <a:cs typeface="Times New Roman" panose="02020603050405020304" pitchFamily="18" charset="0"/>
               </a:rPr>
@@ -15412,7 +16247,7 @@
             </a:r>
           </a:p>
           <a:p>
-            <a:pPr algn="l">
+            <a:pPr>
               <a:spcBef>
                 <a:spcPts val="450"/>
               </a:spcBef>
@@ -15423,8 +16258,7 @@
               <a:buChar char="•"/>
             </a:pPr>
             <a:r>
-              <a:rPr lang="ru-RU" b="0" i="0" dirty="0">
-                <a:effectLst/>
+              <a:rPr lang="ru-RU" dirty="0">
                 <a:latin typeface="Times New Roman" panose="02020603050405020304" pitchFamily="18" charset="0"/>
                 <a:cs typeface="Times New Roman" panose="02020603050405020304" pitchFamily="18" charset="0"/>
               </a:rPr>
@@ -15432,7 +16266,7 @@
             </a:r>
           </a:p>
           <a:p>
-            <a:pPr algn="l">
+            <a:pPr>
               <a:spcBef>
                 <a:spcPts val="450"/>
               </a:spcBef>
@@ -15443,8 +16277,7 @@
               <a:buChar char="•"/>
             </a:pPr>
             <a:r>
-              <a:rPr lang="ru-RU" b="0" i="0" dirty="0">
-                <a:effectLst/>
+              <a:rPr lang="ru-RU" dirty="0">
                 <a:latin typeface="Times New Roman" panose="02020603050405020304" pitchFamily="18" charset="0"/>
                 <a:cs typeface="Times New Roman" panose="02020603050405020304" pitchFamily="18" charset="0"/>
               </a:rPr>
@@ -15467,7 +16300,7 @@
         </p:nvSpPr>
         <p:spPr>
           <a:xfrm>
-            <a:off x="457200" y="63498"/>
+            <a:off x="1981200" y="63498"/>
             <a:ext cx="8363272" cy="404406"/>
           </a:xfrm>
           <a:prstGeom prst="rect">
@@ -15491,11 +16324,9 @@
               <a:spcAft>
                 <a:spcPts val="1200"/>
               </a:spcAft>
-              <a:buNone/>
             </a:pPr>
             <a:r>
               <a:rPr lang="ru-RU" sz="2400" b="1" dirty="0">
-                <a:effectLst/>
                 <a:latin typeface="Times New Roman" panose="02020603050405020304" pitchFamily="18" charset="0"/>
                 <a:cs typeface="Times New Roman" panose="02020603050405020304" pitchFamily="18" charset="0"/>
               </a:rPr>
@@ -15503,7 +16334,6 @@
             </a:r>
             <a:r>
               <a:rPr lang="ru-RU" sz="2400" b="1" dirty="0" err="1">
-                <a:effectLst/>
                 <a:latin typeface="Times New Roman" panose="02020603050405020304" pitchFamily="18" charset="0"/>
                 <a:cs typeface="Times New Roman" panose="02020603050405020304" pitchFamily="18" charset="0"/>
               </a:rPr>
@@ -15511,7 +16341,6 @@
             </a:r>
             <a:r>
               <a:rPr lang="ru-RU" sz="2400" b="1" dirty="0">
-                <a:effectLst/>
                 <a:latin typeface="Times New Roman" panose="02020603050405020304" pitchFamily="18" charset="0"/>
                 <a:cs typeface="Times New Roman" panose="02020603050405020304" pitchFamily="18" charset="0"/>
               </a:rPr>
@@ -15534,8 +16363,8 @@
         </p:nvSpPr>
         <p:spPr>
           <a:xfrm>
-            <a:off x="67228" y="385552"/>
-            <a:ext cx="9143216" cy="646331"/>
+            <a:off x="1647370" y="413109"/>
+            <a:ext cx="9030932" cy="646331"/>
           </a:xfrm>
           <a:prstGeom prst="rect">
             <a:avLst/>
@@ -15548,33 +16377,29 @@
           </a:bodyPr>
           <a:lstStyle/>
           <a:p>
-            <a:pPr algn="l">
+            <a:pPr>
               <a:spcBef>
                 <a:spcPts val="1200"/>
               </a:spcBef>
               <a:spcAft>
                 <a:spcPts val="1200"/>
               </a:spcAft>
-              <a:buNone/>
             </a:pPr>
             <a:r>
-              <a:rPr lang="ru-RU" b="1" i="0" dirty="0">
-                <a:effectLst/>
+              <a:rPr lang="ru-RU" b="1" dirty="0">
                 <a:latin typeface="Times New Roman" panose="02020603050405020304" pitchFamily="18" charset="0"/>
                 <a:cs typeface="Times New Roman" panose="02020603050405020304" pitchFamily="18" charset="0"/>
               </a:rPr>
               <a:t>Краткое описание:</a:t>
             </a:r>
             <a:br>
-              <a:rPr lang="ru-RU" b="0" i="0" dirty="0">
-                <a:effectLst/>
+              <a:rPr lang="ru-RU" dirty="0">
                 <a:latin typeface="Times New Roman" panose="02020603050405020304" pitchFamily="18" charset="0"/>
                 <a:cs typeface="Times New Roman" panose="02020603050405020304" pitchFamily="18" charset="0"/>
               </a:rPr>
             </a:br>
             <a:r>
-              <a:rPr lang="ru-RU" b="0" i="0" dirty="0">
-                <a:effectLst/>
+              <a:rPr lang="ru-RU" dirty="0">
                 <a:latin typeface="Times New Roman" panose="02020603050405020304" pitchFamily="18" charset="0"/>
                 <a:cs typeface="Times New Roman" panose="02020603050405020304" pitchFamily="18" charset="0"/>
               </a:rPr>
@@ -15605,7 +16430,7 @@
         </p:blipFill>
         <p:spPr>
           <a:xfrm>
-            <a:off x="4211960" y="1053621"/>
+            <a:off x="6975036" y="991162"/>
             <a:ext cx="4798347" cy="2799941"/>
           </a:xfrm>
           <a:prstGeom prst="rect">
@@ -15640,7 +16465,7 @@
         </p:blipFill>
         <p:spPr>
           <a:xfrm>
-            <a:off x="2987824" y="3890835"/>
+            <a:off x="3477103" y="3828377"/>
             <a:ext cx="4645465" cy="2705686"/>
           </a:xfrm>
           <a:prstGeom prst="rect">
@@ -15664,7 +16489,7 @@
         </p:nvSpPr>
         <p:spPr>
           <a:xfrm>
-            <a:off x="5449457" y="6549410"/>
+            <a:off x="5087888" y="6418028"/>
             <a:ext cx="2818656" cy="752947"/>
           </a:xfrm>
           <a:prstGeom prst="rect">
@@ -15814,7 +16639,6 @@
           </a:lstStyle>
           <a:p>
             <a:pPr marL="0" indent="0" algn="ctr">
-              <a:buFont typeface="Arial" pitchFamily="34" charset="0"/>
               <a:buNone/>
             </a:pPr>
             <a:r>
@@ -15831,676 +16655,6 @@
     <p:extLst>
       <p:ext uri="{BB962C8B-B14F-4D97-AF65-F5344CB8AC3E}">
         <p14:creationId xmlns:p14="http://schemas.microsoft.com/office/powerpoint/2010/main" val="3979425578"/>
-      </p:ext>
-    </p:extLst>
-  </p:cSld>
-  <p:clrMapOvr>
-    <a:masterClrMapping/>
-  </p:clrMapOvr>
-</p:sld>
-</file>
-
-<file path=ppt/slides/slide9.xml><?xml version="1.0" encoding="utf-8"?>
-<p:sld xmlns:a="http://schemas.openxmlformats.org/drawingml/2006/main" xmlns:r="http://schemas.openxmlformats.org/officeDocument/2006/relationships" xmlns:p="http://schemas.openxmlformats.org/presentationml/2006/main">
-  <p:cSld>
-    <p:spTree>
-      <p:nvGrpSpPr>
-        <p:cNvPr id="1" name=""/>
-        <p:cNvGrpSpPr/>
-        <p:nvPr/>
-      </p:nvGrpSpPr>
-      <p:grpSpPr>
-        <a:xfrm>
-          <a:off x="0" y="0"/>
-          <a:ext cx="0" cy="0"/>
-          <a:chOff x="0" y="0"/>
-          <a:chExt cx="0" cy="0"/>
-        </a:xfrm>
-      </p:grpSpPr>
-      <p:sp>
-        <p:nvSpPr>
-          <p:cNvPr id="2" name="Заголовок 1">
-            <a:extLst>
-              <a:ext uri="{FF2B5EF4-FFF2-40B4-BE49-F238E27FC236}">
-                <a16:creationId xmlns:a16="http://schemas.microsoft.com/office/drawing/2014/main" id="{E20C73A7-70DB-ABDF-5F9E-A581F1175091}"/>
-              </a:ext>
-            </a:extLst>
-          </p:cNvPr>
-          <p:cNvSpPr>
-            <a:spLocks noGrp="1"/>
-          </p:cNvSpPr>
-          <p:nvPr>
-            <p:ph type="title"/>
-          </p:nvPr>
-        </p:nvSpPr>
-        <p:spPr/>
-        <p:txBody>
-          <a:bodyPr/>
-          <a:lstStyle/>
-          <a:p>
-            <a:r>
-              <a:rPr lang="ru-RU" dirty="0">
-                <a:latin typeface="Times New Roman" panose="02020603050405020304" pitchFamily="18" charset="0"/>
-                <a:cs typeface="Times New Roman" panose="02020603050405020304" pitchFamily="18" charset="0"/>
-              </a:rPr>
-              <a:t> </a:t>
-            </a:r>
-          </a:p>
-        </p:txBody>
-      </p:sp>
-      <p:sp>
-        <p:nvSpPr>
-          <p:cNvPr id="3" name="Объект 2">
-            <a:extLst>
-              <a:ext uri="{FF2B5EF4-FFF2-40B4-BE49-F238E27FC236}">
-                <a16:creationId xmlns:a16="http://schemas.microsoft.com/office/drawing/2014/main" id="{9AE52EFF-A977-EFA3-5BED-6D0768C42BCB}"/>
-              </a:ext>
-            </a:extLst>
-          </p:cNvPr>
-          <p:cNvSpPr>
-            <a:spLocks noGrp="1"/>
-          </p:cNvSpPr>
-          <p:nvPr>
-            <p:ph idx="1"/>
-          </p:nvPr>
-        </p:nvSpPr>
-        <p:spPr>
-          <a:xfrm>
-            <a:off x="6808857" y="4317852"/>
-            <a:ext cx="2386608" cy="392907"/>
-          </a:xfrm>
-        </p:spPr>
-        <p:txBody>
-          <a:bodyPr>
-            <a:normAutofit/>
-          </a:bodyPr>
-          <a:lstStyle/>
-          <a:p>
-            <a:pPr marL="0" indent="0">
-              <a:buNone/>
-            </a:pPr>
-            <a:r>
-              <a:rPr lang="ru-RU" sz="1600" dirty="0">
-                <a:latin typeface="Times New Roman" panose="02020603050405020304" pitchFamily="18" charset="0"/>
-                <a:cs typeface="Times New Roman" panose="02020603050405020304" pitchFamily="18" charset="0"/>
-              </a:rPr>
-              <a:t> Карточка партии сырья</a:t>
-            </a:r>
-          </a:p>
-        </p:txBody>
-      </p:sp>
-      <p:sp>
-        <p:nvSpPr>
-          <p:cNvPr id="5" name="TextBox 4">
-            <a:extLst>
-              <a:ext uri="{FF2B5EF4-FFF2-40B4-BE49-F238E27FC236}">
-                <a16:creationId xmlns:a16="http://schemas.microsoft.com/office/drawing/2014/main" id="{0E0D91A1-1449-3199-F6CA-E618C139ED82}"/>
-              </a:ext>
-            </a:extLst>
-          </p:cNvPr>
-          <p:cNvSpPr txBox="1"/>
-          <p:nvPr/>
-        </p:nvSpPr>
-        <p:spPr>
-          <a:xfrm>
-            <a:off x="0" y="1440116"/>
-            <a:ext cx="2759402" cy="5306581"/>
-          </a:xfrm>
-          <a:prstGeom prst="rect">
-            <a:avLst/>
-          </a:prstGeom>
-          <a:noFill/>
-        </p:spPr>
-        <p:txBody>
-          <a:bodyPr wrap="square">
-            <a:spAutoFit/>
-          </a:bodyPr>
-          <a:lstStyle/>
-          <a:p>
-            <a:pPr algn="l">
-              <a:spcBef>
-                <a:spcPts val="1200"/>
-              </a:spcBef>
-              <a:buNone/>
-            </a:pPr>
-            <a:r>
-              <a:rPr lang="ru-RU" b="1" i="0" dirty="0">
-                <a:effectLst/>
-                <a:latin typeface="Times New Roman" panose="02020603050405020304" pitchFamily="18" charset="0"/>
-                <a:cs typeface="Times New Roman" panose="02020603050405020304" pitchFamily="18" charset="0"/>
-              </a:rPr>
-              <a:t>Основные разделы:</a:t>
-            </a:r>
-            <a:endParaRPr lang="ru-RU" b="0" i="0" dirty="0">
-              <a:effectLst/>
-              <a:latin typeface="Times New Roman" panose="02020603050405020304" pitchFamily="18" charset="0"/>
-              <a:cs typeface="Times New Roman" panose="02020603050405020304" pitchFamily="18" charset="0"/>
-            </a:endParaRPr>
-          </a:p>
-          <a:p>
-            <a:pPr algn="l">
-              <a:spcBef>
-                <a:spcPts val="1200"/>
-              </a:spcBef>
-              <a:buFont typeface="Arial" panose="020B0604020202020204" pitchFamily="34" charset="0"/>
-              <a:buChar char="•"/>
-            </a:pPr>
-            <a:r>
-              <a:rPr lang="ru-RU" b="0" i="0" dirty="0">
-                <a:effectLst/>
-                <a:latin typeface="Times New Roman" panose="02020603050405020304" pitchFamily="18" charset="0"/>
-                <a:cs typeface="Times New Roman" panose="02020603050405020304" pitchFamily="18" charset="0"/>
-              </a:rPr>
-              <a:t>Партии сырья (фильтры: поиск, статус, поставщик, дата, только с испытаниями)</a:t>
-            </a:r>
-          </a:p>
-          <a:p>
-            <a:pPr algn="l">
-              <a:spcBef>
-                <a:spcPts val="450"/>
-              </a:spcBef>
-              <a:buFont typeface="Arial" panose="020B0604020202020204" pitchFamily="34" charset="0"/>
-              <a:buChar char="•"/>
-            </a:pPr>
-            <a:r>
-              <a:rPr lang="ru-RU" b="0" i="0" dirty="0">
-                <a:effectLst/>
-                <a:latin typeface="Times New Roman" panose="02020603050405020304" pitchFamily="18" charset="0"/>
-                <a:cs typeface="Times New Roman" panose="02020603050405020304" pitchFamily="18" charset="0"/>
-              </a:rPr>
-              <a:t>Готовая продукция</a:t>
-            </a:r>
-          </a:p>
-          <a:p>
-            <a:pPr algn="l">
-              <a:spcBef>
-                <a:spcPts val="450"/>
-              </a:spcBef>
-              <a:buFont typeface="Arial" panose="020B0604020202020204" pitchFamily="34" charset="0"/>
-              <a:buChar char="•"/>
-            </a:pPr>
-            <a:r>
-              <a:rPr lang="ru-RU" b="0" i="0" dirty="0">
-                <a:effectLst/>
-                <a:latin typeface="Times New Roman" panose="02020603050405020304" pitchFamily="18" charset="0"/>
-                <a:cs typeface="Times New Roman" panose="02020603050405020304" pitchFamily="18" charset="0"/>
-              </a:rPr>
-              <a:t>Испытания (CRUD)</a:t>
-            </a:r>
-          </a:p>
-          <a:p>
-            <a:pPr algn="l">
-              <a:spcBef>
-                <a:spcPts val="1200"/>
-              </a:spcBef>
-              <a:buNone/>
-            </a:pPr>
-            <a:r>
-              <a:rPr lang="ru-RU" b="1" i="0" dirty="0">
-                <a:effectLst/>
-                <a:latin typeface="Times New Roman" panose="02020603050405020304" pitchFamily="18" charset="0"/>
-                <a:cs typeface="Times New Roman" panose="02020603050405020304" pitchFamily="18" charset="0"/>
-              </a:rPr>
-              <a:t>Карточка партии сырья:</a:t>
-            </a:r>
-            <a:endParaRPr lang="ru-RU" b="0" i="0" dirty="0">
-              <a:effectLst/>
-              <a:latin typeface="Times New Roman" panose="02020603050405020304" pitchFamily="18" charset="0"/>
-              <a:cs typeface="Times New Roman" panose="02020603050405020304" pitchFamily="18" charset="0"/>
-            </a:endParaRPr>
-          </a:p>
-          <a:p>
-            <a:pPr algn="l">
-              <a:spcBef>
-                <a:spcPts val="1200"/>
-              </a:spcBef>
-              <a:buFont typeface="Arial" panose="020B0604020202020204" pitchFamily="34" charset="0"/>
-              <a:buChar char="•"/>
-            </a:pPr>
-            <a:r>
-              <a:rPr lang="ru-RU" b="0" i="0" dirty="0">
-                <a:effectLst/>
-                <a:latin typeface="Times New Roman" panose="02020603050405020304" pitchFamily="18" charset="0"/>
-                <a:cs typeface="Times New Roman" panose="02020603050405020304" pitchFamily="18" charset="0"/>
-              </a:rPr>
-              <a:t>Информационная панель</a:t>
-            </a:r>
-          </a:p>
-          <a:p>
-            <a:pPr algn="l">
-              <a:spcBef>
-                <a:spcPts val="450"/>
-              </a:spcBef>
-              <a:buFont typeface="Arial" panose="020B0604020202020204" pitchFamily="34" charset="0"/>
-              <a:buChar char="•"/>
-            </a:pPr>
-            <a:r>
-              <a:rPr lang="ru-RU" b="0" i="0" dirty="0">
-                <a:effectLst/>
-                <a:latin typeface="Times New Roman" panose="02020603050405020304" pitchFamily="18" charset="0"/>
-                <a:cs typeface="Times New Roman" panose="02020603050405020304" pitchFamily="18" charset="0"/>
-              </a:rPr>
-              <a:t>Таблица испытаний</a:t>
-            </a:r>
-          </a:p>
-          <a:p>
-            <a:pPr algn="l">
-              <a:spcBef>
-                <a:spcPts val="450"/>
-              </a:spcBef>
-              <a:buFont typeface="Arial" panose="020B0604020202020204" pitchFamily="34" charset="0"/>
-              <a:buChar char="•"/>
-            </a:pPr>
-            <a:r>
-              <a:rPr lang="ru-RU" b="0" i="0" dirty="0">
-                <a:effectLst/>
-                <a:latin typeface="Times New Roman" panose="02020603050405020304" pitchFamily="18" charset="0"/>
-                <a:cs typeface="Times New Roman" panose="02020603050405020304" pitchFamily="18" charset="0"/>
-              </a:rPr>
-              <a:t>Блок принятия решения (с комментарием, обязательным при блокировке)</a:t>
-            </a:r>
-          </a:p>
-          <a:p>
-            <a:pPr algn="l">
-              <a:spcBef>
-                <a:spcPts val="450"/>
-              </a:spcBef>
-              <a:buFont typeface="Arial" panose="020B0604020202020204" pitchFamily="34" charset="0"/>
-              <a:buChar char="•"/>
-            </a:pPr>
-            <a:r>
-              <a:rPr lang="ru-RU" b="0" i="0" dirty="0">
-                <a:effectLst/>
-                <a:latin typeface="Times New Roman" panose="02020603050405020304" pitchFamily="18" charset="0"/>
-                <a:cs typeface="Times New Roman" panose="02020603050405020304" pitchFamily="18" charset="0"/>
-              </a:rPr>
-              <a:t>История решений</a:t>
-            </a:r>
-          </a:p>
-        </p:txBody>
-      </p:sp>
-      <p:sp>
-        <p:nvSpPr>
-          <p:cNvPr id="7" name="TextBox 6">
-            <a:extLst>
-              <a:ext uri="{FF2B5EF4-FFF2-40B4-BE49-F238E27FC236}">
-                <a16:creationId xmlns:a16="http://schemas.microsoft.com/office/drawing/2014/main" id="{27A5AD90-FBB4-069A-DA73-8722B249FB10}"/>
-              </a:ext>
-            </a:extLst>
-          </p:cNvPr>
-          <p:cNvSpPr txBox="1"/>
-          <p:nvPr/>
-        </p:nvSpPr>
-        <p:spPr>
-          <a:xfrm>
-            <a:off x="457200" y="-2280"/>
-            <a:ext cx="8686800" cy="404406"/>
-          </a:xfrm>
-          <a:prstGeom prst="rect">
-            <a:avLst/>
-          </a:prstGeom>
-          <a:noFill/>
-        </p:spPr>
-        <p:txBody>
-          <a:bodyPr wrap="square">
-            <a:spAutoFit/>
-          </a:bodyPr>
-          <a:lstStyle/>
-          <a:p>
-            <a:pPr algn="ctr">
-              <a:lnSpc>
-                <a:spcPts val="2400"/>
-              </a:lnSpc>
-              <a:spcBef>
-                <a:spcPts val="2400"/>
-              </a:spcBef>
-              <a:spcAft>
-                <a:spcPts val="1200"/>
-              </a:spcAft>
-              <a:buNone/>
-            </a:pPr>
-            <a:r>
-              <a:rPr lang="ru-RU" sz="2400" b="1" dirty="0">
-                <a:effectLst/>
-                <a:latin typeface="Times New Roman" panose="02020603050405020304" pitchFamily="18" charset="0"/>
-                <a:cs typeface="Times New Roman" panose="02020603050405020304" pitchFamily="18" charset="0"/>
-              </a:rPr>
-              <a:t>Задание 4. Модуль лаборатории (</a:t>
-            </a:r>
-            <a:r>
-              <a:rPr lang="ru-RU" sz="2400" b="1" dirty="0" err="1">
-                <a:effectLst/>
-                <a:latin typeface="Times New Roman" panose="02020603050405020304" pitchFamily="18" charset="0"/>
-                <a:cs typeface="Times New Roman" panose="02020603050405020304" pitchFamily="18" charset="0"/>
-              </a:rPr>
-              <a:t>AgroControl.Laboratory</a:t>
-            </a:r>
-            <a:r>
-              <a:rPr lang="ru-RU" sz="2400" b="1" dirty="0">
-                <a:effectLst/>
-                <a:latin typeface="Times New Roman" panose="02020603050405020304" pitchFamily="18" charset="0"/>
-                <a:cs typeface="Times New Roman" panose="02020603050405020304" pitchFamily="18" charset="0"/>
-              </a:rPr>
-              <a:t>)</a:t>
-            </a:r>
-          </a:p>
-        </p:txBody>
-      </p:sp>
-      <p:sp>
-        <p:nvSpPr>
-          <p:cNvPr id="9" name="TextBox 8">
-            <a:extLst>
-              <a:ext uri="{FF2B5EF4-FFF2-40B4-BE49-F238E27FC236}">
-                <a16:creationId xmlns:a16="http://schemas.microsoft.com/office/drawing/2014/main" id="{2DF64B90-893E-9E00-93BA-5567FD9BE99C}"/>
-              </a:ext>
-            </a:extLst>
-          </p:cNvPr>
-          <p:cNvSpPr txBox="1"/>
-          <p:nvPr/>
-        </p:nvSpPr>
-        <p:spPr>
-          <a:xfrm>
-            <a:off x="-12331" y="537797"/>
-            <a:ext cx="9144000" cy="646331"/>
-          </a:xfrm>
-          <a:prstGeom prst="rect">
-            <a:avLst/>
-          </a:prstGeom>
-          <a:noFill/>
-        </p:spPr>
-        <p:txBody>
-          <a:bodyPr wrap="square">
-            <a:spAutoFit/>
-          </a:bodyPr>
-          <a:lstStyle/>
-          <a:p>
-            <a:pPr algn="l">
-              <a:spcBef>
-                <a:spcPts val="1200"/>
-              </a:spcBef>
-              <a:spcAft>
-                <a:spcPts val="1200"/>
-              </a:spcAft>
-              <a:buNone/>
-            </a:pPr>
-            <a:r>
-              <a:rPr lang="ru-RU" b="1" i="0" dirty="0">
-                <a:effectLst/>
-                <a:latin typeface="Times New Roman" panose="02020603050405020304" pitchFamily="18" charset="0"/>
-                <a:cs typeface="Times New Roman" panose="02020603050405020304" pitchFamily="18" charset="0"/>
-              </a:rPr>
-              <a:t>Краткое описание:</a:t>
-            </a:r>
-            <a:br>
-              <a:rPr lang="ru-RU" b="0" i="0" dirty="0">
-                <a:effectLst/>
-                <a:latin typeface="Times New Roman" panose="02020603050405020304" pitchFamily="18" charset="0"/>
-                <a:cs typeface="Times New Roman" panose="02020603050405020304" pitchFamily="18" charset="0"/>
-              </a:rPr>
-            </a:br>
-            <a:r>
-              <a:rPr lang="ru-RU" b="0" i="0" dirty="0">
-                <a:effectLst/>
-                <a:latin typeface="Times New Roman" panose="02020603050405020304" pitchFamily="18" charset="0"/>
-                <a:cs typeface="Times New Roman" panose="02020603050405020304" pitchFamily="18" charset="0"/>
-              </a:rPr>
-              <a:t>WPF-приложение для контроля качества сырья и готовой продукции.</a:t>
-            </a:r>
-          </a:p>
-        </p:txBody>
-      </p:sp>
-      <p:pic>
-        <p:nvPicPr>
-          <p:cNvPr id="10" name="Рисунок 9">
-            <a:extLst>
-              <a:ext uri="{FF2B5EF4-FFF2-40B4-BE49-F238E27FC236}">
-                <a16:creationId xmlns:a16="http://schemas.microsoft.com/office/drawing/2014/main" id="{26E8057E-43B8-D818-3492-B5B7DBC9BC3A}"/>
-              </a:ext>
-            </a:extLst>
-          </p:cNvPr>
-          <p:cNvPicPr>
-            <a:picLocks noChangeAspect="1"/>
-          </p:cNvPicPr>
-          <p:nvPr/>
-        </p:nvPicPr>
-        <p:blipFill>
-          <a:blip r:embed="rId2"/>
-          <a:stretch>
-            <a:fillRect/>
-          </a:stretch>
-        </p:blipFill>
-        <p:spPr>
-          <a:xfrm>
-            <a:off x="5500012" y="1393919"/>
-            <a:ext cx="3639075" cy="2886018"/>
-          </a:xfrm>
-          <a:prstGeom prst="rect">
-            <a:avLst/>
-          </a:prstGeom>
-          <a:ln>
-            <a:solidFill>
-              <a:schemeClr val="tx1"/>
-            </a:solidFill>
-          </a:ln>
-        </p:spPr>
-      </p:pic>
-      <p:pic>
-        <p:nvPicPr>
-          <p:cNvPr id="11" name="Рисунок 10">
-            <a:extLst>
-              <a:ext uri="{FF2B5EF4-FFF2-40B4-BE49-F238E27FC236}">
-                <a16:creationId xmlns:a16="http://schemas.microsoft.com/office/drawing/2014/main" id="{1EBC535F-AFBB-6C04-49C6-D34DA5FD979E}"/>
-              </a:ext>
-            </a:extLst>
-          </p:cNvPr>
-          <p:cNvPicPr>
-            <a:picLocks noChangeAspect="1"/>
-          </p:cNvPicPr>
-          <p:nvPr/>
-        </p:nvPicPr>
-        <p:blipFill>
-          <a:blip r:embed="rId3"/>
-          <a:stretch>
-            <a:fillRect/>
-          </a:stretch>
-        </p:blipFill>
-        <p:spPr>
-          <a:xfrm>
-            <a:off x="2759402" y="3279142"/>
-            <a:ext cx="2711270" cy="3275628"/>
-          </a:xfrm>
-          <a:prstGeom prst="rect">
-            <a:avLst/>
-          </a:prstGeom>
-          <a:ln>
-            <a:solidFill>
-              <a:schemeClr val="tx1"/>
-            </a:solidFill>
-          </a:ln>
-        </p:spPr>
-      </p:pic>
-      <p:sp>
-        <p:nvSpPr>
-          <p:cNvPr id="12" name="Объект 2">
-            <a:extLst>
-              <a:ext uri="{FF2B5EF4-FFF2-40B4-BE49-F238E27FC236}">
-                <a16:creationId xmlns:a16="http://schemas.microsoft.com/office/drawing/2014/main" id="{B81CB76A-0391-1B6D-C625-0E36722C6BAE}"/>
-              </a:ext>
-            </a:extLst>
-          </p:cNvPr>
-          <p:cNvSpPr txBox="1">
-            <a:spLocks/>
-          </p:cNvSpPr>
-          <p:nvPr/>
-        </p:nvSpPr>
-        <p:spPr>
-          <a:xfrm>
-            <a:off x="2987824" y="6550244"/>
-            <a:ext cx="2711270" cy="392907"/>
-          </a:xfrm>
-          <a:prstGeom prst="rect">
-            <a:avLst/>
-          </a:prstGeom>
-        </p:spPr>
-        <p:txBody>
-          <a:bodyPr vert="horz" lIns="91440" tIns="45720" rIns="91440" bIns="45720" rtlCol="0">
-            <a:noAutofit/>
-          </a:bodyPr>
-          <a:lstStyle>
-            <a:lvl1pPr marL="342900" indent="-342900" algn="l" defTabSz="914400" rtl="0" eaLnBrk="1" latinLnBrk="0" hangingPunct="1">
-              <a:spcBef>
-                <a:spcPct val="20000"/>
-              </a:spcBef>
-              <a:buFont typeface="Arial" pitchFamily="34" charset="0"/>
-              <a:buChar char="•"/>
-              <a:defRPr sz="3200" kern="1200">
-                <a:solidFill>
-                  <a:schemeClr val="tx1"/>
-                </a:solidFill>
-                <a:latin typeface="+mn-lt"/>
-                <a:ea typeface="+mn-ea"/>
-                <a:cs typeface="+mn-cs"/>
-              </a:defRPr>
-            </a:lvl1pPr>
-            <a:lvl2pPr marL="742950" indent="-285750" algn="l" defTabSz="914400" rtl="0" eaLnBrk="1" latinLnBrk="0" hangingPunct="1">
-              <a:spcBef>
-                <a:spcPct val="20000"/>
-              </a:spcBef>
-              <a:buFont typeface="Arial" pitchFamily="34" charset="0"/>
-              <a:buChar char="–"/>
-              <a:defRPr sz="2800" kern="1200">
-                <a:solidFill>
-                  <a:schemeClr val="tx1"/>
-                </a:solidFill>
-                <a:latin typeface="+mn-lt"/>
-                <a:ea typeface="+mn-ea"/>
-                <a:cs typeface="+mn-cs"/>
-              </a:defRPr>
-            </a:lvl2pPr>
-            <a:lvl3pPr marL="1143000" indent="-228600" algn="l" defTabSz="914400" rtl="0" eaLnBrk="1" latinLnBrk="0" hangingPunct="1">
-              <a:spcBef>
-                <a:spcPct val="20000"/>
-              </a:spcBef>
-              <a:buFont typeface="Arial" pitchFamily="34" charset="0"/>
-              <a:buChar char="•"/>
-              <a:defRPr sz="2400" kern="1200">
-                <a:solidFill>
-                  <a:schemeClr val="tx1"/>
-                </a:solidFill>
-                <a:latin typeface="+mn-lt"/>
-                <a:ea typeface="+mn-ea"/>
-                <a:cs typeface="+mn-cs"/>
-              </a:defRPr>
-            </a:lvl3pPr>
-            <a:lvl4pPr marL="1600200" indent="-228600" algn="l" defTabSz="914400" rtl="0" eaLnBrk="1" latinLnBrk="0" hangingPunct="1">
-              <a:spcBef>
-                <a:spcPct val="20000"/>
-              </a:spcBef>
-              <a:buFont typeface="Arial" pitchFamily="34" charset="0"/>
-              <a:buChar char="–"/>
-              <a:defRPr sz="2000" kern="1200">
-                <a:solidFill>
-                  <a:schemeClr val="tx1"/>
-                </a:solidFill>
-                <a:latin typeface="+mn-lt"/>
-                <a:ea typeface="+mn-ea"/>
-                <a:cs typeface="+mn-cs"/>
-              </a:defRPr>
-            </a:lvl4pPr>
-            <a:lvl5pPr marL="2057400" indent="-228600" algn="l" defTabSz="914400" rtl="0" eaLnBrk="1" latinLnBrk="0" hangingPunct="1">
-              <a:spcBef>
-                <a:spcPct val="20000"/>
-              </a:spcBef>
-              <a:buFont typeface="Arial" pitchFamily="34" charset="0"/>
-              <a:buChar char="»"/>
-              <a:defRPr sz="2000" kern="1200">
-                <a:solidFill>
-                  <a:schemeClr val="tx1"/>
-                </a:solidFill>
-                <a:latin typeface="+mn-lt"/>
-                <a:ea typeface="+mn-ea"/>
-                <a:cs typeface="+mn-cs"/>
-              </a:defRPr>
-            </a:lvl5pPr>
-            <a:lvl6pPr marL="2514600" indent="-228600" algn="l" defTabSz="914400" rtl="0" eaLnBrk="1" latinLnBrk="0" hangingPunct="1">
-              <a:spcBef>
-                <a:spcPct val="20000"/>
-              </a:spcBef>
-              <a:buFont typeface="Arial" pitchFamily="34" charset="0"/>
-              <a:buChar char="•"/>
-              <a:defRPr sz="2000" kern="1200">
-                <a:solidFill>
-                  <a:schemeClr val="tx1"/>
-                </a:solidFill>
-                <a:latin typeface="+mn-lt"/>
-                <a:ea typeface="+mn-ea"/>
-                <a:cs typeface="+mn-cs"/>
-              </a:defRPr>
-            </a:lvl6pPr>
-            <a:lvl7pPr marL="2971800" indent="-228600" algn="l" defTabSz="914400" rtl="0" eaLnBrk="1" latinLnBrk="0" hangingPunct="1">
-              <a:spcBef>
-                <a:spcPct val="20000"/>
-              </a:spcBef>
-              <a:buFont typeface="Arial" pitchFamily="34" charset="0"/>
-              <a:buChar char="•"/>
-              <a:defRPr sz="2000" kern="1200">
-                <a:solidFill>
-                  <a:schemeClr val="tx1"/>
-                </a:solidFill>
-                <a:latin typeface="+mn-lt"/>
-                <a:ea typeface="+mn-ea"/>
-                <a:cs typeface="+mn-cs"/>
-              </a:defRPr>
-            </a:lvl7pPr>
-            <a:lvl8pPr marL="3429000" indent="-228600" algn="l" defTabSz="914400" rtl="0" eaLnBrk="1" latinLnBrk="0" hangingPunct="1">
-              <a:spcBef>
-                <a:spcPct val="20000"/>
-              </a:spcBef>
-              <a:buFont typeface="Arial" pitchFamily="34" charset="0"/>
-              <a:buChar char="•"/>
-              <a:defRPr sz="2000" kern="1200">
-                <a:solidFill>
-                  <a:schemeClr val="tx1"/>
-                </a:solidFill>
-                <a:latin typeface="+mn-lt"/>
-                <a:ea typeface="+mn-ea"/>
-                <a:cs typeface="+mn-cs"/>
-              </a:defRPr>
-            </a:lvl8pPr>
-            <a:lvl9pPr marL="3886200" indent="-228600" algn="l" defTabSz="914400" rtl="0" eaLnBrk="1" latinLnBrk="0" hangingPunct="1">
-              <a:spcBef>
-                <a:spcPct val="20000"/>
-              </a:spcBef>
-              <a:buFont typeface="Arial" pitchFamily="34" charset="0"/>
-              <a:buChar char="•"/>
-              <a:defRPr sz="2000" kern="1200">
-                <a:solidFill>
-                  <a:schemeClr val="tx1"/>
-                </a:solidFill>
-                <a:latin typeface="+mn-lt"/>
-                <a:ea typeface="+mn-ea"/>
-                <a:cs typeface="+mn-cs"/>
-              </a:defRPr>
-            </a:lvl9pPr>
-          </a:lstStyle>
-          <a:p>
-            <a:pPr marL="0" indent="0">
-              <a:buNone/>
-            </a:pPr>
-            <a:r>
-              <a:rPr lang="ru-RU" sz="1600" dirty="0">
-                <a:latin typeface="Times New Roman" panose="02020603050405020304" pitchFamily="18" charset="0"/>
-                <a:cs typeface="Times New Roman" panose="02020603050405020304" pitchFamily="18" charset="0"/>
-              </a:rPr>
-              <a:t>Форма создания испытания</a:t>
-            </a:r>
-          </a:p>
-        </p:txBody>
-      </p:sp>
-    </p:spTree>
-    <p:extLst>
-      <p:ext uri="{BB962C8B-B14F-4D97-AF65-F5344CB8AC3E}">
-        <p14:creationId xmlns:p14="http://schemas.microsoft.com/office/powerpoint/2010/main" val="1976711635"/>
       </p:ext>
     </p:extLst>
   </p:cSld>
